--- a/public/downloads/games/capital-quiz/rules.pptx
+++ b/public/downloads/games/capital-quiz/rules.pptx
@@ -69,20 +69,17 @@
     <p:sldId id="317" r:id="rId67"/>
     <p:sldId id="318" r:id="rId68"/>
     <p:sldId id="319" r:id="rId69"/>
+    <p:sldId id="320" r:id="rId70"/>
   </p:sldIdLst>
   <p:sldSz cx="18288000" cy="10287000"/>
   <p:notesSz cx="6858000" cy="9144000"/>
   <p:embeddedFontLst>
     <p:embeddedFont>
-      <p:font typeface="Jua" charset="1" panose="00000000000000000000"/>
-      <p:regular r:id="rId70"/>
-    </p:embeddedFont>
-    <p:embeddedFont>
-      <p:font typeface="TDTD갬성명조" charset="1" panose="02000503000000000000"/>
+      <p:font typeface="무궁화 고딕" charset="1" panose="02020603020101020101"/>
       <p:regular r:id="rId71"/>
     </p:embeddedFont>
     <p:embeddedFont>
-      <p:font typeface="TDTD가온" charset="1" panose="02000503000000000000"/>
+      <p:font typeface="무궁화 고딕 Bold" charset="1" panose="02020603020101020101"/>
       <p:regular r:id="rId72"/>
     </p:embeddedFont>
   </p:embeddedFontLst>
@@ -3201,8 +3198,8 @@
         </p:nvSpPr>
         <p:spPr>
           <a:xfrm rot="0">
-            <a:off x="1028700" y="3892867"/>
-            <a:ext cx="15555091" cy="2200275"/>
+            <a:off x="1028700" y="4178617"/>
+            <a:ext cx="15555091" cy="1914525"/>
           </a:xfrm>
           <a:prstGeom prst="rect">
             <a:avLst/>
@@ -3224,10 +3221,10 @@
                 <a:solidFill>
                   <a:srgbClr val="FFFAEF"/>
                 </a:solidFill>
-                <a:latin typeface="Jua"/>
-                <a:ea typeface="Jua"/>
-                <a:cs typeface="Jua"/>
-                <a:sym typeface="Jua"/>
+                <a:latin typeface="무궁화 고딕"/>
+                <a:ea typeface="무궁화 고딕"/>
+                <a:cs typeface="무궁화 고딕"/>
+                <a:sym typeface="무궁화 고딕"/>
               </a:rPr>
               <a:t>수도 맞추기</a:t>
             </a:r>
@@ -3242,8 +3239,8 @@
         </p:nvSpPr>
         <p:spPr>
           <a:xfrm rot="0">
-            <a:off x="15264803" y="9812655"/>
-            <a:ext cx="2637975" cy="474345"/>
+            <a:off x="14021540" y="9822180"/>
+            <a:ext cx="3881239" cy="464820"/>
           </a:xfrm>
           <a:prstGeom prst="rect">
             <a:avLst/>
@@ -3268,10 +3265,10 @@
                 <a:solidFill>
                   <a:srgbClr val="FFFFFF"/>
                 </a:solidFill>
-                <a:latin typeface="TDTD갬성명조"/>
-                <a:ea typeface="TDTD갬성명조"/>
-                <a:cs typeface="TDTD갬성명조"/>
-                <a:sym typeface="TDTD갬성명조"/>
+                <a:latin typeface="무궁화 고딕"/>
+                <a:ea typeface="무궁화 고딕"/>
+                <a:cs typeface="무궁화 고딕"/>
+                <a:sym typeface="무궁화 고딕"/>
               </a:rPr>
               <a:t>ⓒ 2026. Sunday Play</a:t>
             </a:r>
@@ -3310,62 +3307,66 @@
           <a:chExt cx="0" cy="0"/>
         </a:xfrm>
       </p:grpSpPr>
-      <p:sp>
-        <p:nvSpPr>
-          <p:cNvPr name="Freeform 2" id="2"/>
-          <p:cNvSpPr/>
-          <p:nvPr/>
-        </p:nvSpPr>
+      <p:pic>
+        <p:nvPicPr>
+          <p:cNvPr name="Picture 2" id="2"/>
+          <p:cNvPicPr>
+            <a:picLocks noChangeAspect="true"/>
+          </p:cNvPicPr>
+          <p:nvPr/>
+        </p:nvPicPr>
+        <p:blipFill>
+          <a:blip r:embed="rId2"/>
+          <a:srcRect l="0" t="0" r="0" b="0"/>
+          <a:stretch>
+            <a:fillRect/>
+          </a:stretch>
+        </p:blipFill>
         <p:spPr>
           <a:xfrm flipH="false" flipV="false" rot="0">
-            <a:off x="4778195" y="1028700"/>
-            <a:ext cx="8731610" cy="5810489"/>
-          </a:xfrm>
-          <a:custGeom>
-            <a:avLst/>
-            <a:gdLst/>
-            <a:ahLst/>
-            <a:cxnLst/>
-            <a:rect r="r" b="b" t="t" l="l"/>
-            <a:pathLst>
-              <a:path h="5810489" w="8731610">
-                <a:moveTo>
-                  <a:pt x="0" y="0"/>
-                </a:moveTo>
-                <a:lnTo>
-                  <a:pt x="8731610" y="0"/>
-                </a:lnTo>
-                <a:lnTo>
-                  <a:pt x="8731610" y="5810489"/>
-                </a:lnTo>
-                <a:lnTo>
-                  <a:pt x="0" y="5810489"/>
-                </a:lnTo>
-                <a:lnTo>
-                  <a:pt x="0" y="0"/>
-                </a:lnTo>
-                <a:close/>
-              </a:path>
-            </a:pathLst>
-          </a:custGeom>
-          <a:blipFill>
-            <a:blip r:embed="rId2"/>
-            <a:stretch>
-              <a:fillRect l="0" t="0" r="0" b="0"/>
-            </a:stretch>
-          </a:blipFill>
-        </p:spPr>
-      </p:sp>
-      <p:sp>
-        <p:nvSpPr>
-          <p:cNvPr name="TextBox 3" id="3"/>
+            <a:off x="13655377" y="6809666"/>
+            <a:ext cx="6229999" cy="6954669"/>
+          </a:xfrm>
+          <a:prstGeom prst="rect">
+            <a:avLst/>
+          </a:prstGeom>
+        </p:spPr>
+      </p:pic>
+      <p:pic>
+        <p:nvPicPr>
+          <p:cNvPr name="Picture 3" id="3"/>
+          <p:cNvPicPr>
+            <a:picLocks noChangeAspect="true"/>
+          </p:cNvPicPr>
+          <p:nvPr/>
+        </p:nvPicPr>
+        <p:blipFill>
+          <a:blip r:embed="rId3"/>
+          <a:srcRect l="0" t="0" r="0" b="0"/>
+          <a:stretch>
+            <a:fillRect/>
+          </a:stretch>
+        </p:blipFill>
+        <p:spPr>
+          <a:xfrm flipH="false" flipV="false" rot="0">
+            <a:off x="0" y="0"/>
+            <a:ext cx="6925457" cy="4700654"/>
+          </a:xfrm>
+          <a:prstGeom prst="rect">
+            <a:avLst/>
+          </a:prstGeom>
+        </p:spPr>
+      </p:pic>
+      <p:sp>
+        <p:nvSpPr>
+          <p:cNvPr name="TextBox 4" id="4"/>
           <p:cNvSpPr txBox="true"/>
           <p:nvPr/>
         </p:nvSpPr>
         <p:spPr>
           <a:xfrm rot="0">
-            <a:off x="2717556" y="7058025"/>
-            <a:ext cx="12852888" cy="2200275"/>
+            <a:off x="2717556" y="4181475"/>
+            <a:ext cx="12852888" cy="1914525"/>
           </a:xfrm>
           <a:prstGeom prst="rect">
             <a:avLst/>
@@ -3387,12 +3388,12 @@
                 <a:solidFill>
                   <a:srgbClr val="000000"/>
                 </a:solidFill>
-                <a:latin typeface="Jua"/>
-                <a:ea typeface="Jua"/>
-                <a:cs typeface="Jua"/>
-                <a:sym typeface="Jua"/>
+                <a:latin typeface="무궁화 고딕"/>
+                <a:ea typeface="무궁화 고딕"/>
+                <a:cs typeface="무궁화 고딕"/>
+                <a:sym typeface="무궁화 고딕"/>
               </a:rPr>
-              <a:t>중국</a:t>
+              <a:t>도쿄</a:t>
             </a:r>
           </a:p>
         </p:txBody>
@@ -3429,66 +3430,62 @@
           <a:chExt cx="0" cy="0"/>
         </a:xfrm>
       </p:grpSpPr>
-      <p:pic>
-        <p:nvPicPr>
-          <p:cNvPr name="Picture 2" id="2"/>
-          <p:cNvPicPr>
-            <a:picLocks noChangeAspect="true"/>
-          </p:cNvPicPr>
-          <p:nvPr/>
-        </p:nvPicPr>
-        <p:blipFill>
-          <a:blip r:embed="rId2"/>
-          <a:srcRect l="0" t="0" r="0" b="0"/>
-          <a:stretch>
-            <a:fillRect/>
-          </a:stretch>
-        </p:blipFill>
+      <p:sp>
+        <p:nvSpPr>
+          <p:cNvPr name="Freeform 2" id="2"/>
+          <p:cNvSpPr/>
+          <p:nvPr/>
+        </p:nvSpPr>
         <p:spPr>
           <a:xfrm flipH="false" flipV="false" rot="0">
-            <a:off x="13655377" y="6809666"/>
-            <a:ext cx="6229999" cy="6954669"/>
-          </a:xfrm>
-          <a:prstGeom prst="rect">
-            <a:avLst/>
-          </a:prstGeom>
-        </p:spPr>
-      </p:pic>
-      <p:pic>
-        <p:nvPicPr>
-          <p:cNvPr name="Picture 3" id="3"/>
-          <p:cNvPicPr>
-            <a:picLocks noChangeAspect="true"/>
-          </p:cNvPicPr>
-          <p:nvPr/>
-        </p:nvPicPr>
-        <p:blipFill>
-          <a:blip r:embed="rId3"/>
-          <a:srcRect l="0" t="0" r="0" b="0"/>
-          <a:stretch>
-            <a:fillRect/>
-          </a:stretch>
-        </p:blipFill>
-        <p:spPr>
-          <a:xfrm flipH="false" flipV="false" rot="0">
-            <a:off x="0" y="0"/>
-            <a:ext cx="6925457" cy="4700654"/>
-          </a:xfrm>
-          <a:prstGeom prst="rect">
-            <a:avLst/>
-          </a:prstGeom>
-        </p:spPr>
-      </p:pic>
-      <p:sp>
-        <p:nvSpPr>
-          <p:cNvPr name="TextBox 4" id="4"/>
+            <a:off x="4778195" y="1028700"/>
+            <a:ext cx="8731610" cy="5810489"/>
+          </a:xfrm>
+          <a:custGeom>
+            <a:avLst/>
+            <a:gdLst/>
+            <a:ahLst/>
+            <a:cxnLst/>
+            <a:rect r="r" b="b" t="t" l="l"/>
+            <a:pathLst>
+              <a:path h="5810489" w="8731610">
+                <a:moveTo>
+                  <a:pt x="0" y="0"/>
+                </a:moveTo>
+                <a:lnTo>
+                  <a:pt x="8731610" y="0"/>
+                </a:lnTo>
+                <a:lnTo>
+                  <a:pt x="8731610" y="5810489"/>
+                </a:lnTo>
+                <a:lnTo>
+                  <a:pt x="0" y="5810489"/>
+                </a:lnTo>
+                <a:lnTo>
+                  <a:pt x="0" y="0"/>
+                </a:lnTo>
+                <a:close/>
+              </a:path>
+            </a:pathLst>
+          </a:custGeom>
+          <a:blipFill>
+            <a:blip r:embed="rId2"/>
+            <a:stretch>
+              <a:fillRect l="0" t="0" r="0" b="0"/>
+            </a:stretch>
+          </a:blipFill>
+        </p:spPr>
+      </p:sp>
+      <p:sp>
+        <p:nvSpPr>
+          <p:cNvPr name="TextBox 3" id="3"/>
           <p:cNvSpPr txBox="true"/>
           <p:nvPr/>
         </p:nvSpPr>
         <p:spPr>
           <a:xfrm rot="0">
-            <a:off x="2717556" y="3895725"/>
-            <a:ext cx="12852888" cy="2200275"/>
+            <a:off x="2717556" y="7343775"/>
+            <a:ext cx="12852888" cy="1914525"/>
           </a:xfrm>
           <a:prstGeom prst="rect">
             <a:avLst/>
@@ -3510,12 +3507,12 @@
                 <a:solidFill>
                   <a:srgbClr val="000000"/>
                 </a:solidFill>
-                <a:latin typeface="Jua"/>
-                <a:ea typeface="Jua"/>
-                <a:cs typeface="Jua"/>
-                <a:sym typeface="Jua"/>
+                <a:latin typeface="무궁화 고딕"/>
+                <a:ea typeface="무궁화 고딕"/>
+                <a:cs typeface="무궁화 고딕"/>
+                <a:sym typeface="무궁화 고딕"/>
               </a:rPr>
-              <a:t>베이징</a:t>
+              <a:t>중국</a:t>
             </a:r>
           </a:p>
         </p:txBody>
@@ -3552,62 +3549,66 @@
           <a:chExt cx="0" cy="0"/>
         </a:xfrm>
       </p:grpSpPr>
-      <p:sp>
-        <p:nvSpPr>
-          <p:cNvPr name="Freeform 2" id="2"/>
-          <p:cNvSpPr/>
-          <p:nvPr/>
-        </p:nvSpPr>
+      <p:pic>
+        <p:nvPicPr>
+          <p:cNvPr name="Picture 2" id="2"/>
+          <p:cNvPicPr>
+            <a:picLocks noChangeAspect="true"/>
+          </p:cNvPicPr>
+          <p:nvPr/>
+        </p:nvPicPr>
+        <p:blipFill>
+          <a:blip r:embed="rId2"/>
+          <a:srcRect l="0" t="0" r="0" b="0"/>
+          <a:stretch>
+            <a:fillRect/>
+          </a:stretch>
+        </p:blipFill>
         <p:spPr>
           <a:xfrm flipH="false" flipV="false" rot="0">
-            <a:off x="4166937" y="1028700"/>
-            <a:ext cx="9954126" cy="4977063"/>
-          </a:xfrm>
-          <a:custGeom>
-            <a:avLst/>
-            <a:gdLst/>
-            <a:ahLst/>
-            <a:cxnLst/>
-            <a:rect r="r" b="b" t="t" l="l"/>
-            <a:pathLst>
-              <a:path h="4977063" w="9954126">
-                <a:moveTo>
-                  <a:pt x="0" y="0"/>
-                </a:moveTo>
-                <a:lnTo>
-                  <a:pt x="9954126" y="0"/>
-                </a:lnTo>
-                <a:lnTo>
-                  <a:pt x="9954126" y="4977063"/>
-                </a:lnTo>
-                <a:lnTo>
-                  <a:pt x="0" y="4977063"/>
-                </a:lnTo>
-                <a:lnTo>
-                  <a:pt x="0" y="0"/>
-                </a:lnTo>
-                <a:close/>
-              </a:path>
-            </a:pathLst>
-          </a:custGeom>
-          <a:blipFill>
-            <a:blip r:embed="rId2"/>
-            <a:stretch>
-              <a:fillRect l="0" t="0" r="0" b="0"/>
-            </a:stretch>
-          </a:blipFill>
-        </p:spPr>
-      </p:sp>
-      <p:sp>
-        <p:nvSpPr>
-          <p:cNvPr name="TextBox 3" id="3"/>
+            <a:off x="13655377" y="6809666"/>
+            <a:ext cx="6229999" cy="6954669"/>
+          </a:xfrm>
+          <a:prstGeom prst="rect">
+            <a:avLst/>
+          </a:prstGeom>
+        </p:spPr>
+      </p:pic>
+      <p:pic>
+        <p:nvPicPr>
+          <p:cNvPr name="Picture 3" id="3"/>
+          <p:cNvPicPr>
+            <a:picLocks noChangeAspect="true"/>
+          </p:cNvPicPr>
+          <p:nvPr/>
+        </p:nvPicPr>
+        <p:blipFill>
+          <a:blip r:embed="rId3"/>
+          <a:srcRect l="0" t="0" r="0" b="0"/>
+          <a:stretch>
+            <a:fillRect/>
+          </a:stretch>
+        </p:blipFill>
+        <p:spPr>
+          <a:xfrm flipH="false" flipV="false" rot="0">
+            <a:off x="0" y="0"/>
+            <a:ext cx="6925457" cy="4700654"/>
+          </a:xfrm>
+          <a:prstGeom prst="rect">
+            <a:avLst/>
+          </a:prstGeom>
+        </p:spPr>
+      </p:pic>
+      <p:sp>
+        <p:nvSpPr>
+          <p:cNvPr name="TextBox 4" id="4"/>
           <p:cNvSpPr txBox="true"/>
           <p:nvPr/>
         </p:nvSpPr>
         <p:spPr>
           <a:xfrm rot="0">
-            <a:off x="2717556" y="7058025"/>
-            <a:ext cx="12852888" cy="2200275"/>
+            <a:off x="2717556" y="4181475"/>
+            <a:ext cx="12852888" cy="1914525"/>
           </a:xfrm>
           <a:prstGeom prst="rect">
             <a:avLst/>
@@ -3629,12 +3630,12 @@
                 <a:solidFill>
                   <a:srgbClr val="000000"/>
                 </a:solidFill>
-                <a:latin typeface="Jua"/>
-                <a:ea typeface="Jua"/>
-                <a:cs typeface="Jua"/>
-                <a:sym typeface="Jua"/>
+                <a:latin typeface="무궁화 고딕"/>
+                <a:ea typeface="무궁화 고딕"/>
+                <a:cs typeface="무궁화 고딕"/>
+                <a:sym typeface="무궁화 고딕"/>
               </a:rPr>
-              <a:t>영국</a:t>
+              <a:t>베이징</a:t>
             </a:r>
           </a:p>
         </p:txBody>
@@ -3671,66 +3672,62 @@
           <a:chExt cx="0" cy="0"/>
         </a:xfrm>
       </p:grpSpPr>
-      <p:pic>
-        <p:nvPicPr>
-          <p:cNvPr name="Picture 2" id="2"/>
-          <p:cNvPicPr>
-            <a:picLocks noChangeAspect="true"/>
-          </p:cNvPicPr>
-          <p:nvPr/>
-        </p:nvPicPr>
-        <p:blipFill>
-          <a:blip r:embed="rId2"/>
-          <a:srcRect l="0" t="0" r="0" b="0"/>
-          <a:stretch>
-            <a:fillRect/>
-          </a:stretch>
-        </p:blipFill>
+      <p:sp>
+        <p:nvSpPr>
+          <p:cNvPr name="Freeform 2" id="2"/>
+          <p:cNvSpPr/>
+          <p:nvPr/>
+        </p:nvSpPr>
         <p:spPr>
           <a:xfrm flipH="false" flipV="false" rot="0">
-            <a:off x="13655377" y="6809666"/>
-            <a:ext cx="6229999" cy="6954669"/>
-          </a:xfrm>
-          <a:prstGeom prst="rect">
-            <a:avLst/>
-          </a:prstGeom>
-        </p:spPr>
-      </p:pic>
-      <p:pic>
-        <p:nvPicPr>
-          <p:cNvPr name="Picture 3" id="3"/>
-          <p:cNvPicPr>
-            <a:picLocks noChangeAspect="true"/>
-          </p:cNvPicPr>
-          <p:nvPr/>
-        </p:nvPicPr>
-        <p:blipFill>
-          <a:blip r:embed="rId3"/>
-          <a:srcRect l="0" t="0" r="0" b="0"/>
-          <a:stretch>
-            <a:fillRect/>
-          </a:stretch>
-        </p:blipFill>
-        <p:spPr>
-          <a:xfrm flipH="false" flipV="false" rot="0">
-            <a:off x="0" y="0"/>
-            <a:ext cx="6925457" cy="4700654"/>
-          </a:xfrm>
-          <a:prstGeom prst="rect">
-            <a:avLst/>
-          </a:prstGeom>
-        </p:spPr>
-      </p:pic>
-      <p:sp>
-        <p:nvSpPr>
-          <p:cNvPr name="TextBox 4" id="4"/>
+            <a:off x="4166937" y="1028700"/>
+            <a:ext cx="9954126" cy="4977063"/>
+          </a:xfrm>
+          <a:custGeom>
+            <a:avLst/>
+            <a:gdLst/>
+            <a:ahLst/>
+            <a:cxnLst/>
+            <a:rect r="r" b="b" t="t" l="l"/>
+            <a:pathLst>
+              <a:path h="4977063" w="9954126">
+                <a:moveTo>
+                  <a:pt x="0" y="0"/>
+                </a:moveTo>
+                <a:lnTo>
+                  <a:pt x="9954126" y="0"/>
+                </a:lnTo>
+                <a:lnTo>
+                  <a:pt x="9954126" y="4977063"/>
+                </a:lnTo>
+                <a:lnTo>
+                  <a:pt x="0" y="4977063"/>
+                </a:lnTo>
+                <a:lnTo>
+                  <a:pt x="0" y="0"/>
+                </a:lnTo>
+                <a:close/>
+              </a:path>
+            </a:pathLst>
+          </a:custGeom>
+          <a:blipFill>
+            <a:blip r:embed="rId2"/>
+            <a:stretch>
+              <a:fillRect l="0" t="0" r="0" b="0"/>
+            </a:stretch>
+          </a:blipFill>
+        </p:spPr>
+      </p:sp>
+      <p:sp>
+        <p:nvSpPr>
+          <p:cNvPr name="TextBox 3" id="3"/>
           <p:cNvSpPr txBox="true"/>
           <p:nvPr/>
         </p:nvSpPr>
         <p:spPr>
           <a:xfrm rot="0">
-            <a:off x="2717556" y="3895725"/>
-            <a:ext cx="12852888" cy="2200275"/>
+            <a:off x="2717556" y="7343775"/>
+            <a:ext cx="12852888" cy="1914525"/>
           </a:xfrm>
           <a:prstGeom prst="rect">
             <a:avLst/>
@@ -3752,12 +3749,12 @@
                 <a:solidFill>
                   <a:srgbClr val="000000"/>
                 </a:solidFill>
-                <a:latin typeface="Jua"/>
-                <a:ea typeface="Jua"/>
-                <a:cs typeface="Jua"/>
-                <a:sym typeface="Jua"/>
+                <a:latin typeface="무궁화 고딕"/>
+                <a:ea typeface="무궁화 고딕"/>
+                <a:cs typeface="무궁화 고딕"/>
+                <a:sym typeface="무궁화 고딕"/>
               </a:rPr>
-              <a:t>런던</a:t>
+              <a:t>영국</a:t>
             </a:r>
           </a:p>
         </p:txBody>
@@ -3794,62 +3791,66 @@
           <a:chExt cx="0" cy="0"/>
         </a:xfrm>
       </p:grpSpPr>
-      <p:sp>
-        <p:nvSpPr>
-          <p:cNvPr name="Freeform 2" id="2"/>
-          <p:cNvSpPr/>
-          <p:nvPr/>
-        </p:nvSpPr>
+      <p:pic>
+        <p:nvPicPr>
+          <p:cNvPr name="Picture 2" id="2"/>
+          <p:cNvPicPr>
+            <a:picLocks noChangeAspect="true"/>
+          </p:cNvPicPr>
+          <p:nvPr/>
+        </p:nvPicPr>
+        <p:blipFill>
+          <a:blip r:embed="rId2"/>
+          <a:srcRect l="0" t="0" r="0" b="0"/>
+          <a:stretch>
+            <a:fillRect/>
+          </a:stretch>
+        </p:blipFill>
         <p:spPr>
           <a:xfrm flipH="false" flipV="false" rot="0">
-            <a:off x="4906859" y="1028700"/>
-            <a:ext cx="8474281" cy="5965590"/>
-          </a:xfrm>
-          <a:custGeom>
-            <a:avLst/>
-            <a:gdLst/>
-            <a:ahLst/>
-            <a:cxnLst/>
-            <a:rect r="r" b="b" t="t" l="l"/>
-            <a:pathLst>
-              <a:path h="5965590" w="8474281">
-                <a:moveTo>
-                  <a:pt x="0" y="0"/>
-                </a:moveTo>
-                <a:lnTo>
-                  <a:pt x="8474282" y="0"/>
-                </a:lnTo>
-                <a:lnTo>
-                  <a:pt x="8474282" y="5965590"/>
-                </a:lnTo>
-                <a:lnTo>
-                  <a:pt x="0" y="5965590"/>
-                </a:lnTo>
-                <a:lnTo>
-                  <a:pt x="0" y="0"/>
-                </a:lnTo>
-                <a:close/>
-              </a:path>
-            </a:pathLst>
-          </a:custGeom>
-          <a:blipFill>
-            <a:blip r:embed="rId2"/>
-            <a:stretch>
-              <a:fillRect l="0" t="0" r="-5383" b="0"/>
-            </a:stretch>
-          </a:blipFill>
-        </p:spPr>
-      </p:sp>
-      <p:sp>
-        <p:nvSpPr>
-          <p:cNvPr name="TextBox 3" id="3"/>
+            <a:off x="13655377" y="6809666"/>
+            <a:ext cx="6229999" cy="6954669"/>
+          </a:xfrm>
+          <a:prstGeom prst="rect">
+            <a:avLst/>
+          </a:prstGeom>
+        </p:spPr>
+      </p:pic>
+      <p:pic>
+        <p:nvPicPr>
+          <p:cNvPr name="Picture 3" id="3"/>
+          <p:cNvPicPr>
+            <a:picLocks noChangeAspect="true"/>
+          </p:cNvPicPr>
+          <p:nvPr/>
+        </p:nvPicPr>
+        <p:blipFill>
+          <a:blip r:embed="rId3"/>
+          <a:srcRect l="0" t="0" r="0" b="0"/>
+          <a:stretch>
+            <a:fillRect/>
+          </a:stretch>
+        </p:blipFill>
+        <p:spPr>
+          <a:xfrm flipH="false" flipV="false" rot="0">
+            <a:off x="0" y="0"/>
+            <a:ext cx="6925457" cy="4700654"/>
+          </a:xfrm>
+          <a:prstGeom prst="rect">
+            <a:avLst/>
+          </a:prstGeom>
+        </p:spPr>
+      </p:pic>
+      <p:sp>
+        <p:nvSpPr>
+          <p:cNvPr name="TextBox 4" id="4"/>
           <p:cNvSpPr txBox="true"/>
           <p:nvPr/>
         </p:nvSpPr>
         <p:spPr>
           <a:xfrm rot="0">
-            <a:off x="2717556" y="7058025"/>
-            <a:ext cx="12852888" cy="2200275"/>
+            <a:off x="2717556" y="4181475"/>
+            <a:ext cx="12852888" cy="1914525"/>
           </a:xfrm>
           <a:prstGeom prst="rect">
             <a:avLst/>
@@ -3871,12 +3872,12 @@
                 <a:solidFill>
                   <a:srgbClr val="000000"/>
                 </a:solidFill>
-                <a:latin typeface="Jua"/>
-                <a:ea typeface="Jua"/>
-                <a:cs typeface="Jua"/>
-                <a:sym typeface="Jua"/>
+                <a:latin typeface="무궁화 고딕"/>
+                <a:ea typeface="무궁화 고딕"/>
+                <a:cs typeface="무궁화 고딕"/>
+                <a:sym typeface="무궁화 고딕"/>
               </a:rPr>
-              <a:t>프랑스</a:t>
+              <a:t>런던</a:t>
             </a:r>
           </a:p>
         </p:txBody>
@@ -3913,66 +3914,62 @@
           <a:chExt cx="0" cy="0"/>
         </a:xfrm>
       </p:grpSpPr>
-      <p:pic>
-        <p:nvPicPr>
-          <p:cNvPr name="Picture 2" id="2"/>
-          <p:cNvPicPr>
-            <a:picLocks noChangeAspect="true"/>
-          </p:cNvPicPr>
-          <p:nvPr/>
-        </p:nvPicPr>
-        <p:blipFill>
-          <a:blip r:embed="rId2"/>
-          <a:srcRect l="0" t="0" r="0" b="0"/>
-          <a:stretch>
-            <a:fillRect/>
-          </a:stretch>
-        </p:blipFill>
+      <p:sp>
+        <p:nvSpPr>
+          <p:cNvPr name="Freeform 2" id="2"/>
+          <p:cNvSpPr/>
+          <p:nvPr/>
+        </p:nvSpPr>
         <p:spPr>
           <a:xfrm flipH="false" flipV="false" rot="0">
-            <a:off x="13655377" y="6809666"/>
-            <a:ext cx="6229999" cy="6954669"/>
-          </a:xfrm>
-          <a:prstGeom prst="rect">
-            <a:avLst/>
-          </a:prstGeom>
-        </p:spPr>
-      </p:pic>
-      <p:pic>
-        <p:nvPicPr>
-          <p:cNvPr name="Picture 3" id="3"/>
-          <p:cNvPicPr>
-            <a:picLocks noChangeAspect="true"/>
-          </p:cNvPicPr>
-          <p:nvPr/>
-        </p:nvPicPr>
-        <p:blipFill>
-          <a:blip r:embed="rId3"/>
-          <a:srcRect l="0" t="0" r="0" b="0"/>
-          <a:stretch>
-            <a:fillRect/>
-          </a:stretch>
-        </p:blipFill>
-        <p:spPr>
-          <a:xfrm flipH="false" flipV="false" rot="0">
-            <a:off x="0" y="0"/>
-            <a:ext cx="6925457" cy="4700654"/>
-          </a:xfrm>
-          <a:prstGeom prst="rect">
-            <a:avLst/>
-          </a:prstGeom>
-        </p:spPr>
-      </p:pic>
-      <p:sp>
-        <p:nvSpPr>
-          <p:cNvPr name="TextBox 4" id="4"/>
+            <a:off x="4906859" y="1028700"/>
+            <a:ext cx="8474281" cy="5965590"/>
+          </a:xfrm>
+          <a:custGeom>
+            <a:avLst/>
+            <a:gdLst/>
+            <a:ahLst/>
+            <a:cxnLst/>
+            <a:rect r="r" b="b" t="t" l="l"/>
+            <a:pathLst>
+              <a:path h="5965590" w="8474281">
+                <a:moveTo>
+                  <a:pt x="0" y="0"/>
+                </a:moveTo>
+                <a:lnTo>
+                  <a:pt x="8474282" y="0"/>
+                </a:lnTo>
+                <a:lnTo>
+                  <a:pt x="8474282" y="5965590"/>
+                </a:lnTo>
+                <a:lnTo>
+                  <a:pt x="0" y="5965590"/>
+                </a:lnTo>
+                <a:lnTo>
+                  <a:pt x="0" y="0"/>
+                </a:lnTo>
+                <a:close/>
+              </a:path>
+            </a:pathLst>
+          </a:custGeom>
+          <a:blipFill>
+            <a:blip r:embed="rId2"/>
+            <a:stretch>
+              <a:fillRect l="0" t="0" r="-5383" b="0"/>
+            </a:stretch>
+          </a:blipFill>
+        </p:spPr>
+      </p:sp>
+      <p:sp>
+        <p:nvSpPr>
+          <p:cNvPr name="TextBox 3" id="3"/>
           <p:cNvSpPr txBox="true"/>
           <p:nvPr/>
         </p:nvSpPr>
         <p:spPr>
           <a:xfrm rot="0">
-            <a:off x="2717556" y="3895725"/>
-            <a:ext cx="12852888" cy="2200275"/>
+            <a:off x="2717556" y="7343775"/>
+            <a:ext cx="12852888" cy="1914525"/>
           </a:xfrm>
           <a:prstGeom prst="rect">
             <a:avLst/>
@@ -3994,12 +3991,12 @@
                 <a:solidFill>
                   <a:srgbClr val="000000"/>
                 </a:solidFill>
-                <a:latin typeface="Jua"/>
-                <a:ea typeface="Jua"/>
-                <a:cs typeface="Jua"/>
-                <a:sym typeface="Jua"/>
+                <a:latin typeface="무궁화 고딕"/>
+                <a:ea typeface="무궁화 고딕"/>
+                <a:cs typeface="무궁화 고딕"/>
+                <a:sym typeface="무궁화 고딕"/>
               </a:rPr>
-              <a:t>파리</a:t>
+              <a:t>프랑스</a:t>
             </a:r>
           </a:p>
         </p:txBody>
@@ -4036,62 +4033,66 @@
           <a:chExt cx="0" cy="0"/>
         </a:xfrm>
       </p:grpSpPr>
-      <p:sp>
-        <p:nvSpPr>
-          <p:cNvPr name="Freeform 2" id="2"/>
-          <p:cNvSpPr/>
-          <p:nvPr/>
-        </p:nvSpPr>
+      <p:pic>
+        <p:nvPicPr>
+          <p:cNvPr name="Picture 2" id="2"/>
+          <p:cNvPicPr>
+            <a:picLocks noChangeAspect="true"/>
+          </p:cNvPicPr>
+          <p:nvPr/>
+        </p:nvPicPr>
+        <p:blipFill>
+          <a:blip r:embed="rId2"/>
+          <a:srcRect l="0" t="0" r="0" b="0"/>
+          <a:stretch>
+            <a:fillRect/>
+          </a:stretch>
+        </p:blipFill>
         <p:spPr>
           <a:xfrm flipH="false" flipV="false" rot="0">
-            <a:off x="4347587" y="1028700"/>
-            <a:ext cx="9592825" cy="5755695"/>
-          </a:xfrm>
-          <a:custGeom>
-            <a:avLst/>
-            <a:gdLst/>
-            <a:ahLst/>
-            <a:cxnLst/>
-            <a:rect r="r" b="b" t="t" l="l"/>
-            <a:pathLst>
-              <a:path h="5755695" w="9592825">
-                <a:moveTo>
-                  <a:pt x="0" y="0"/>
-                </a:moveTo>
-                <a:lnTo>
-                  <a:pt x="9592826" y="0"/>
-                </a:lnTo>
-                <a:lnTo>
-                  <a:pt x="9592826" y="5755695"/>
-                </a:lnTo>
-                <a:lnTo>
-                  <a:pt x="0" y="5755695"/>
-                </a:lnTo>
-                <a:lnTo>
-                  <a:pt x="0" y="0"/>
-                </a:lnTo>
-                <a:close/>
-              </a:path>
-            </a:pathLst>
-          </a:custGeom>
-          <a:blipFill>
-            <a:blip r:embed="rId2"/>
-            <a:stretch>
-              <a:fillRect l="0" t="0" r="0" b="0"/>
-            </a:stretch>
-          </a:blipFill>
-        </p:spPr>
-      </p:sp>
-      <p:sp>
-        <p:nvSpPr>
-          <p:cNvPr name="TextBox 3" id="3"/>
+            <a:off x="13655377" y="6809666"/>
+            <a:ext cx="6229999" cy="6954669"/>
+          </a:xfrm>
+          <a:prstGeom prst="rect">
+            <a:avLst/>
+          </a:prstGeom>
+        </p:spPr>
+      </p:pic>
+      <p:pic>
+        <p:nvPicPr>
+          <p:cNvPr name="Picture 3" id="3"/>
+          <p:cNvPicPr>
+            <a:picLocks noChangeAspect="true"/>
+          </p:cNvPicPr>
+          <p:nvPr/>
+        </p:nvPicPr>
+        <p:blipFill>
+          <a:blip r:embed="rId3"/>
+          <a:srcRect l="0" t="0" r="0" b="0"/>
+          <a:stretch>
+            <a:fillRect/>
+          </a:stretch>
+        </p:blipFill>
+        <p:spPr>
+          <a:xfrm flipH="false" flipV="false" rot="0">
+            <a:off x="0" y="0"/>
+            <a:ext cx="6925457" cy="4700654"/>
+          </a:xfrm>
+          <a:prstGeom prst="rect">
+            <a:avLst/>
+          </a:prstGeom>
+        </p:spPr>
+      </p:pic>
+      <p:sp>
+        <p:nvSpPr>
+          <p:cNvPr name="TextBox 4" id="4"/>
           <p:cNvSpPr txBox="true"/>
           <p:nvPr/>
         </p:nvSpPr>
         <p:spPr>
           <a:xfrm rot="0">
-            <a:off x="2717556" y="7058025"/>
-            <a:ext cx="12852888" cy="2200275"/>
+            <a:off x="2717556" y="4181475"/>
+            <a:ext cx="12852888" cy="1914525"/>
           </a:xfrm>
           <a:prstGeom prst="rect">
             <a:avLst/>
@@ -4113,12 +4114,12 @@
                 <a:solidFill>
                   <a:srgbClr val="000000"/>
                 </a:solidFill>
-                <a:latin typeface="Jua"/>
-                <a:ea typeface="Jua"/>
-                <a:cs typeface="Jua"/>
-                <a:sym typeface="Jua"/>
+                <a:latin typeface="무궁화 고딕"/>
+                <a:ea typeface="무궁화 고딕"/>
+                <a:cs typeface="무궁화 고딕"/>
+                <a:sym typeface="무궁화 고딕"/>
               </a:rPr>
-              <a:t>독일</a:t>
+              <a:t>파리</a:t>
             </a:r>
           </a:p>
         </p:txBody>
@@ -4155,66 +4156,62 @@
           <a:chExt cx="0" cy="0"/>
         </a:xfrm>
       </p:grpSpPr>
-      <p:pic>
-        <p:nvPicPr>
-          <p:cNvPr name="Picture 2" id="2"/>
-          <p:cNvPicPr>
-            <a:picLocks noChangeAspect="true"/>
-          </p:cNvPicPr>
-          <p:nvPr/>
-        </p:nvPicPr>
-        <p:blipFill>
-          <a:blip r:embed="rId2"/>
-          <a:srcRect l="0" t="0" r="0" b="0"/>
-          <a:stretch>
-            <a:fillRect/>
-          </a:stretch>
-        </p:blipFill>
+      <p:sp>
+        <p:nvSpPr>
+          <p:cNvPr name="Freeform 2" id="2"/>
+          <p:cNvSpPr/>
+          <p:nvPr/>
+        </p:nvSpPr>
         <p:spPr>
           <a:xfrm flipH="false" flipV="false" rot="0">
-            <a:off x="13655377" y="6809666"/>
-            <a:ext cx="6229999" cy="6954669"/>
-          </a:xfrm>
-          <a:prstGeom prst="rect">
-            <a:avLst/>
-          </a:prstGeom>
-        </p:spPr>
-      </p:pic>
-      <p:pic>
-        <p:nvPicPr>
-          <p:cNvPr name="Picture 3" id="3"/>
-          <p:cNvPicPr>
-            <a:picLocks noChangeAspect="true"/>
-          </p:cNvPicPr>
-          <p:nvPr/>
-        </p:nvPicPr>
-        <p:blipFill>
-          <a:blip r:embed="rId3"/>
-          <a:srcRect l="0" t="0" r="0" b="0"/>
-          <a:stretch>
-            <a:fillRect/>
-          </a:stretch>
-        </p:blipFill>
-        <p:spPr>
-          <a:xfrm flipH="false" flipV="false" rot="0">
-            <a:off x="0" y="0"/>
-            <a:ext cx="6925457" cy="4700654"/>
-          </a:xfrm>
-          <a:prstGeom prst="rect">
-            <a:avLst/>
-          </a:prstGeom>
-        </p:spPr>
-      </p:pic>
-      <p:sp>
-        <p:nvSpPr>
-          <p:cNvPr name="TextBox 4" id="4"/>
+            <a:off x="4347587" y="1028700"/>
+            <a:ext cx="9592825" cy="5755695"/>
+          </a:xfrm>
+          <a:custGeom>
+            <a:avLst/>
+            <a:gdLst/>
+            <a:ahLst/>
+            <a:cxnLst/>
+            <a:rect r="r" b="b" t="t" l="l"/>
+            <a:pathLst>
+              <a:path h="5755695" w="9592825">
+                <a:moveTo>
+                  <a:pt x="0" y="0"/>
+                </a:moveTo>
+                <a:lnTo>
+                  <a:pt x="9592826" y="0"/>
+                </a:lnTo>
+                <a:lnTo>
+                  <a:pt x="9592826" y="5755695"/>
+                </a:lnTo>
+                <a:lnTo>
+                  <a:pt x="0" y="5755695"/>
+                </a:lnTo>
+                <a:lnTo>
+                  <a:pt x="0" y="0"/>
+                </a:lnTo>
+                <a:close/>
+              </a:path>
+            </a:pathLst>
+          </a:custGeom>
+          <a:blipFill>
+            <a:blip r:embed="rId2"/>
+            <a:stretch>
+              <a:fillRect l="0" t="0" r="0" b="0"/>
+            </a:stretch>
+          </a:blipFill>
+        </p:spPr>
+      </p:sp>
+      <p:sp>
+        <p:nvSpPr>
+          <p:cNvPr name="TextBox 3" id="3"/>
           <p:cNvSpPr txBox="true"/>
           <p:nvPr/>
         </p:nvSpPr>
         <p:spPr>
           <a:xfrm rot="0">
-            <a:off x="2717556" y="3895725"/>
-            <a:ext cx="12852888" cy="2200275"/>
+            <a:off x="2717556" y="7343775"/>
+            <a:ext cx="12852888" cy="1914525"/>
           </a:xfrm>
           <a:prstGeom prst="rect">
             <a:avLst/>
@@ -4236,12 +4233,12 @@
                 <a:solidFill>
                   <a:srgbClr val="000000"/>
                 </a:solidFill>
-                <a:latin typeface="Jua"/>
-                <a:ea typeface="Jua"/>
-                <a:cs typeface="Jua"/>
-                <a:sym typeface="Jua"/>
+                <a:latin typeface="무궁화 고딕"/>
+                <a:ea typeface="무궁화 고딕"/>
+                <a:cs typeface="무궁화 고딕"/>
+                <a:sym typeface="무궁화 고딕"/>
               </a:rPr>
-              <a:t>베를린</a:t>
+              <a:t>독일</a:t>
             </a:r>
           </a:p>
         </p:txBody>
@@ -4278,62 +4275,66 @@
           <a:chExt cx="0" cy="0"/>
         </a:xfrm>
       </p:grpSpPr>
-      <p:sp>
-        <p:nvSpPr>
-          <p:cNvPr name="Freeform 2" id="2"/>
-          <p:cNvSpPr/>
-          <p:nvPr/>
-        </p:nvSpPr>
+      <p:pic>
+        <p:nvPicPr>
+          <p:cNvPr name="Picture 2" id="2"/>
+          <p:cNvPicPr>
+            <a:picLocks noChangeAspect="true"/>
+          </p:cNvPicPr>
+          <p:nvPr/>
+        </p:nvPicPr>
+        <p:blipFill>
+          <a:blip r:embed="rId2"/>
+          <a:srcRect l="0" t="0" r="0" b="0"/>
+          <a:stretch>
+            <a:fillRect/>
+          </a:stretch>
+        </p:blipFill>
         <p:spPr>
           <a:xfrm flipH="false" flipV="false" rot="0">
-            <a:off x="3661611" y="1028700"/>
-            <a:ext cx="10964779" cy="5482389"/>
-          </a:xfrm>
-          <a:custGeom>
-            <a:avLst/>
-            <a:gdLst/>
-            <a:ahLst/>
-            <a:cxnLst/>
-            <a:rect r="r" b="b" t="t" l="l"/>
-            <a:pathLst>
-              <a:path h="5482389" w="10964779">
-                <a:moveTo>
-                  <a:pt x="0" y="0"/>
-                </a:moveTo>
-                <a:lnTo>
-                  <a:pt x="10964778" y="0"/>
-                </a:lnTo>
-                <a:lnTo>
-                  <a:pt x="10964778" y="5482389"/>
-                </a:lnTo>
-                <a:lnTo>
-                  <a:pt x="0" y="5482389"/>
-                </a:lnTo>
-                <a:lnTo>
-                  <a:pt x="0" y="0"/>
-                </a:lnTo>
-                <a:close/>
-              </a:path>
-            </a:pathLst>
-          </a:custGeom>
-          <a:blipFill>
-            <a:blip r:embed="rId2"/>
-            <a:stretch>
-              <a:fillRect l="0" t="0" r="0" b="0"/>
-            </a:stretch>
-          </a:blipFill>
-        </p:spPr>
-      </p:sp>
-      <p:sp>
-        <p:nvSpPr>
-          <p:cNvPr name="TextBox 3" id="3"/>
+            <a:off x="13655377" y="6809666"/>
+            <a:ext cx="6229999" cy="6954669"/>
+          </a:xfrm>
+          <a:prstGeom prst="rect">
+            <a:avLst/>
+          </a:prstGeom>
+        </p:spPr>
+      </p:pic>
+      <p:pic>
+        <p:nvPicPr>
+          <p:cNvPr name="Picture 3" id="3"/>
+          <p:cNvPicPr>
+            <a:picLocks noChangeAspect="true"/>
+          </p:cNvPicPr>
+          <p:nvPr/>
+        </p:nvPicPr>
+        <p:blipFill>
+          <a:blip r:embed="rId3"/>
+          <a:srcRect l="0" t="0" r="0" b="0"/>
+          <a:stretch>
+            <a:fillRect/>
+          </a:stretch>
+        </p:blipFill>
+        <p:spPr>
+          <a:xfrm flipH="false" flipV="false" rot="0">
+            <a:off x="0" y="0"/>
+            <a:ext cx="6925457" cy="4700654"/>
+          </a:xfrm>
+          <a:prstGeom prst="rect">
+            <a:avLst/>
+          </a:prstGeom>
+        </p:spPr>
+      </p:pic>
+      <p:sp>
+        <p:nvSpPr>
+          <p:cNvPr name="TextBox 4" id="4"/>
           <p:cNvSpPr txBox="true"/>
           <p:nvPr/>
         </p:nvSpPr>
         <p:spPr>
           <a:xfrm rot="0">
-            <a:off x="2717556" y="7058025"/>
-            <a:ext cx="12852888" cy="2200275"/>
+            <a:off x="2717556" y="4181475"/>
+            <a:ext cx="12852888" cy="1914525"/>
           </a:xfrm>
           <a:prstGeom prst="rect">
             <a:avLst/>
@@ -4355,12 +4356,12 @@
                 <a:solidFill>
                   <a:srgbClr val="000000"/>
                 </a:solidFill>
-                <a:latin typeface="Jua"/>
-                <a:ea typeface="Jua"/>
-                <a:cs typeface="Jua"/>
-                <a:sym typeface="Jua"/>
+                <a:latin typeface="무궁화 고딕"/>
+                <a:ea typeface="무궁화 고딕"/>
+                <a:cs typeface="무궁화 고딕"/>
+                <a:sym typeface="무궁화 고딕"/>
               </a:rPr>
-              <a:t>캐나다</a:t>
+              <a:t>베를린</a:t>
             </a:r>
           </a:p>
         </p:txBody>
@@ -4397,66 +4398,62 @@
           <a:chExt cx="0" cy="0"/>
         </a:xfrm>
       </p:grpSpPr>
-      <p:pic>
-        <p:nvPicPr>
-          <p:cNvPr name="Picture 2" id="2"/>
-          <p:cNvPicPr>
-            <a:picLocks noChangeAspect="true"/>
-          </p:cNvPicPr>
-          <p:nvPr/>
-        </p:nvPicPr>
-        <p:blipFill>
-          <a:blip r:embed="rId2"/>
-          <a:srcRect l="0" t="0" r="0" b="0"/>
-          <a:stretch>
-            <a:fillRect/>
-          </a:stretch>
-        </p:blipFill>
+      <p:sp>
+        <p:nvSpPr>
+          <p:cNvPr name="Freeform 2" id="2"/>
+          <p:cNvSpPr/>
+          <p:nvPr/>
+        </p:nvSpPr>
         <p:spPr>
           <a:xfrm flipH="false" flipV="false" rot="0">
-            <a:off x="13655377" y="6809666"/>
-            <a:ext cx="6229999" cy="6954669"/>
-          </a:xfrm>
-          <a:prstGeom prst="rect">
-            <a:avLst/>
-          </a:prstGeom>
-        </p:spPr>
-      </p:pic>
-      <p:pic>
-        <p:nvPicPr>
-          <p:cNvPr name="Picture 3" id="3"/>
-          <p:cNvPicPr>
-            <a:picLocks noChangeAspect="true"/>
-          </p:cNvPicPr>
-          <p:nvPr/>
-        </p:nvPicPr>
-        <p:blipFill>
-          <a:blip r:embed="rId3"/>
-          <a:srcRect l="0" t="0" r="0" b="0"/>
-          <a:stretch>
-            <a:fillRect/>
-          </a:stretch>
-        </p:blipFill>
-        <p:spPr>
-          <a:xfrm flipH="false" flipV="false" rot="0">
-            <a:off x="0" y="0"/>
-            <a:ext cx="6925457" cy="4700654"/>
-          </a:xfrm>
-          <a:prstGeom prst="rect">
-            <a:avLst/>
-          </a:prstGeom>
-        </p:spPr>
-      </p:pic>
-      <p:sp>
-        <p:nvSpPr>
-          <p:cNvPr name="TextBox 4" id="4"/>
+            <a:off x="3661611" y="1028700"/>
+            <a:ext cx="10964779" cy="5482389"/>
+          </a:xfrm>
+          <a:custGeom>
+            <a:avLst/>
+            <a:gdLst/>
+            <a:ahLst/>
+            <a:cxnLst/>
+            <a:rect r="r" b="b" t="t" l="l"/>
+            <a:pathLst>
+              <a:path h="5482389" w="10964779">
+                <a:moveTo>
+                  <a:pt x="0" y="0"/>
+                </a:moveTo>
+                <a:lnTo>
+                  <a:pt x="10964778" y="0"/>
+                </a:lnTo>
+                <a:lnTo>
+                  <a:pt x="10964778" y="5482389"/>
+                </a:lnTo>
+                <a:lnTo>
+                  <a:pt x="0" y="5482389"/>
+                </a:lnTo>
+                <a:lnTo>
+                  <a:pt x="0" y="0"/>
+                </a:lnTo>
+                <a:close/>
+              </a:path>
+            </a:pathLst>
+          </a:custGeom>
+          <a:blipFill>
+            <a:blip r:embed="rId2"/>
+            <a:stretch>
+              <a:fillRect l="0" t="0" r="0" b="0"/>
+            </a:stretch>
+          </a:blipFill>
+        </p:spPr>
+      </p:sp>
+      <p:sp>
+        <p:nvSpPr>
+          <p:cNvPr name="TextBox 3" id="3"/>
           <p:cNvSpPr txBox="true"/>
           <p:nvPr/>
         </p:nvSpPr>
         <p:spPr>
           <a:xfrm rot="0">
-            <a:off x="2717556" y="3895725"/>
-            <a:ext cx="12852888" cy="2200275"/>
+            <a:off x="2717556" y="7343775"/>
+            <a:ext cx="12852888" cy="1914525"/>
           </a:xfrm>
           <a:prstGeom prst="rect">
             <a:avLst/>
@@ -4478,12 +4475,12 @@
                 <a:solidFill>
                   <a:srgbClr val="000000"/>
                 </a:solidFill>
-                <a:latin typeface="Jua"/>
-                <a:ea typeface="Jua"/>
-                <a:cs typeface="Jua"/>
-                <a:sym typeface="Jua"/>
+                <a:latin typeface="무궁화 고딕"/>
+                <a:ea typeface="무궁화 고딕"/>
+                <a:cs typeface="무궁화 고딕"/>
+                <a:sym typeface="무궁화 고딕"/>
               </a:rPr>
-              <a:t>오타와</a:t>
+              <a:t>캐나다</a:t>
             </a:r>
           </a:p>
         </p:txBody>
@@ -4630,8 +4627,8 @@
         </p:nvSpPr>
         <p:spPr>
           <a:xfrm rot="0">
-            <a:off x="11392761" y="600705"/>
-            <a:ext cx="5362043" cy="1600200"/>
+            <a:off x="11392761" y="819780"/>
+            <a:ext cx="5362043" cy="1381125"/>
           </a:xfrm>
           <a:prstGeom prst="rect">
             <a:avLst/>
@@ -4653,10 +4650,10 @@
                 <a:solidFill>
                   <a:srgbClr val="FFFAEF"/>
                 </a:solidFill>
-                <a:latin typeface="Jua"/>
-                <a:ea typeface="Jua"/>
-                <a:cs typeface="Jua"/>
-                <a:sym typeface="Jua"/>
+                <a:latin typeface="무궁화 고딕"/>
+                <a:ea typeface="무궁화 고딕"/>
+                <a:cs typeface="무궁화 고딕"/>
+                <a:sym typeface="무궁화 고딕"/>
               </a:rPr>
               <a:t>규칙</a:t>
             </a:r>
@@ -4672,9 +4669,9 @@
         <p:grpSpPr>
           <a:xfrm rot="0">
             <a:off x="309172" y="535073"/>
-            <a:ext cx="12619696" cy="2100123"/>
+            <a:ext cx="12619696" cy="1896543"/>
             <a:chOff x="0" y="0"/>
-            <a:chExt cx="16826261" cy="2800164"/>
+            <a:chExt cx="16826261" cy="2528724"/>
           </a:xfrm>
         </p:grpSpPr>
         <p:sp>
@@ -4685,8 +4682,8 @@
           </p:nvSpPr>
           <p:spPr>
             <a:xfrm rot="0">
-              <a:off x="0" y="1615940"/>
-              <a:ext cx="16826261" cy="1184224"/>
+              <a:off x="0" y="1648191"/>
+              <a:ext cx="16826261" cy="880533"/>
             </a:xfrm>
             <a:prstGeom prst="rect">
               <a:avLst/>
@@ -4700,18 +4697,18 @@
             <a:p>
               <a:pPr algn="l">
                 <a:lnSpc>
-                  <a:spcPts val="7402"/>
+                  <a:spcPts val="5599"/>
                 </a:lnSpc>
               </a:pPr>
               <a:r>
-                <a:rPr lang="en-US" sz="5287">
+                <a:rPr lang="en-US" sz="3999">
                   <a:solidFill>
                     <a:srgbClr val="FFFAEF"/>
                   </a:solidFill>
-                  <a:latin typeface="TDTD가온"/>
-                  <a:ea typeface="TDTD가온"/>
-                  <a:cs typeface="TDTD가온"/>
-                  <a:sym typeface="TDTD가온"/>
+                  <a:latin typeface="무궁화 고딕"/>
+                  <a:ea typeface="무궁화 고딕"/>
+                  <a:cs typeface="무궁화 고딕"/>
+                  <a:sym typeface="무궁화 고딕"/>
                 </a:rPr>
                 <a:t>팀별로 나눠 앉습니다.</a:t>
               </a:r>
@@ -4726,8 +4723,8 @@
           </p:nvSpPr>
           <p:spPr>
             <a:xfrm rot="0">
-              <a:off x="0" y="-190500"/>
-              <a:ext cx="11298371" cy="1367863"/>
+              <a:off x="0" y="-66675"/>
+              <a:ext cx="11298371" cy="1238189"/>
             </a:xfrm>
             <a:prstGeom prst="rect">
               <a:avLst/>
@@ -4749,10 +4746,10 @@
                   <a:solidFill>
                     <a:srgbClr val="FFFAEF"/>
                   </a:solidFill>
-                  <a:latin typeface="Jua"/>
-                  <a:ea typeface="Jua"/>
-                  <a:cs typeface="Jua"/>
-                  <a:sym typeface="Jua"/>
+                  <a:latin typeface="무궁화 고딕 Bold"/>
+                  <a:ea typeface="무궁화 고딕 Bold"/>
+                  <a:cs typeface="무궁화 고딕 Bold"/>
+                  <a:sym typeface="무궁화 고딕 Bold"/>
                 </a:rPr>
                 <a:t>STEP 1.</a:t>
               </a:r>
@@ -4768,10 +4765,10 @@
         </p:nvGrpSpPr>
         <p:grpSpPr>
           <a:xfrm rot="0">
-            <a:off x="10181877" y="7809938"/>
-            <a:ext cx="8106123" cy="2034517"/>
+            <a:off x="10502719" y="7970359"/>
+            <a:ext cx="7785281" cy="1838937"/>
             <a:chOff x="0" y="0"/>
-            <a:chExt cx="10808164" cy="2712689"/>
+            <a:chExt cx="10380375" cy="2451916"/>
           </a:xfrm>
         </p:grpSpPr>
         <p:sp>
@@ -4782,8 +4779,8 @@
           </p:nvSpPr>
           <p:spPr>
             <a:xfrm rot="0">
-              <a:off x="0" y="1542808"/>
-              <a:ext cx="10705410" cy="1169882"/>
+              <a:off x="0" y="1571383"/>
+              <a:ext cx="10281688" cy="880533"/>
             </a:xfrm>
             <a:prstGeom prst="rect">
               <a:avLst/>
@@ -4797,18 +4794,18 @@
             <a:p>
               <a:pPr algn="l">
                 <a:lnSpc>
-                  <a:spcPts val="7420"/>
+                  <a:spcPts val="5599"/>
                 </a:lnSpc>
               </a:pPr>
               <a:r>
-                <a:rPr lang="en-US" sz="5300">
+                <a:rPr lang="en-US" sz="3999">
                   <a:solidFill>
                     <a:srgbClr val="FFFAEF"/>
                   </a:solidFill>
-                  <a:latin typeface="TDTD가온"/>
-                  <a:ea typeface="TDTD가온"/>
-                  <a:cs typeface="TDTD가온"/>
-                  <a:sym typeface="TDTD가온"/>
+                  <a:latin typeface="무궁화 고딕"/>
+                  <a:ea typeface="무궁화 고딕"/>
+                  <a:cs typeface="무궁화 고딕"/>
+                  <a:sym typeface="무궁화 고딕"/>
                 </a:rPr>
                 <a:t>가장 많은 점수를 얻은 팀이 우승!</a:t>
               </a:r>
@@ -4823,8 +4820,8 @@
           </p:nvSpPr>
           <p:spPr>
             <a:xfrm rot="0">
-              <a:off x="0" y="-190500"/>
-              <a:ext cx="10808164" cy="1374479"/>
+              <a:off x="0" y="-57150"/>
+              <a:ext cx="10380375" cy="1241129"/>
             </a:xfrm>
             <a:prstGeom prst="rect">
               <a:avLst/>
@@ -4846,10 +4843,10 @@
                   <a:solidFill>
                     <a:srgbClr val="FFFAEF"/>
                   </a:solidFill>
-                  <a:latin typeface="Jua"/>
-                  <a:ea typeface="Jua"/>
-                  <a:cs typeface="Jua"/>
-                  <a:sym typeface="Jua"/>
+                  <a:latin typeface="무궁화 고딕 Bold"/>
+                  <a:ea typeface="무궁화 고딕 Bold"/>
+                  <a:cs typeface="무궁화 고딕 Bold"/>
+                  <a:sym typeface="무궁화 고딕 Bold"/>
                 </a:rPr>
                 <a:t>STEP 3.</a:t>
               </a:r>
@@ -4865,10 +4862,10 @@
         </p:nvGrpSpPr>
         <p:grpSpPr>
           <a:xfrm rot="0">
-            <a:off x="5218668" y="3547689"/>
-            <a:ext cx="9095603" cy="3975348"/>
+            <a:off x="4695607" y="3787216"/>
+            <a:ext cx="9095603" cy="2596832"/>
             <a:chOff x="0" y="0"/>
-            <a:chExt cx="12127471" cy="5300464"/>
+            <a:chExt cx="12127471" cy="3462442"/>
           </a:xfrm>
         </p:grpSpPr>
         <p:sp>
@@ -4879,8 +4876,8 @@
           </p:nvSpPr>
           <p:spPr>
             <a:xfrm rot="0">
-              <a:off x="0" y="1621596"/>
-              <a:ext cx="12127471" cy="3678868"/>
+              <a:off x="0" y="1642109"/>
+              <a:ext cx="12127471" cy="1820333"/>
             </a:xfrm>
             <a:prstGeom prst="rect">
               <a:avLst/>
@@ -4894,28 +4891,40 @@
             <a:p>
               <a:pPr algn="l">
                 <a:lnSpc>
-                  <a:spcPts val="7415"/>
+                  <a:spcPts val="5599"/>
                 </a:lnSpc>
               </a:pPr>
               <a:r>
-                <a:rPr lang="en-US" sz="5296">
+                <a:rPr lang="en-US" sz="3999">
                   <a:solidFill>
                     <a:srgbClr val="FFFAEF"/>
                   </a:solidFill>
-                  <a:latin typeface="TDTD가온"/>
-                  <a:ea typeface="TDTD가온"/>
-                  <a:cs typeface="TDTD가온"/>
-                  <a:sym typeface="TDTD가온"/>
+                  <a:latin typeface="무궁화 고딕"/>
+                  <a:ea typeface="무궁화 고딕"/>
+                  <a:cs typeface="무궁화 고딕"/>
+                  <a:sym typeface="무궁화 고딕"/>
                 </a:rPr>
-                <a:t>화면에 국기와 나라 이름이 나타나면, 가장 먼저 수로 이름을 외친 팀이 득점!</a:t>
+                <a:t>화면에 국기와 나라 이름이 나타나면,</a:t>
               </a:r>
             </a:p>
             <a:p>
               <a:pPr algn="l">
                 <a:lnSpc>
-                  <a:spcPts val="7415"/>
+                  <a:spcPts val="5599"/>
                 </a:lnSpc>
               </a:pPr>
+              <a:r>
+                <a:rPr lang="en-US" sz="3999">
+                  <a:solidFill>
+                    <a:srgbClr val="FFFAEF"/>
+                  </a:solidFill>
+                  <a:latin typeface="무궁화 고딕"/>
+                  <a:ea typeface="무궁화 고딕"/>
+                  <a:cs typeface="무궁화 고딕"/>
+                  <a:sym typeface="무궁화 고딕"/>
+                </a:rPr>
+                <a:t>가장 먼저 수도 이름을 외친 팀이 득점!</a:t>
+              </a:r>
             </a:p>
           </p:txBody>
         </p:sp>
@@ -4927,8 +4936,8 @@
           </p:nvSpPr>
           <p:spPr>
             <a:xfrm rot="0">
-              <a:off x="0" y="-190500"/>
-              <a:ext cx="5799240" cy="1369906"/>
+              <a:off x="0" y="-66675"/>
+              <a:ext cx="5799240" cy="1238018"/>
             </a:xfrm>
             <a:prstGeom prst="rect">
               <a:avLst/>
@@ -4950,10 +4959,10 @@
                   <a:solidFill>
                     <a:srgbClr val="FFFAEF"/>
                   </a:solidFill>
-                  <a:latin typeface="Jua"/>
-                  <a:ea typeface="Jua"/>
-                  <a:cs typeface="Jua"/>
-                  <a:sym typeface="Jua"/>
+                  <a:latin typeface="무궁화 고딕 Bold"/>
+                  <a:ea typeface="무궁화 고딕 Bold"/>
+                  <a:cs typeface="무궁화 고딕 Bold"/>
+                  <a:sym typeface="무궁화 고딕 Bold"/>
                 </a:rPr>
                 <a:t>STEP 2.</a:t>
               </a:r>
@@ -4993,62 +5002,66 @@
           <a:chExt cx="0" cy="0"/>
         </a:xfrm>
       </p:grpSpPr>
-      <p:sp>
-        <p:nvSpPr>
-          <p:cNvPr name="Freeform 2" id="2"/>
-          <p:cNvSpPr/>
-          <p:nvPr/>
-        </p:nvSpPr>
+      <p:pic>
+        <p:nvPicPr>
+          <p:cNvPr name="Picture 2" id="2"/>
+          <p:cNvPicPr>
+            <a:picLocks noChangeAspect="true"/>
+          </p:cNvPicPr>
+          <p:nvPr/>
+        </p:nvPicPr>
+        <p:blipFill>
+          <a:blip r:embed="rId2"/>
+          <a:srcRect l="0" t="0" r="0" b="0"/>
+          <a:stretch>
+            <a:fillRect/>
+          </a:stretch>
+        </p:blipFill>
         <p:spPr>
           <a:xfrm flipH="false" flipV="false" rot="0">
-            <a:off x="4778848" y="1028700"/>
-            <a:ext cx="8730305" cy="6124244"/>
-          </a:xfrm>
-          <a:custGeom>
-            <a:avLst/>
-            <a:gdLst/>
-            <a:ahLst/>
-            <a:cxnLst/>
-            <a:rect r="r" b="b" t="t" l="l"/>
-            <a:pathLst>
-              <a:path h="6124244" w="8730305">
-                <a:moveTo>
-                  <a:pt x="0" y="0"/>
-                </a:moveTo>
-                <a:lnTo>
-                  <a:pt x="8730304" y="0"/>
-                </a:lnTo>
-                <a:lnTo>
-                  <a:pt x="8730304" y="6124244"/>
-                </a:lnTo>
-                <a:lnTo>
-                  <a:pt x="0" y="6124244"/>
-                </a:lnTo>
-                <a:lnTo>
-                  <a:pt x="0" y="0"/>
-                </a:lnTo>
-                <a:close/>
-              </a:path>
-            </a:pathLst>
-          </a:custGeom>
-          <a:blipFill>
-            <a:blip r:embed="rId2"/>
-            <a:stretch>
-              <a:fillRect l="0" t="0" r="0" b="0"/>
-            </a:stretch>
-          </a:blipFill>
-        </p:spPr>
-      </p:sp>
-      <p:sp>
-        <p:nvSpPr>
-          <p:cNvPr name="TextBox 3" id="3"/>
+            <a:off x="13655377" y="6809666"/>
+            <a:ext cx="6229999" cy="6954669"/>
+          </a:xfrm>
+          <a:prstGeom prst="rect">
+            <a:avLst/>
+          </a:prstGeom>
+        </p:spPr>
+      </p:pic>
+      <p:pic>
+        <p:nvPicPr>
+          <p:cNvPr name="Picture 3" id="3"/>
+          <p:cNvPicPr>
+            <a:picLocks noChangeAspect="true"/>
+          </p:cNvPicPr>
+          <p:nvPr/>
+        </p:nvPicPr>
+        <p:blipFill>
+          <a:blip r:embed="rId3"/>
+          <a:srcRect l="0" t="0" r="0" b="0"/>
+          <a:stretch>
+            <a:fillRect/>
+          </a:stretch>
+        </p:blipFill>
+        <p:spPr>
+          <a:xfrm flipH="false" flipV="false" rot="0">
+            <a:off x="0" y="0"/>
+            <a:ext cx="6925457" cy="4700654"/>
+          </a:xfrm>
+          <a:prstGeom prst="rect">
+            <a:avLst/>
+          </a:prstGeom>
+        </p:spPr>
+      </p:pic>
+      <p:sp>
+        <p:nvSpPr>
+          <p:cNvPr name="TextBox 4" id="4"/>
           <p:cNvSpPr txBox="true"/>
           <p:nvPr/>
         </p:nvSpPr>
         <p:spPr>
           <a:xfrm rot="0">
-            <a:off x="2717556" y="7058025"/>
-            <a:ext cx="12852888" cy="2200275"/>
+            <a:off x="2717556" y="4181475"/>
+            <a:ext cx="12852888" cy="1914525"/>
           </a:xfrm>
           <a:prstGeom prst="rect">
             <a:avLst/>
@@ -5070,12 +5083,12 @@
                 <a:solidFill>
                   <a:srgbClr val="000000"/>
                 </a:solidFill>
-                <a:latin typeface="Jua"/>
-                <a:ea typeface="Jua"/>
-                <a:cs typeface="Jua"/>
-                <a:sym typeface="Jua"/>
+                <a:latin typeface="무궁화 고딕"/>
+                <a:ea typeface="무궁화 고딕"/>
+                <a:cs typeface="무궁화 고딕"/>
+                <a:sym typeface="무궁화 고딕"/>
               </a:rPr>
-              <a:t>브라질</a:t>
+              <a:t>오타와</a:t>
             </a:r>
           </a:p>
         </p:txBody>
@@ -5112,66 +5125,62 @@
           <a:chExt cx="0" cy="0"/>
         </a:xfrm>
       </p:grpSpPr>
-      <p:pic>
-        <p:nvPicPr>
-          <p:cNvPr name="Picture 2" id="2"/>
-          <p:cNvPicPr>
-            <a:picLocks noChangeAspect="true"/>
-          </p:cNvPicPr>
-          <p:nvPr/>
-        </p:nvPicPr>
-        <p:blipFill>
-          <a:blip r:embed="rId2"/>
-          <a:srcRect l="0" t="0" r="0" b="0"/>
-          <a:stretch>
-            <a:fillRect/>
-          </a:stretch>
-        </p:blipFill>
+      <p:sp>
+        <p:nvSpPr>
+          <p:cNvPr name="Freeform 2" id="2"/>
+          <p:cNvSpPr/>
+          <p:nvPr/>
+        </p:nvSpPr>
         <p:spPr>
           <a:xfrm flipH="false" flipV="false" rot="0">
-            <a:off x="13655377" y="6809666"/>
-            <a:ext cx="6229999" cy="6954669"/>
-          </a:xfrm>
-          <a:prstGeom prst="rect">
-            <a:avLst/>
-          </a:prstGeom>
-        </p:spPr>
-      </p:pic>
-      <p:pic>
-        <p:nvPicPr>
-          <p:cNvPr name="Picture 3" id="3"/>
-          <p:cNvPicPr>
-            <a:picLocks noChangeAspect="true"/>
-          </p:cNvPicPr>
-          <p:nvPr/>
-        </p:nvPicPr>
-        <p:blipFill>
-          <a:blip r:embed="rId3"/>
-          <a:srcRect l="0" t="0" r="0" b="0"/>
-          <a:stretch>
-            <a:fillRect/>
-          </a:stretch>
-        </p:blipFill>
-        <p:spPr>
-          <a:xfrm flipH="false" flipV="false" rot="0">
-            <a:off x="0" y="0"/>
-            <a:ext cx="6925457" cy="4700654"/>
-          </a:xfrm>
-          <a:prstGeom prst="rect">
-            <a:avLst/>
-          </a:prstGeom>
-        </p:spPr>
-      </p:pic>
-      <p:sp>
-        <p:nvSpPr>
-          <p:cNvPr name="TextBox 4" id="4"/>
+            <a:off x="4778848" y="1028700"/>
+            <a:ext cx="8730305" cy="6124244"/>
+          </a:xfrm>
+          <a:custGeom>
+            <a:avLst/>
+            <a:gdLst/>
+            <a:ahLst/>
+            <a:cxnLst/>
+            <a:rect r="r" b="b" t="t" l="l"/>
+            <a:pathLst>
+              <a:path h="6124244" w="8730305">
+                <a:moveTo>
+                  <a:pt x="0" y="0"/>
+                </a:moveTo>
+                <a:lnTo>
+                  <a:pt x="8730304" y="0"/>
+                </a:lnTo>
+                <a:lnTo>
+                  <a:pt x="8730304" y="6124244"/>
+                </a:lnTo>
+                <a:lnTo>
+                  <a:pt x="0" y="6124244"/>
+                </a:lnTo>
+                <a:lnTo>
+                  <a:pt x="0" y="0"/>
+                </a:lnTo>
+                <a:close/>
+              </a:path>
+            </a:pathLst>
+          </a:custGeom>
+          <a:blipFill>
+            <a:blip r:embed="rId2"/>
+            <a:stretch>
+              <a:fillRect l="0" t="0" r="0" b="0"/>
+            </a:stretch>
+          </a:blipFill>
+        </p:spPr>
+      </p:sp>
+      <p:sp>
+        <p:nvSpPr>
+          <p:cNvPr name="TextBox 3" id="3"/>
           <p:cNvSpPr txBox="true"/>
           <p:nvPr/>
         </p:nvSpPr>
         <p:spPr>
           <a:xfrm rot="0">
-            <a:off x="2717556" y="3895725"/>
-            <a:ext cx="12852888" cy="2200275"/>
+            <a:off x="2717556" y="7343775"/>
+            <a:ext cx="12852888" cy="1914525"/>
           </a:xfrm>
           <a:prstGeom prst="rect">
             <a:avLst/>
@@ -5193,12 +5202,12 @@
                 <a:solidFill>
                   <a:srgbClr val="000000"/>
                 </a:solidFill>
-                <a:latin typeface="Jua"/>
-                <a:ea typeface="Jua"/>
-                <a:cs typeface="Jua"/>
-                <a:sym typeface="Jua"/>
+                <a:latin typeface="무궁화 고딕"/>
+                <a:ea typeface="무궁화 고딕"/>
+                <a:cs typeface="무궁화 고딕"/>
+                <a:sym typeface="무궁화 고딕"/>
               </a:rPr>
-              <a:t>브라질리아</a:t>
+              <a:t>브라질</a:t>
             </a:r>
           </a:p>
         </p:txBody>
@@ -5235,62 +5244,66 @@
           <a:chExt cx="0" cy="0"/>
         </a:xfrm>
       </p:grpSpPr>
-      <p:sp>
-        <p:nvSpPr>
-          <p:cNvPr name="Freeform 2" id="2"/>
-          <p:cNvSpPr/>
-          <p:nvPr/>
-        </p:nvSpPr>
+      <p:pic>
+        <p:nvPicPr>
+          <p:cNvPr name="Picture 2" id="2"/>
+          <p:cNvPicPr>
+            <a:picLocks noChangeAspect="true"/>
+          </p:cNvPicPr>
+          <p:nvPr/>
+        </p:nvPicPr>
+        <p:blipFill>
+          <a:blip r:embed="rId2"/>
+          <a:srcRect l="0" t="0" r="0" b="0"/>
+          <a:stretch>
+            <a:fillRect/>
+          </a:stretch>
+        </p:blipFill>
         <p:spPr>
           <a:xfrm flipH="false" flipV="false" rot="0">
-            <a:off x="3793958" y="1028700"/>
-            <a:ext cx="10700084" cy="5350042"/>
-          </a:xfrm>
-          <a:custGeom>
-            <a:avLst/>
-            <a:gdLst/>
-            <a:ahLst/>
-            <a:cxnLst/>
-            <a:rect r="r" b="b" t="t" l="l"/>
-            <a:pathLst>
-              <a:path h="5350042" w="10700084">
-                <a:moveTo>
-                  <a:pt x="0" y="0"/>
-                </a:moveTo>
-                <a:lnTo>
-                  <a:pt x="10700084" y="0"/>
-                </a:lnTo>
-                <a:lnTo>
-                  <a:pt x="10700084" y="5350042"/>
-                </a:lnTo>
-                <a:lnTo>
-                  <a:pt x="0" y="5350042"/>
-                </a:lnTo>
-                <a:lnTo>
-                  <a:pt x="0" y="0"/>
-                </a:lnTo>
-                <a:close/>
-              </a:path>
-            </a:pathLst>
-          </a:custGeom>
-          <a:blipFill>
-            <a:blip r:embed="rId2"/>
-            <a:stretch>
-              <a:fillRect l="0" t="0" r="0" b="0"/>
-            </a:stretch>
-          </a:blipFill>
-        </p:spPr>
-      </p:sp>
-      <p:sp>
-        <p:nvSpPr>
-          <p:cNvPr name="TextBox 3" id="3"/>
+            <a:off x="13655377" y="6809666"/>
+            <a:ext cx="6229999" cy="6954669"/>
+          </a:xfrm>
+          <a:prstGeom prst="rect">
+            <a:avLst/>
+          </a:prstGeom>
+        </p:spPr>
+      </p:pic>
+      <p:pic>
+        <p:nvPicPr>
+          <p:cNvPr name="Picture 3" id="3"/>
+          <p:cNvPicPr>
+            <a:picLocks noChangeAspect="true"/>
+          </p:cNvPicPr>
+          <p:nvPr/>
+        </p:nvPicPr>
+        <p:blipFill>
+          <a:blip r:embed="rId3"/>
+          <a:srcRect l="0" t="0" r="0" b="0"/>
+          <a:stretch>
+            <a:fillRect/>
+          </a:stretch>
+        </p:blipFill>
+        <p:spPr>
+          <a:xfrm flipH="false" flipV="false" rot="0">
+            <a:off x="0" y="0"/>
+            <a:ext cx="6925457" cy="4700654"/>
+          </a:xfrm>
+          <a:prstGeom prst="rect">
+            <a:avLst/>
+          </a:prstGeom>
+        </p:spPr>
+      </p:pic>
+      <p:sp>
+        <p:nvSpPr>
+          <p:cNvPr name="TextBox 4" id="4"/>
           <p:cNvSpPr txBox="true"/>
           <p:nvPr/>
         </p:nvSpPr>
         <p:spPr>
           <a:xfrm rot="0">
-            <a:off x="2717556" y="7058025"/>
-            <a:ext cx="12852888" cy="2200275"/>
+            <a:off x="2717556" y="4181475"/>
+            <a:ext cx="12852888" cy="1914525"/>
           </a:xfrm>
           <a:prstGeom prst="rect">
             <a:avLst/>
@@ -5312,12 +5325,12 @@
                 <a:solidFill>
                   <a:srgbClr val="000000"/>
                 </a:solidFill>
-                <a:latin typeface="Jua"/>
-                <a:ea typeface="Jua"/>
-                <a:cs typeface="Jua"/>
-                <a:sym typeface="Jua"/>
+                <a:latin typeface="무궁화 고딕"/>
+                <a:ea typeface="무궁화 고딕"/>
+                <a:cs typeface="무궁화 고딕"/>
+                <a:sym typeface="무궁화 고딕"/>
               </a:rPr>
-              <a:t>호주</a:t>
+              <a:t>브라질리아</a:t>
             </a:r>
           </a:p>
         </p:txBody>
@@ -5354,66 +5367,62 @@
           <a:chExt cx="0" cy="0"/>
         </a:xfrm>
       </p:grpSpPr>
-      <p:pic>
-        <p:nvPicPr>
-          <p:cNvPr name="Picture 2" id="2"/>
-          <p:cNvPicPr>
-            <a:picLocks noChangeAspect="true"/>
-          </p:cNvPicPr>
-          <p:nvPr/>
-        </p:nvPicPr>
-        <p:blipFill>
-          <a:blip r:embed="rId2"/>
-          <a:srcRect l="0" t="0" r="0" b="0"/>
-          <a:stretch>
-            <a:fillRect/>
-          </a:stretch>
-        </p:blipFill>
+      <p:sp>
+        <p:nvSpPr>
+          <p:cNvPr name="Freeform 2" id="2"/>
+          <p:cNvSpPr/>
+          <p:nvPr/>
+        </p:nvSpPr>
         <p:spPr>
           <a:xfrm flipH="false" flipV="false" rot="0">
-            <a:off x="13655377" y="6809666"/>
-            <a:ext cx="6229999" cy="6954669"/>
-          </a:xfrm>
-          <a:prstGeom prst="rect">
-            <a:avLst/>
-          </a:prstGeom>
-        </p:spPr>
-      </p:pic>
-      <p:pic>
-        <p:nvPicPr>
-          <p:cNvPr name="Picture 3" id="3"/>
-          <p:cNvPicPr>
-            <a:picLocks noChangeAspect="true"/>
-          </p:cNvPicPr>
-          <p:nvPr/>
-        </p:nvPicPr>
-        <p:blipFill>
-          <a:blip r:embed="rId3"/>
-          <a:srcRect l="0" t="0" r="0" b="0"/>
-          <a:stretch>
-            <a:fillRect/>
-          </a:stretch>
-        </p:blipFill>
-        <p:spPr>
-          <a:xfrm flipH="false" flipV="false" rot="0">
-            <a:off x="0" y="0"/>
-            <a:ext cx="6925457" cy="4700654"/>
-          </a:xfrm>
-          <a:prstGeom prst="rect">
-            <a:avLst/>
-          </a:prstGeom>
-        </p:spPr>
-      </p:pic>
-      <p:sp>
-        <p:nvSpPr>
-          <p:cNvPr name="TextBox 4" id="4"/>
+            <a:off x="3793958" y="1028700"/>
+            <a:ext cx="10700084" cy="5350042"/>
+          </a:xfrm>
+          <a:custGeom>
+            <a:avLst/>
+            <a:gdLst/>
+            <a:ahLst/>
+            <a:cxnLst/>
+            <a:rect r="r" b="b" t="t" l="l"/>
+            <a:pathLst>
+              <a:path h="5350042" w="10700084">
+                <a:moveTo>
+                  <a:pt x="0" y="0"/>
+                </a:moveTo>
+                <a:lnTo>
+                  <a:pt x="10700084" y="0"/>
+                </a:lnTo>
+                <a:lnTo>
+                  <a:pt x="10700084" y="5350042"/>
+                </a:lnTo>
+                <a:lnTo>
+                  <a:pt x="0" y="5350042"/>
+                </a:lnTo>
+                <a:lnTo>
+                  <a:pt x="0" y="0"/>
+                </a:lnTo>
+                <a:close/>
+              </a:path>
+            </a:pathLst>
+          </a:custGeom>
+          <a:blipFill>
+            <a:blip r:embed="rId2"/>
+            <a:stretch>
+              <a:fillRect l="0" t="0" r="0" b="0"/>
+            </a:stretch>
+          </a:blipFill>
+        </p:spPr>
+      </p:sp>
+      <p:sp>
+        <p:nvSpPr>
+          <p:cNvPr name="TextBox 3" id="3"/>
           <p:cNvSpPr txBox="true"/>
           <p:nvPr/>
         </p:nvSpPr>
         <p:spPr>
           <a:xfrm rot="0">
-            <a:off x="2717556" y="3895725"/>
-            <a:ext cx="12852888" cy="2200275"/>
+            <a:off x="2717556" y="7343775"/>
+            <a:ext cx="12852888" cy="1914525"/>
           </a:xfrm>
           <a:prstGeom prst="rect">
             <a:avLst/>
@@ -5435,12 +5444,12 @@
                 <a:solidFill>
                   <a:srgbClr val="000000"/>
                 </a:solidFill>
-                <a:latin typeface="Jua"/>
-                <a:ea typeface="Jua"/>
-                <a:cs typeface="Jua"/>
-                <a:sym typeface="Jua"/>
+                <a:latin typeface="무궁화 고딕"/>
+                <a:ea typeface="무궁화 고딕"/>
+                <a:cs typeface="무궁화 고딕"/>
+                <a:sym typeface="무궁화 고딕"/>
               </a:rPr>
-              <a:t>캔버라</a:t>
+              <a:t>호주</a:t>
             </a:r>
           </a:p>
         </p:txBody>
@@ -5477,62 +5486,66 @@
           <a:chExt cx="0" cy="0"/>
         </a:xfrm>
       </p:grpSpPr>
-      <p:sp>
-        <p:nvSpPr>
-          <p:cNvPr name="Freeform 2" id="2"/>
-          <p:cNvSpPr/>
-          <p:nvPr/>
-        </p:nvSpPr>
+      <p:pic>
+        <p:nvPicPr>
+          <p:cNvPr name="Picture 2" id="2"/>
+          <p:cNvPicPr>
+            <a:picLocks noChangeAspect="true"/>
+          </p:cNvPicPr>
+          <p:nvPr/>
+        </p:nvPicPr>
+        <p:blipFill>
+          <a:blip r:embed="rId2"/>
+          <a:srcRect l="0" t="0" r="0" b="0"/>
+          <a:stretch>
+            <a:fillRect/>
+          </a:stretch>
+        </p:blipFill>
         <p:spPr>
           <a:xfrm flipH="false" flipV="false" rot="0">
-            <a:off x="4756918" y="1028700"/>
-            <a:ext cx="8774163" cy="5838807"/>
-          </a:xfrm>
-          <a:custGeom>
-            <a:avLst/>
-            <a:gdLst/>
-            <a:ahLst/>
-            <a:cxnLst/>
-            <a:rect r="r" b="b" t="t" l="l"/>
-            <a:pathLst>
-              <a:path h="5838807" w="8774163">
-                <a:moveTo>
-                  <a:pt x="0" y="0"/>
-                </a:moveTo>
-                <a:lnTo>
-                  <a:pt x="8774164" y="0"/>
-                </a:lnTo>
-                <a:lnTo>
-                  <a:pt x="8774164" y="5838807"/>
-                </a:lnTo>
-                <a:lnTo>
-                  <a:pt x="0" y="5838807"/>
-                </a:lnTo>
-                <a:lnTo>
-                  <a:pt x="0" y="0"/>
-                </a:lnTo>
-                <a:close/>
-              </a:path>
-            </a:pathLst>
-          </a:custGeom>
-          <a:blipFill>
-            <a:blip r:embed="rId2"/>
-            <a:stretch>
-              <a:fillRect l="0" t="0" r="0" b="0"/>
-            </a:stretch>
-          </a:blipFill>
-        </p:spPr>
-      </p:sp>
-      <p:sp>
-        <p:nvSpPr>
-          <p:cNvPr name="TextBox 3" id="3"/>
+            <a:off x="13655377" y="6809666"/>
+            <a:ext cx="6229999" cy="6954669"/>
+          </a:xfrm>
+          <a:prstGeom prst="rect">
+            <a:avLst/>
+          </a:prstGeom>
+        </p:spPr>
+      </p:pic>
+      <p:pic>
+        <p:nvPicPr>
+          <p:cNvPr name="Picture 3" id="3"/>
+          <p:cNvPicPr>
+            <a:picLocks noChangeAspect="true"/>
+          </p:cNvPicPr>
+          <p:nvPr/>
+        </p:nvPicPr>
+        <p:blipFill>
+          <a:blip r:embed="rId3"/>
+          <a:srcRect l="0" t="0" r="0" b="0"/>
+          <a:stretch>
+            <a:fillRect/>
+          </a:stretch>
+        </p:blipFill>
+        <p:spPr>
+          <a:xfrm flipH="false" flipV="false" rot="0">
+            <a:off x="0" y="0"/>
+            <a:ext cx="6925457" cy="4700654"/>
+          </a:xfrm>
+          <a:prstGeom prst="rect">
+            <a:avLst/>
+          </a:prstGeom>
+        </p:spPr>
+      </p:pic>
+      <p:sp>
+        <p:nvSpPr>
+          <p:cNvPr name="TextBox 4" id="4"/>
           <p:cNvSpPr txBox="true"/>
           <p:nvPr/>
         </p:nvSpPr>
         <p:spPr>
           <a:xfrm rot="0">
-            <a:off x="2717556" y="7058025"/>
-            <a:ext cx="12852888" cy="2200275"/>
+            <a:off x="2717556" y="4181475"/>
+            <a:ext cx="12852888" cy="1914525"/>
           </a:xfrm>
           <a:prstGeom prst="rect">
             <a:avLst/>
@@ -5554,12 +5567,12 @@
                 <a:solidFill>
                   <a:srgbClr val="000000"/>
                 </a:solidFill>
-                <a:latin typeface="Jua"/>
-                <a:ea typeface="Jua"/>
-                <a:cs typeface="Jua"/>
-                <a:sym typeface="Jua"/>
+                <a:latin typeface="무궁화 고딕"/>
+                <a:ea typeface="무궁화 고딕"/>
+                <a:cs typeface="무궁화 고딕"/>
+                <a:sym typeface="무궁화 고딕"/>
               </a:rPr>
-              <a:t>이탈리아</a:t>
+              <a:t>캔버라</a:t>
             </a:r>
           </a:p>
         </p:txBody>
@@ -5596,66 +5609,62 @@
           <a:chExt cx="0" cy="0"/>
         </a:xfrm>
       </p:grpSpPr>
-      <p:pic>
-        <p:nvPicPr>
-          <p:cNvPr name="Picture 2" id="2"/>
-          <p:cNvPicPr>
-            <a:picLocks noChangeAspect="true"/>
-          </p:cNvPicPr>
-          <p:nvPr/>
-        </p:nvPicPr>
-        <p:blipFill>
-          <a:blip r:embed="rId2"/>
-          <a:srcRect l="0" t="0" r="0" b="0"/>
-          <a:stretch>
-            <a:fillRect/>
-          </a:stretch>
-        </p:blipFill>
+      <p:sp>
+        <p:nvSpPr>
+          <p:cNvPr name="Freeform 2" id="2"/>
+          <p:cNvSpPr/>
+          <p:nvPr/>
+        </p:nvSpPr>
         <p:spPr>
           <a:xfrm flipH="false" flipV="false" rot="0">
-            <a:off x="13655377" y="6809666"/>
-            <a:ext cx="6229999" cy="6954669"/>
-          </a:xfrm>
-          <a:prstGeom prst="rect">
-            <a:avLst/>
-          </a:prstGeom>
-        </p:spPr>
-      </p:pic>
-      <p:pic>
-        <p:nvPicPr>
-          <p:cNvPr name="Picture 3" id="3"/>
-          <p:cNvPicPr>
-            <a:picLocks noChangeAspect="true"/>
-          </p:cNvPicPr>
-          <p:nvPr/>
-        </p:nvPicPr>
-        <p:blipFill>
-          <a:blip r:embed="rId3"/>
-          <a:srcRect l="0" t="0" r="0" b="0"/>
-          <a:stretch>
-            <a:fillRect/>
-          </a:stretch>
-        </p:blipFill>
-        <p:spPr>
-          <a:xfrm flipH="false" flipV="false" rot="0">
-            <a:off x="0" y="0"/>
-            <a:ext cx="6925457" cy="4700654"/>
-          </a:xfrm>
-          <a:prstGeom prst="rect">
-            <a:avLst/>
-          </a:prstGeom>
-        </p:spPr>
-      </p:pic>
-      <p:sp>
-        <p:nvSpPr>
-          <p:cNvPr name="TextBox 4" id="4"/>
+            <a:off x="4756918" y="1028700"/>
+            <a:ext cx="8774163" cy="5838807"/>
+          </a:xfrm>
+          <a:custGeom>
+            <a:avLst/>
+            <a:gdLst/>
+            <a:ahLst/>
+            <a:cxnLst/>
+            <a:rect r="r" b="b" t="t" l="l"/>
+            <a:pathLst>
+              <a:path h="5838807" w="8774163">
+                <a:moveTo>
+                  <a:pt x="0" y="0"/>
+                </a:moveTo>
+                <a:lnTo>
+                  <a:pt x="8774164" y="0"/>
+                </a:lnTo>
+                <a:lnTo>
+                  <a:pt x="8774164" y="5838807"/>
+                </a:lnTo>
+                <a:lnTo>
+                  <a:pt x="0" y="5838807"/>
+                </a:lnTo>
+                <a:lnTo>
+                  <a:pt x="0" y="0"/>
+                </a:lnTo>
+                <a:close/>
+              </a:path>
+            </a:pathLst>
+          </a:custGeom>
+          <a:blipFill>
+            <a:blip r:embed="rId2"/>
+            <a:stretch>
+              <a:fillRect l="0" t="0" r="0" b="0"/>
+            </a:stretch>
+          </a:blipFill>
+        </p:spPr>
+      </p:sp>
+      <p:sp>
+        <p:nvSpPr>
+          <p:cNvPr name="TextBox 3" id="3"/>
           <p:cNvSpPr txBox="true"/>
           <p:nvPr/>
         </p:nvSpPr>
         <p:spPr>
           <a:xfrm rot="0">
-            <a:off x="2717556" y="3895725"/>
-            <a:ext cx="12852888" cy="2200275"/>
+            <a:off x="2717556" y="7343775"/>
+            <a:ext cx="12852888" cy="1914525"/>
           </a:xfrm>
           <a:prstGeom prst="rect">
             <a:avLst/>
@@ -5677,12 +5686,12 @@
                 <a:solidFill>
                   <a:srgbClr val="000000"/>
                 </a:solidFill>
-                <a:latin typeface="Jua"/>
-                <a:ea typeface="Jua"/>
-                <a:cs typeface="Jua"/>
-                <a:sym typeface="Jua"/>
+                <a:latin typeface="무궁화 고딕"/>
+                <a:ea typeface="무궁화 고딕"/>
+                <a:cs typeface="무궁화 고딕"/>
+                <a:sym typeface="무궁화 고딕"/>
               </a:rPr>
-              <a:t>로마</a:t>
+              <a:t>이탈리아</a:t>
             </a:r>
           </a:p>
         </p:txBody>
@@ -5719,62 +5728,66 @@
           <a:chExt cx="0" cy="0"/>
         </a:xfrm>
       </p:grpSpPr>
-      <p:sp>
-        <p:nvSpPr>
-          <p:cNvPr name="Freeform 2" id="2"/>
-          <p:cNvSpPr/>
-          <p:nvPr/>
-        </p:nvSpPr>
+      <p:pic>
+        <p:nvPicPr>
+          <p:cNvPr name="Picture 2" id="2"/>
+          <p:cNvPicPr>
+            <a:picLocks noChangeAspect="true"/>
+          </p:cNvPicPr>
+          <p:nvPr/>
+        </p:nvPicPr>
+        <p:blipFill>
+          <a:blip r:embed="rId2"/>
+          <a:srcRect l="0" t="0" r="0" b="0"/>
+          <a:stretch>
+            <a:fillRect/>
+          </a:stretch>
+        </p:blipFill>
         <p:spPr>
           <a:xfrm flipH="false" flipV="false" rot="0">
-            <a:off x="4768669" y="1028700"/>
-            <a:ext cx="8750663" cy="5823168"/>
-          </a:xfrm>
-          <a:custGeom>
-            <a:avLst/>
-            <a:gdLst/>
-            <a:ahLst/>
-            <a:cxnLst/>
-            <a:rect r="r" b="b" t="t" l="l"/>
-            <a:pathLst>
-              <a:path h="5823168" w="8750663">
-                <a:moveTo>
-                  <a:pt x="0" y="0"/>
-                </a:moveTo>
-                <a:lnTo>
-                  <a:pt x="8750662" y="0"/>
-                </a:lnTo>
-                <a:lnTo>
-                  <a:pt x="8750662" y="5823168"/>
-                </a:lnTo>
-                <a:lnTo>
-                  <a:pt x="0" y="5823168"/>
-                </a:lnTo>
-                <a:lnTo>
-                  <a:pt x="0" y="0"/>
-                </a:lnTo>
-                <a:close/>
-              </a:path>
-            </a:pathLst>
-          </a:custGeom>
-          <a:blipFill>
-            <a:blip r:embed="rId2"/>
-            <a:stretch>
-              <a:fillRect l="0" t="0" r="0" b="0"/>
-            </a:stretch>
-          </a:blipFill>
-        </p:spPr>
-      </p:sp>
-      <p:sp>
-        <p:nvSpPr>
-          <p:cNvPr name="TextBox 3" id="3"/>
+            <a:off x="13655377" y="6809666"/>
+            <a:ext cx="6229999" cy="6954669"/>
+          </a:xfrm>
+          <a:prstGeom prst="rect">
+            <a:avLst/>
+          </a:prstGeom>
+        </p:spPr>
+      </p:pic>
+      <p:pic>
+        <p:nvPicPr>
+          <p:cNvPr name="Picture 3" id="3"/>
+          <p:cNvPicPr>
+            <a:picLocks noChangeAspect="true"/>
+          </p:cNvPicPr>
+          <p:nvPr/>
+        </p:nvPicPr>
+        <p:blipFill>
+          <a:blip r:embed="rId3"/>
+          <a:srcRect l="0" t="0" r="0" b="0"/>
+          <a:stretch>
+            <a:fillRect/>
+          </a:stretch>
+        </p:blipFill>
+        <p:spPr>
+          <a:xfrm flipH="false" flipV="false" rot="0">
+            <a:off x="0" y="0"/>
+            <a:ext cx="6925457" cy="4700654"/>
+          </a:xfrm>
+          <a:prstGeom prst="rect">
+            <a:avLst/>
+          </a:prstGeom>
+        </p:spPr>
+      </p:pic>
+      <p:sp>
+        <p:nvSpPr>
+          <p:cNvPr name="TextBox 4" id="4"/>
           <p:cNvSpPr txBox="true"/>
           <p:nvPr/>
         </p:nvSpPr>
         <p:spPr>
           <a:xfrm rot="0">
-            <a:off x="2717556" y="7058025"/>
-            <a:ext cx="12852888" cy="2200275"/>
+            <a:off x="2717556" y="4181475"/>
+            <a:ext cx="12852888" cy="1914525"/>
           </a:xfrm>
           <a:prstGeom prst="rect">
             <a:avLst/>
@@ -5796,12 +5809,12 @@
                 <a:solidFill>
                   <a:srgbClr val="000000"/>
                 </a:solidFill>
-                <a:latin typeface="Jua"/>
-                <a:ea typeface="Jua"/>
-                <a:cs typeface="Jua"/>
-                <a:sym typeface="Jua"/>
+                <a:latin typeface="무궁화 고딕"/>
+                <a:ea typeface="무궁화 고딕"/>
+                <a:cs typeface="무궁화 고딕"/>
+                <a:sym typeface="무궁화 고딕"/>
               </a:rPr>
-              <a:t>스페인</a:t>
+              <a:t>로마</a:t>
             </a:r>
           </a:p>
         </p:txBody>
@@ -5838,66 +5851,62 @@
           <a:chExt cx="0" cy="0"/>
         </a:xfrm>
       </p:grpSpPr>
-      <p:pic>
-        <p:nvPicPr>
-          <p:cNvPr name="Picture 2" id="2"/>
-          <p:cNvPicPr>
-            <a:picLocks noChangeAspect="true"/>
-          </p:cNvPicPr>
-          <p:nvPr/>
-        </p:nvPicPr>
-        <p:blipFill>
-          <a:blip r:embed="rId2"/>
-          <a:srcRect l="0" t="0" r="0" b="0"/>
-          <a:stretch>
-            <a:fillRect/>
-          </a:stretch>
-        </p:blipFill>
+      <p:sp>
+        <p:nvSpPr>
+          <p:cNvPr name="Freeform 2" id="2"/>
+          <p:cNvSpPr/>
+          <p:nvPr/>
+        </p:nvSpPr>
         <p:spPr>
           <a:xfrm flipH="false" flipV="false" rot="0">
-            <a:off x="13655377" y="6809666"/>
-            <a:ext cx="6229999" cy="6954669"/>
-          </a:xfrm>
-          <a:prstGeom prst="rect">
-            <a:avLst/>
-          </a:prstGeom>
-        </p:spPr>
-      </p:pic>
-      <p:pic>
-        <p:nvPicPr>
-          <p:cNvPr name="Picture 3" id="3"/>
-          <p:cNvPicPr>
-            <a:picLocks noChangeAspect="true"/>
-          </p:cNvPicPr>
-          <p:nvPr/>
-        </p:nvPicPr>
-        <p:blipFill>
-          <a:blip r:embed="rId3"/>
-          <a:srcRect l="0" t="0" r="0" b="0"/>
-          <a:stretch>
-            <a:fillRect/>
-          </a:stretch>
-        </p:blipFill>
-        <p:spPr>
-          <a:xfrm flipH="false" flipV="false" rot="0">
-            <a:off x="0" y="0"/>
-            <a:ext cx="6925457" cy="4700654"/>
-          </a:xfrm>
-          <a:prstGeom prst="rect">
-            <a:avLst/>
-          </a:prstGeom>
-        </p:spPr>
-      </p:pic>
-      <p:sp>
-        <p:nvSpPr>
-          <p:cNvPr name="TextBox 4" id="4"/>
+            <a:off x="4768669" y="1028700"/>
+            <a:ext cx="8750663" cy="5823168"/>
+          </a:xfrm>
+          <a:custGeom>
+            <a:avLst/>
+            <a:gdLst/>
+            <a:ahLst/>
+            <a:cxnLst/>
+            <a:rect r="r" b="b" t="t" l="l"/>
+            <a:pathLst>
+              <a:path h="5823168" w="8750663">
+                <a:moveTo>
+                  <a:pt x="0" y="0"/>
+                </a:moveTo>
+                <a:lnTo>
+                  <a:pt x="8750662" y="0"/>
+                </a:lnTo>
+                <a:lnTo>
+                  <a:pt x="8750662" y="5823168"/>
+                </a:lnTo>
+                <a:lnTo>
+                  <a:pt x="0" y="5823168"/>
+                </a:lnTo>
+                <a:lnTo>
+                  <a:pt x="0" y="0"/>
+                </a:lnTo>
+                <a:close/>
+              </a:path>
+            </a:pathLst>
+          </a:custGeom>
+          <a:blipFill>
+            <a:blip r:embed="rId2"/>
+            <a:stretch>
+              <a:fillRect l="0" t="0" r="0" b="0"/>
+            </a:stretch>
+          </a:blipFill>
+        </p:spPr>
+      </p:sp>
+      <p:sp>
+        <p:nvSpPr>
+          <p:cNvPr name="TextBox 3" id="3"/>
           <p:cNvSpPr txBox="true"/>
           <p:nvPr/>
         </p:nvSpPr>
         <p:spPr>
           <a:xfrm rot="0">
-            <a:off x="2717556" y="3895725"/>
-            <a:ext cx="12852888" cy="2200275"/>
+            <a:off x="2717556" y="7343775"/>
+            <a:ext cx="12852888" cy="1914525"/>
           </a:xfrm>
           <a:prstGeom prst="rect">
             <a:avLst/>
@@ -5919,12 +5928,12 @@
                 <a:solidFill>
                   <a:srgbClr val="000000"/>
                 </a:solidFill>
-                <a:latin typeface="Jua"/>
-                <a:ea typeface="Jua"/>
-                <a:cs typeface="Jua"/>
-                <a:sym typeface="Jua"/>
+                <a:latin typeface="무궁화 고딕"/>
+                <a:ea typeface="무궁화 고딕"/>
+                <a:cs typeface="무궁화 고딕"/>
+                <a:sym typeface="무궁화 고딕"/>
               </a:rPr>
-              <a:t>마드리드</a:t>
+              <a:t>스페인</a:t>
             </a:r>
           </a:p>
         </p:txBody>
@@ -5961,62 +5970,66 @@
           <a:chExt cx="0" cy="0"/>
         </a:xfrm>
       </p:grpSpPr>
-      <p:sp>
-        <p:nvSpPr>
-          <p:cNvPr name="Freeform 2" id="2"/>
-          <p:cNvSpPr/>
-          <p:nvPr/>
-        </p:nvSpPr>
+      <p:pic>
+        <p:nvPicPr>
+          <p:cNvPr name="Picture 2" id="2"/>
+          <p:cNvPicPr>
+            <a:picLocks noChangeAspect="true"/>
+          </p:cNvPicPr>
+          <p:nvPr/>
+        </p:nvPicPr>
+        <p:blipFill>
+          <a:blip r:embed="rId2"/>
+          <a:srcRect l="0" t="0" r="0" b="0"/>
+          <a:stretch>
+            <a:fillRect/>
+          </a:stretch>
+        </p:blipFill>
         <p:spPr>
           <a:xfrm flipH="false" flipV="false" rot="0">
-            <a:off x="3828862" y="1028700"/>
-            <a:ext cx="10630276" cy="6080518"/>
-          </a:xfrm>
-          <a:custGeom>
-            <a:avLst/>
-            <a:gdLst/>
-            <a:ahLst/>
-            <a:cxnLst/>
-            <a:rect r="r" b="b" t="t" l="l"/>
-            <a:pathLst>
-              <a:path h="6080518" w="10630276">
-                <a:moveTo>
-                  <a:pt x="0" y="0"/>
-                </a:moveTo>
-                <a:lnTo>
-                  <a:pt x="10630276" y="0"/>
-                </a:lnTo>
-                <a:lnTo>
-                  <a:pt x="10630276" y="6080518"/>
-                </a:lnTo>
-                <a:lnTo>
-                  <a:pt x="0" y="6080518"/>
-                </a:lnTo>
-                <a:lnTo>
-                  <a:pt x="0" y="0"/>
-                </a:lnTo>
-                <a:close/>
-              </a:path>
-            </a:pathLst>
-          </a:custGeom>
-          <a:blipFill>
-            <a:blip r:embed="rId2"/>
-            <a:stretch>
-              <a:fillRect l="0" t="0" r="0" b="0"/>
-            </a:stretch>
-          </a:blipFill>
-        </p:spPr>
-      </p:sp>
-      <p:sp>
-        <p:nvSpPr>
-          <p:cNvPr name="TextBox 3" id="3"/>
+            <a:off x="13655377" y="6809666"/>
+            <a:ext cx="6229999" cy="6954669"/>
+          </a:xfrm>
+          <a:prstGeom prst="rect">
+            <a:avLst/>
+          </a:prstGeom>
+        </p:spPr>
+      </p:pic>
+      <p:pic>
+        <p:nvPicPr>
+          <p:cNvPr name="Picture 3" id="3"/>
+          <p:cNvPicPr>
+            <a:picLocks noChangeAspect="true"/>
+          </p:cNvPicPr>
+          <p:nvPr/>
+        </p:nvPicPr>
+        <p:blipFill>
+          <a:blip r:embed="rId3"/>
+          <a:srcRect l="0" t="0" r="0" b="0"/>
+          <a:stretch>
+            <a:fillRect/>
+          </a:stretch>
+        </p:blipFill>
+        <p:spPr>
+          <a:xfrm flipH="false" flipV="false" rot="0">
+            <a:off x="0" y="0"/>
+            <a:ext cx="6925457" cy="4700654"/>
+          </a:xfrm>
+          <a:prstGeom prst="rect">
+            <a:avLst/>
+          </a:prstGeom>
+        </p:spPr>
+      </p:pic>
+      <p:sp>
+        <p:nvSpPr>
+          <p:cNvPr name="TextBox 4" id="4"/>
           <p:cNvSpPr txBox="true"/>
           <p:nvPr/>
         </p:nvSpPr>
         <p:spPr>
           <a:xfrm rot="0">
-            <a:off x="2717556" y="7058025"/>
-            <a:ext cx="12852888" cy="2200275"/>
+            <a:off x="2717556" y="4181475"/>
+            <a:ext cx="12852888" cy="1914525"/>
           </a:xfrm>
           <a:prstGeom prst="rect">
             <a:avLst/>
@@ -6038,12 +6051,12 @@
                 <a:solidFill>
                   <a:srgbClr val="000000"/>
                 </a:solidFill>
-                <a:latin typeface="Jua"/>
-                <a:ea typeface="Jua"/>
-                <a:cs typeface="Jua"/>
-                <a:sym typeface="Jua"/>
+                <a:latin typeface="무궁화 고딕"/>
+                <a:ea typeface="무궁화 고딕"/>
+                <a:cs typeface="무궁화 고딕"/>
+                <a:sym typeface="무궁화 고딕"/>
               </a:rPr>
-              <a:t>멕시코</a:t>
+              <a:t>마드리드</a:t>
             </a:r>
           </a:p>
         </p:txBody>
@@ -6080,66 +6093,62 @@
           <a:chExt cx="0" cy="0"/>
         </a:xfrm>
       </p:grpSpPr>
-      <p:pic>
-        <p:nvPicPr>
-          <p:cNvPr name="Picture 2" id="2"/>
-          <p:cNvPicPr>
-            <a:picLocks noChangeAspect="true"/>
-          </p:cNvPicPr>
-          <p:nvPr/>
-        </p:nvPicPr>
-        <p:blipFill>
-          <a:blip r:embed="rId2"/>
-          <a:srcRect l="0" t="0" r="0" b="0"/>
-          <a:stretch>
-            <a:fillRect/>
-          </a:stretch>
-        </p:blipFill>
+      <p:sp>
+        <p:nvSpPr>
+          <p:cNvPr name="Freeform 2" id="2"/>
+          <p:cNvSpPr/>
+          <p:nvPr/>
+        </p:nvSpPr>
         <p:spPr>
           <a:xfrm flipH="false" flipV="false" rot="0">
-            <a:off x="13655377" y="6809666"/>
-            <a:ext cx="6229999" cy="6954669"/>
-          </a:xfrm>
-          <a:prstGeom prst="rect">
-            <a:avLst/>
-          </a:prstGeom>
-        </p:spPr>
-      </p:pic>
-      <p:pic>
-        <p:nvPicPr>
-          <p:cNvPr name="Picture 3" id="3"/>
-          <p:cNvPicPr>
-            <a:picLocks noChangeAspect="true"/>
-          </p:cNvPicPr>
-          <p:nvPr/>
-        </p:nvPicPr>
-        <p:blipFill>
-          <a:blip r:embed="rId3"/>
-          <a:srcRect l="0" t="0" r="0" b="0"/>
-          <a:stretch>
-            <a:fillRect/>
-          </a:stretch>
-        </p:blipFill>
-        <p:spPr>
-          <a:xfrm flipH="false" flipV="false" rot="0">
-            <a:off x="0" y="0"/>
-            <a:ext cx="6925457" cy="4700654"/>
-          </a:xfrm>
-          <a:prstGeom prst="rect">
-            <a:avLst/>
-          </a:prstGeom>
-        </p:spPr>
-      </p:pic>
-      <p:sp>
-        <p:nvSpPr>
-          <p:cNvPr name="TextBox 4" id="4"/>
+            <a:off x="3828862" y="1028700"/>
+            <a:ext cx="10630276" cy="6080518"/>
+          </a:xfrm>
+          <a:custGeom>
+            <a:avLst/>
+            <a:gdLst/>
+            <a:ahLst/>
+            <a:cxnLst/>
+            <a:rect r="r" b="b" t="t" l="l"/>
+            <a:pathLst>
+              <a:path h="6080518" w="10630276">
+                <a:moveTo>
+                  <a:pt x="0" y="0"/>
+                </a:moveTo>
+                <a:lnTo>
+                  <a:pt x="10630276" y="0"/>
+                </a:lnTo>
+                <a:lnTo>
+                  <a:pt x="10630276" y="6080518"/>
+                </a:lnTo>
+                <a:lnTo>
+                  <a:pt x="0" y="6080518"/>
+                </a:lnTo>
+                <a:lnTo>
+                  <a:pt x="0" y="0"/>
+                </a:lnTo>
+                <a:close/>
+              </a:path>
+            </a:pathLst>
+          </a:custGeom>
+          <a:blipFill>
+            <a:blip r:embed="rId2"/>
+            <a:stretch>
+              <a:fillRect l="0" t="0" r="0" b="0"/>
+            </a:stretch>
+          </a:blipFill>
+        </p:spPr>
+      </p:sp>
+      <p:sp>
+        <p:nvSpPr>
+          <p:cNvPr name="TextBox 3" id="3"/>
           <p:cNvSpPr txBox="true"/>
           <p:nvPr/>
         </p:nvSpPr>
         <p:spPr>
           <a:xfrm rot="0">
-            <a:off x="2717556" y="3895725"/>
-            <a:ext cx="12852888" cy="2200275"/>
+            <a:off x="2717556" y="7343775"/>
+            <a:ext cx="12852888" cy="1914525"/>
           </a:xfrm>
           <a:prstGeom prst="rect">
             <a:avLst/>
@@ -6161,12 +6170,12 @@
                 <a:solidFill>
                   <a:srgbClr val="000000"/>
                 </a:solidFill>
-                <a:latin typeface="Jua"/>
-                <a:ea typeface="Jua"/>
-                <a:cs typeface="Jua"/>
-                <a:sym typeface="Jua"/>
+                <a:latin typeface="무궁화 고딕"/>
+                <a:ea typeface="무궁화 고딕"/>
+                <a:cs typeface="무궁화 고딕"/>
+                <a:sym typeface="무궁화 고딕"/>
               </a:rPr>
-              <a:t>멕시코시티</a:t>
+              <a:t>멕시코</a:t>
             </a:r>
           </a:p>
         </p:txBody>
@@ -6185,7 +6194,7 @@
     <p:bg>
       <p:bgPr>
         <a:solidFill>
-          <a:srgbClr val="7D8AAB"/>
+          <a:srgbClr val="FFFAEF"/>
         </a:solidFill>
       </p:bgPr>
     </p:bg>
@@ -6203,9 +6212,50 @@
           <a:chExt cx="0" cy="0"/>
         </a:xfrm>
       </p:grpSpPr>
+      <p:sp>
+        <p:nvSpPr>
+          <p:cNvPr name="TextBox 2" id="2"/>
+          <p:cNvSpPr txBox="true"/>
+          <p:nvPr/>
+        </p:nvSpPr>
+        <p:spPr>
+          <a:xfrm rot="0">
+            <a:off x="3238925" y="4378545"/>
+            <a:ext cx="11810151" cy="1914525"/>
+          </a:xfrm>
+          <a:prstGeom prst="rect">
+            <a:avLst/>
+          </a:prstGeom>
+        </p:spPr>
+        <p:txBody>
+          <a:bodyPr anchor="t" rtlCol="false" tIns="0" lIns="0" bIns="0" rIns="0">
+            <a:spAutoFit/>
+          </a:bodyPr>
+          <a:lstStyle/>
+          <a:p>
+            <a:pPr algn="ctr">
+              <a:lnSpc>
+                <a:spcPts val="15000"/>
+              </a:lnSpc>
+            </a:pPr>
+            <a:r>
+              <a:rPr lang="en-US" sz="12500">
+                <a:solidFill>
+                  <a:srgbClr val="000000"/>
+                </a:solidFill>
+                <a:latin typeface="무궁화 고딕"/>
+                <a:ea typeface="무궁화 고딕"/>
+                <a:cs typeface="무궁화 고딕"/>
+                <a:sym typeface="무궁화 고딕"/>
+              </a:rPr>
+              <a:t>팀을 나눠주세요!</a:t>
+            </a:r>
+          </a:p>
+        </p:txBody>
+      </p:sp>
       <p:pic>
         <p:nvPicPr>
-          <p:cNvPr name="Picture 2" id="2"/>
+          <p:cNvPr name="Picture 3" id="3"/>
           <p:cNvPicPr>
             <a:picLocks noChangeAspect="true"/>
           </p:cNvPicPr>
@@ -6213,15 +6263,15 @@
         </p:nvPicPr>
         <p:blipFill>
           <a:blip r:embed="rId2"/>
-          <a:srcRect l="64771" t="21970" r="0" b="0"/>
+          <a:srcRect l="0" t="0" r="0" b="0"/>
           <a:stretch>
             <a:fillRect/>
           </a:stretch>
         </p:blipFill>
         <p:spPr>
-          <a:xfrm flipH="false" flipV="false" rot="5400000">
-            <a:off x="2310738" y="4172522"/>
-            <a:ext cx="3803740" cy="8425216"/>
+          <a:xfrm flipH="false" flipV="false" rot="0">
+            <a:off x="13655377" y="6809666"/>
+            <a:ext cx="6229999" cy="6954669"/>
           </a:xfrm>
           <a:prstGeom prst="rect">
             <a:avLst/>
@@ -6230,7 +6280,7 @@
       </p:pic>
       <p:pic>
         <p:nvPicPr>
-          <p:cNvPr name="Picture 3" id="3"/>
+          <p:cNvPr name="Picture 4" id="4"/>
           <p:cNvPicPr>
             <a:picLocks noChangeAspect="true"/>
           </p:cNvPicPr>
@@ -6244,100 +6294,15 @@
           </a:stretch>
         </p:blipFill>
         <p:spPr>
-          <a:xfrm flipH="false" flipV="false" rot="-7094170">
-            <a:off x="14148180" y="-2590072"/>
-            <a:ext cx="7036829" cy="7237544"/>
+          <a:xfrm flipH="false" flipV="false" rot="0">
+            <a:off x="0" y="0"/>
+            <a:ext cx="6925457" cy="4700654"/>
           </a:xfrm>
           <a:prstGeom prst="rect">
             <a:avLst/>
           </a:prstGeom>
         </p:spPr>
       </p:pic>
-      <p:sp>
-        <p:nvSpPr>
-          <p:cNvPr name="TextBox 4" id="4"/>
-          <p:cNvSpPr txBox="true"/>
-          <p:nvPr/>
-        </p:nvSpPr>
-        <p:spPr>
-          <a:xfrm rot="0">
-            <a:off x="1028700" y="3892867"/>
-            <a:ext cx="15555091" cy="2200275"/>
-          </a:xfrm>
-          <a:prstGeom prst="rect">
-            <a:avLst/>
-          </a:prstGeom>
-        </p:spPr>
-        <p:txBody>
-          <a:bodyPr anchor="t" rtlCol="false" tIns="0" lIns="0" bIns="0" rIns="0">
-            <a:spAutoFit/>
-          </a:bodyPr>
-          <a:lstStyle/>
-          <a:p>
-            <a:pPr algn="ctr">
-              <a:lnSpc>
-                <a:spcPts val="15000"/>
-              </a:lnSpc>
-            </a:pPr>
-            <a:r>
-              <a:rPr lang="en-US" sz="12500">
-                <a:solidFill>
-                  <a:srgbClr val="FFFAEF"/>
-                </a:solidFill>
-                <a:latin typeface="Jua"/>
-                <a:ea typeface="Jua"/>
-                <a:cs typeface="Jua"/>
-                <a:sym typeface="Jua"/>
-              </a:rPr>
-              <a:t>수도 맞추기</a:t>
-            </a:r>
-          </a:p>
-        </p:txBody>
-      </p:sp>
-      <p:sp>
-        <p:nvSpPr>
-          <p:cNvPr name="TextBox 5" id="5"/>
-          <p:cNvSpPr txBox="true"/>
-          <p:nvPr/>
-        </p:nvSpPr>
-        <p:spPr>
-          <a:xfrm rot="0">
-            <a:off x="15264803" y="9812655"/>
-            <a:ext cx="2637975" cy="474345"/>
-          </a:xfrm>
-          <a:prstGeom prst="rect">
-            <a:avLst/>
-          </a:prstGeom>
-        </p:spPr>
-        <p:txBody>
-          <a:bodyPr anchor="t" rtlCol="false" tIns="0" lIns="0" bIns="0" rIns="0">
-            <a:spAutoFit/>
-          </a:bodyPr>
-          <a:lstStyle/>
-          <a:p>
-            <a:pPr algn="r">
-              <a:lnSpc>
-                <a:spcPts val="3779"/>
-              </a:lnSpc>
-              <a:spcBef>
-                <a:spcPct val="0"/>
-              </a:spcBef>
-            </a:pPr>
-            <a:r>
-              <a:rPr lang="en-US" sz="2700" spc="-135">
-                <a:solidFill>
-                  <a:srgbClr val="FFFFFF"/>
-                </a:solidFill>
-                <a:latin typeface="TDTD갬성명조"/>
-                <a:ea typeface="TDTD갬성명조"/>
-                <a:cs typeface="TDTD갬성명조"/>
-                <a:sym typeface="TDTD갬성명조"/>
-              </a:rPr>
-              <a:t>ⓒ 2026. Sunday Play</a:t>
-            </a:r>
-          </a:p>
-        </p:txBody>
-      </p:sp>
     </p:spTree>
   </p:cSld>
   <p:clrMapOvr>
@@ -6370,62 +6335,66 @@
           <a:chExt cx="0" cy="0"/>
         </a:xfrm>
       </p:grpSpPr>
-      <p:sp>
-        <p:nvSpPr>
-          <p:cNvPr name="Freeform 2" id="2"/>
-          <p:cNvSpPr/>
-          <p:nvPr/>
-        </p:nvSpPr>
+      <p:pic>
+        <p:nvPicPr>
+          <p:cNvPr name="Picture 2" id="2"/>
+          <p:cNvPicPr>
+            <a:picLocks noChangeAspect="true"/>
+          </p:cNvPicPr>
+          <p:nvPr/>
+        </p:nvPicPr>
+        <p:blipFill>
+          <a:blip r:embed="rId2"/>
+          <a:srcRect l="0" t="0" r="0" b="0"/>
+          <a:stretch>
+            <a:fillRect/>
+          </a:stretch>
+        </p:blipFill>
         <p:spPr>
           <a:xfrm flipH="false" flipV="false" rot="0">
-            <a:off x="4680706" y="1028700"/>
-            <a:ext cx="8926588" cy="5940238"/>
-          </a:xfrm>
-          <a:custGeom>
-            <a:avLst/>
-            <a:gdLst/>
-            <a:ahLst/>
-            <a:cxnLst/>
-            <a:rect r="r" b="b" t="t" l="l"/>
-            <a:pathLst>
-              <a:path h="5940238" w="8926588">
-                <a:moveTo>
-                  <a:pt x="0" y="0"/>
-                </a:moveTo>
-                <a:lnTo>
-                  <a:pt x="8926588" y="0"/>
-                </a:lnTo>
-                <a:lnTo>
-                  <a:pt x="8926588" y="5940238"/>
-                </a:lnTo>
-                <a:lnTo>
-                  <a:pt x="0" y="5940238"/>
-                </a:lnTo>
-                <a:lnTo>
-                  <a:pt x="0" y="0"/>
-                </a:lnTo>
-                <a:close/>
-              </a:path>
-            </a:pathLst>
-          </a:custGeom>
-          <a:blipFill>
-            <a:blip r:embed="rId2"/>
-            <a:stretch>
-              <a:fillRect l="0" t="0" r="0" b="0"/>
-            </a:stretch>
-          </a:blipFill>
-        </p:spPr>
-      </p:sp>
-      <p:sp>
-        <p:nvSpPr>
-          <p:cNvPr name="TextBox 3" id="3"/>
+            <a:off x="13655377" y="6809666"/>
+            <a:ext cx="6229999" cy="6954669"/>
+          </a:xfrm>
+          <a:prstGeom prst="rect">
+            <a:avLst/>
+          </a:prstGeom>
+        </p:spPr>
+      </p:pic>
+      <p:pic>
+        <p:nvPicPr>
+          <p:cNvPr name="Picture 3" id="3"/>
+          <p:cNvPicPr>
+            <a:picLocks noChangeAspect="true"/>
+          </p:cNvPicPr>
+          <p:nvPr/>
+        </p:nvPicPr>
+        <p:blipFill>
+          <a:blip r:embed="rId3"/>
+          <a:srcRect l="0" t="0" r="0" b="0"/>
+          <a:stretch>
+            <a:fillRect/>
+          </a:stretch>
+        </p:blipFill>
+        <p:spPr>
+          <a:xfrm flipH="false" flipV="false" rot="0">
+            <a:off x="0" y="0"/>
+            <a:ext cx="6925457" cy="4700654"/>
+          </a:xfrm>
+          <a:prstGeom prst="rect">
+            <a:avLst/>
+          </a:prstGeom>
+        </p:spPr>
+      </p:pic>
+      <p:sp>
+        <p:nvSpPr>
+          <p:cNvPr name="TextBox 4" id="4"/>
           <p:cNvSpPr txBox="true"/>
           <p:nvPr/>
         </p:nvSpPr>
         <p:spPr>
           <a:xfrm rot="0">
-            <a:off x="2717556" y="7058025"/>
-            <a:ext cx="12852888" cy="2200275"/>
+            <a:off x="2717556" y="4181475"/>
+            <a:ext cx="12852888" cy="1914525"/>
           </a:xfrm>
           <a:prstGeom prst="rect">
             <a:avLst/>
@@ -6447,12 +6416,12 @@
                 <a:solidFill>
                   <a:srgbClr val="000000"/>
                 </a:solidFill>
-                <a:latin typeface="Jua"/>
-                <a:ea typeface="Jua"/>
-                <a:cs typeface="Jua"/>
-                <a:sym typeface="Jua"/>
+                <a:latin typeface="무궁화 고딕"/>
+                <a:ea typeface="무궁화 고딕"/>
+                <a:cs typeface="무궁화 고딕"/>
+                <a:sym typeface="무궁화 고딕"/>
               </a:rPr>
-              <a:t>인도</a:t>
+              <a:t>멕시코시티</a:t>
             </a:r>
           </a:p>
         </p:txBody>
@@ -6489,66 +6458,62 @@
           <a:chExt cx="0" cy="0"/>
         </a:xfrm>
       </p:grpSpPr>
-      <p:pic>
-        <p:nvPicPr>
-          <p:cNvPr name="Picture 2" id="2"/>
-          <p:cNvPicPr>
-            <a:picLocks noChangeAspect="true"/>
-          </p:cNvPicPr>
-          <p:nvPr/>
-        </p:nvPicPr>
-        <p:blipFill>
-          <a:blip r:embed="rId2"/>
-          <a:srcRect l="0" t="0" r="0" b="0"/>
-          <a:stretch>
-            <a:fillRect/>
-          </a:stretch>
-        </p:blipFill>
+      <p:sp>
+        <p:nvSpPr>
+          <p:cNvPr name="Freeform 2" id="2"/>
+          <p:cNvSpPr/>
+          <p:nvPr/>
+        </p:nvSpPr>
         <p:spPr>
           <a:xfrm flipH="false" flipV="false" rot="0">
-            <a:off x="13655377" y="6809666"/>
-            <a:ext cx="6229999" cy="6954669"/>
-          </a:xfrm>
-          <a:prstGeom prst="rect">
-            <a:avLst/>
-          </a:prstGeom>
-        </p:spPr>
-      </p:pic>
-      <p:pic>
-        <p:nvPicPr>
-          <p:cNvPr name="Picture 3" id="3"/>
-          <p:cNvPicPr>
-            <a:picLocks noChangeAspect="true"/>
-          </p:cNvPicPr>
-          <p:nvPr/>
-        </p:nvPicPr>
-        <p:blipFill>
-          <a:blip r:embed="rId3"/>
-          <a:srcRect l="0" t="0" r="0" b="0"/>
-          <a:stretch>
-            <a:fillRect/>
-          </a:stretch>
-        </p:blipFill>
-        <p:spPr>
-          <a:xfrm flipH="false" flipV="false" rot="0">
-            <a:off x="0" y="0"/>
-            <a:ext cx="6925457" cy="4700654"/>
-          </a:xfrm>
-          <a:prstGeom prst="rect">
-            <a:avLst/>
-          </a:prstGeom>
-        </p:spPr>
-      </p:pic>
-      <p:sp>
-        <p:nvSpPr>
-          <p:cNvPr name="TextBox 4" id="4"/>
+            <a:off x="4680706" y="1028700"/>
+            <a:ext cx="8926588" cy="5940238"/>
+          </a:xfrm>
+          <a:custGeom>
+            <a:avLst/>
+            <a:gdLst/>
+            <a:ahLst/>
+            <a:cxnLst/>
+            <a:rect r="r" b="b" t="t" l="l"/>
+            <a:pathLst>
+              <a:path h="5940238" w="8926588">
+                <a:moveTo>
+                  <a:pt x="0" y="0"/>
+                </a:moveTo>
+                <a:lnTo>
+                  <a:pt x="8926588" y="0"/>
+                </a:lnTo>
+                <a:lnTo>
+                  <a:pt x="8926588" y="5940238"/>
+                </a:lnTo>
+                <a:lnTo>
+                  <a:pt x="0" y="5940238"/>
+                </a:lnTo>
+                <a:lnTo>
+                  <a:pt x="0" y="0"/>
+                </a:lnTo>
+                <a:close/>
+              </a:path>
+            </a:pathLst>
+          </a:custGeom>
+          <a:blipFill>
+            <a:blip r:embed="rId2"/>
+            <a:stretch>
+              <a:fillRect l="0" t="0" r="0" b="0"/>
+            </a:stretch>
+          </a:blipFill>
+        </p:spPr>
+      </p:sp>
+      <p:sp>
+        <p:nvSpPr>
+          <p:cNvPr name="TextBox 3" id="3"/>
           <p:cNvSpPr txBox="true"/>
           <p:nvPr/>
         </p:nvSpPr>
         <p:spPr>
           <a:xfrm rot="0">
-            <a:off x="2717556" y="3895725"/>
-            <a:ext cx="12852888" cy="2200275"/>
+            <a:off x="2717556" y="7343775"/>
+            <a:ext cx="12852888" cy="1914525"/>
           </a:xfrm>
           <a:prstGeom prst="rect">
             <a:avLst/>
@@ -6570,12 +6535,12 @@
                 <a:solidFill>
                   <a:srgbClr val="000000"/>
                 </a:solidFill>
-                <a:latin typeface="Jua"/>
-                <a:ea typeface="Jua"/>
-                <a:cs typeface="Jua"/>
-                <a:sym typeface="Jua"/>
+                <a:latin typeface="무궁화 고딕"/>
+                <a:ea typeface="무궁화 고딕"/>
+                <a:cs typeface="무궁화 고딕"/>
+                <a:sym typeface="무궁화 고딕"/>
               </a:rPr>
-              <a:t>뉴델리</a:t>
+              <a:t>인도</a:t>
             </a:r>
           </a:p>
         </p:txBody>
@@ -6612,62 +6577,66 @@
           <a:chExt cx="0" cy="0"/>
         </a:xfrm>
       </p:grpSpPr>
-      <p:sp>
-        <p:nvSpPr>
-          <p:cNvPr name="Freeform 2" id="2"/>
-          <p:cNvSpPr/>
-          <p:nvPr/>
-        </p:nvSpPr>
+      <p:pic>
+        <p:nvPicPr>
+          <p:cNvPr name="Picture 2" id="2"/>
+          <p:cNvPicPr>
+            <a:picLocks noChangeAspect="true"/>
+          </p:cNvPicPr>
+          <p:nvPr/>
+        </p:nvPicPr>
+        <p:blipFill>
+          <a:blip r:embed="rId2"/>
+          <a:srcRect l="0" t="0" r="0" b="0"/>
+          <a:stretch>
+            <a:fillRect/>
+          </a:stretch>
+        </p:blipFill>
         <p:spPr>
           <a:xfrm flipH="false" flipV="false" rot="0">
-            <a:off x="4574474" y="1028700"/>
-            <a:ext cx="9139052" cy="6081624"/>
-          </a:xfrm>
-          <a:custGeom>
-            <a:avLst/>
-            <a:gdLst/>
-            <a:ahLst/>
-            <a:cxnLst/>
-            <a:rect r="r" b="b" t="t" l="l"/>
-            <a:pathLst>
-              <a:path h="6081624" w="9139052">
-                <a:moveTo>
-                  <a:pt x="0" y="0"/>
-                </a:moveTo>
-                <a:lnTo>
-                  <a:pt x="9139052" y="0"/>
-                </a:lnTo>
-                <a:lnTo>
-                  <a:pt x="9139052" y="6081624"/>
-                </a:lnTo>
-                <a:lnTo>
-                  <a:pt x="0" y="6081624"/>
-                </a:lnTo>
-                <a:lnTo>
-                  <a:pt x="0" y="0"/>
-                </a:lnTo>
-                <a:close/>
-              </a:path>
-            </a:pathLst>
-          </a:custGeom>
-          <a:blipFill>
-            <a:blip r:embed="rId2"/>
-            <a:stretch>
-              <a:fillRect l="0" t="0" r="0" b="0"/>
-            </a:stretch>
-          </a:blipFill>
-        </p:spPr>
-      </p:sp>
-      <p:sp>
-        <p:nvSpPr>
-          <p:cNvPr name="TextBox 3" id="3"/>
+            <a:off x="13655377" y="6809666"/>
+            <a:ext cx="6229999" cy="6954669"/>
+          </a:xfrm>
+          <a:prstGeom prst="rect">
+            <a:avLst/>
+          </a:prstGeom>
+        </p:spPr>
+      </p:pic>
+      <p:pic>
+        <p:nvPicPr>
+          <p:cNvPr name="Picture 3" id="3"/>
+          <p:cNvPicPr>
+            <a:picLocks noChangeAspect="true"/>
+          </p:cNvPicPr>
+          <p:nvPr/>
+        </p:nvPicPr>
+        <p:blipFill>
+          <a:blip r:embed="rId3"/>
+          <a:srcRect l="0" t="0" r="0" b="0"/>
+          <a:stretch>
+            <a:fillRect/>
+          </a:stretch>
+        </p:blipFill>
+        <p:spPr>
+          <a:xfrm flipH="false" flipV="false" rot="0">
+            <a:off x="0" y="0"/>
+            <a:ext cx="6925457" cy="4700654"/>
+          </a:xfrm>
+          <a:prstGeom prst="rect">
+            <a:avLst/>
+          </a:prstGeom>
+        </p:spPr>
+      </p:pic>
+      <p:sp>
+        <p:nvSpPr>
+          <p:cNvPr name="TextBox 4" id="4"/>
           <p:cNvSpPr txBox="true"/>
           <p:nvPr/>
         </p:nvSpPr>
         <p:spPr>
           <a:xfrm rot="0">
-            <a:off x="2717556" y="7058025"/>
-            <a:ext cx="12852888" cy="2200275"/>
+            <a:off x="2717556" y="4181475"/>
+            <a:ext cx="12852888" cy="1914525"/>
           </a:xfrm>
           <a:prstGeom prst="rect">
             <a:avLst/>
@@ -6689,12 +6658,12 @@
                 <a:solidFill>
                   <a:srgbClr val="000000"/>
                 </a:solidFill>
-                <a:latin typeface="Jua"/>
-                <a:ea typeface="Jua"/>
-                <a:cs typeface="Jua"/>
-                <a:sym typeface="Jua"/>
+                <a:latin typeface="무궁화 고딕"/>
+                <a:ea typeface="무궁화 고딕"/>
+                <a:cs typeface="무궁화 고딕"/>
+                <a:sym typeface="무궁화 고딕"/>
               </a:rPr>
-              <a:t>러시아</a:t>
+              <a:t>뉴델리</a:t>
             </a:r>
           </a:p>
         </p:txBody>
@@ -6731,66 +6700,62 @@
           <a:chExt cx="0" cy="0"/>
         </a:xfrm>
       </p:grpSpPr>
-      <p:pic>
-        <p:nvPicPr>
-          <p:cNvPr name="Picture 2" id="2"/>
-          <p:cNvPicPr>
-            <a:picLocks noChangeAspect="true"/>
-          </p:cNvPicPr>
-          <p:nvPr/>
-        </p:nvPicPr>
-        <p:blipFill>
-          <a:blip r:embed="rId2"/>
-          <a:srcRect l="0" t="0" r="0" b="0"/>
-          <a:stretch>
-            <a:fillRect/>
-          </a:stretch>
-        </p:blipFill>
+      <p:sp>
+        <p:nvSpPr>
+          <p:cNvPr name="Freeform 2" id="2"/>
+          <p:cNvSpPr/>
+          <p:nvPr/>
+        </p:nvSpPr>
         <p:spPr>
           <a:xfrm flipH="false" flipV="false" rot="0">
-            <a:off x="13655377" y="6809666"/>
-            <a:ext cx="6229999" cy="6954669"/>
-          </a:xfrm>
-          <a:prstGeom prst="rect">
-            <a:avLst/>
-          </a:prstGeom>
-        </p:spPr>
-      </p:pic>
-      <p:pic>
-        <p:nvPicPr>
-          <p:cNvPr name="Picture 3" id="3"/>
-          <p:cNvPicPr>
-            <a:picLocks noChangeAspect="true"/>
-          </p:cNvPicPr>
-          <p:nvPr/>
-        </p:nvPicPr>
-        <p:blipFill>
-          <a:blip r:embed="rId3"/>
-          <a:srcRect l="0" t="0" r="0" b="0"/>
-          <a:stretch>
-            <a:fillRect/>
-          </a:stretch>
-        </p:blipFill>
-        <p:spPr>
-          <a:xfrm flipH="false" flipV="false" rot="0">
-            <a:off x="0" y="0"/>
-            <a:ext cx="6925457" cy="4700654"/>
-          </a:xfrm>
-          <a:prstGeom prst="rect">
-            <a:avLst/>
-          </a:prstGeom>
-        </p:spPr>
-      </p:pic>
-      <p:sp>
-        <p:nvSpPr>
-          <p:cNvPr name="TextBox 4" id="4"/>
+            <a:off x="4574474" y="1028700"/>
+            <a:ext cx="9139052" cy="6081624"/>
+          </a:xfrm>
+          <a:custGeom>
+            <a:avLst/>
+            <a:gdLst/>
+            <a:ahLst/>
+            <a:cxnLst/>
+            <a:rect r="r" b="b" t="t" l="l"/>
+            <a:pathLst>
+              <a:path h="6081624" w="9139052">
+                <a:moveTo>
+                  <a:pt x="0" y="0"/>
+                </a:moveTo>
+                <a:lnTo>
+                  <a:pt x="9139052" y="0"/>
+                </a:lnTo>
+                <a:lnTo>
+                  <a:pt x="9139052" y="6081624"/>
+                </a:lnTo>
+                <a:lnTo>
+                  <a:pt x="0" y="6081624"/>
+                </a:lnTo>
+                <a:lnTo>
+                  <a:pt x="0" y="0"/>
+                </a:lnTo>
+                <a:close/>
+              </a:path>
+            </a:pathLst>
+          </a:custGeom>
+          <a:blipFill>
+            <a:blip r:embed="rId2"/>
+            <a:stretch>
+              <a:fillRect l="0" t="0" r="0" b="0"/>
+            </a:stretch>
+          </a:blipFill>
+        </p:spPr>
+      </p:sp>
+      <p:sp>
+        <p:nvSpPr>
+          <p:cNvPr name="TextBox 3" id="3"/>
           <p:cNvSpPr txBox="true"/>
           <p:nvPr/>
         </p:nvSpPr>
         <p:spPr>
           <a:xfrm rot="0">
-            <a:off x="2717556" y="3895725"/>
-            <a:ext cx="12852888" cy="2200275"/>
+            <a:off x="2717556" y="7343775"/>
+            <a:ext cx="12852888" cy="1914525"/>
           </a:xfrm>
           <a:prstGeom prst="rect">
             <a:avLst/>
@@ -6812,12 +6777,12 @@
                 <a:solidFill>
                   <a:srgbClr val="000000"/>
                 </a:solidFill>
-                <a:latin typeface="Jua"/>
-                <a:ea typeface="Jua"/>
-                <a:cs typeface="Jua"/>
-                <a:sym typeface="Jua"/>
+                <a:latin typeface="무궁화 고딕"/>
+                <a:ea typeface="무궁화 고딕"/>
+                <a:cs typeface="무궁화 고딕"/>
+                <a:sym typeface="무궁화 고딕"/>
               </a:rPr>
-              <a:t>모스크바</a:t>
+              <a:t>러시아</a:t>
             </a:r>
           </a:p>
         </p:txBody>
@@ -6854,62 +6819,66 @@
           <a:chExt cx="0" cy="0"/>
         </a:xfrm>
       </p:grpSpPr>
-      <p:sp>
-        <p:nvSpPr>
-          <p:cNvPr name="Freeform 2" id="2"/>
-          <p:cNvSpPr/>
-          <p:nvPr/>
-        </p:nvSpPr>
+      <p:pic>
+        <p:nvPicPr>
+          <p:cNvPr name="Picture 2" id="2"/>
+          <p:cNvPicPr>
+            <a:picLocks noChangeAspect="true"/>
+          </p:cNvPicPr>
+          <p:nvPr/>
+        </p:nvPicPr>
+        <p:blipFill>
+          <a:blip r:embed="rId2"/>
+          <a:srcRect l="0" t="0" r="0" b="0"/>
+          <a:stretch>
+            <a:fillRect/>
+          </a:stretch>
+        </p:blipFill>
         <p:spPr>
           <a:xfrm flipH="false" flipV="false" rot="0">
-            <a:off x="4655209" y="1028700"/>
-            <a:ext cx="8977581" cy="5974172"/>
-          </a:xfrm>
-          <a:custGeom>
-            <a:avLst/>
-            <a:gdLst/>
-            <a:ahLst/>
-            <a:cxnLst/>
-            <a:rect r="r" b="b" t="t" l="l"/>
-            <a:pathLst>
-              <a:path h="5974172" w="8977581">
-                <a:moveTo>
-                  <a:pt x="0" y="0"/>
-                </a:moveTo>
-                <a:lnTo>
-                  <a:pt x="8977582" y="0"/>
-                </a:lnTo>
-                <a:lnTo>
-                  <a:pt x="8977582" y="5974172"/>
-                </a:lnTo>
-                <a:lnTo>
-                  <a:pt x="0" y="5974172"/>
-                </a:lnTo>
-                <a:lnTo>
-                  <a:pt x="0" y="0"/>
-                </a:lnTo>
-                <a:close/>
-              </a:path>
-            </a:pathLst>
-          </a:custGeom>
-          <a:blipFill>
-            <a:blip r:embed="rId2"/>
-            <a:stretch>
-              <a:fillRect l="0" t="0" r="0" b="0"/>
-            </a:stretch>
-          </a:blipFill>
-        </p:spPr>
-      </p:sp>
-      <p:sp>
-        <p:nvSpPr>
-          <p:cNvPr name="TextBox 3" id="3"/>
+            <a:off x="13655377" y="6809666"/>
+            <a:ext cx="6229999" cy="6954669"/>
+          </a:xfrm>
+          <a:prstGeom prst="rect">
+            <a:avLst/>
+          </a:prstGeom>
+        </p:spPr>
+      </p:pic>
+      <p:pic>
+        <p:nvPicPr>
+          <p:cNvPr name="Picture 3" id="3"/>
+          <p:cNvPicPr>
+            <a:picLocks noChangeAspect="true"/>
+          </p:cNvPicPr>
+          <p:nvPr/>
+        </p:nvPicPr>
+        <p:blipFill>
+          <a:blip r:embed="rId3"/>
+          <a:srcRect l="0" t="0" r="0" b="0"/>
+          <a:stretch>
+            <a:fillRect/>
+          </a:stretch>
+        </p:blipFill>
+        <p:spPr>
+          <a:xfrm flipH="false" flipV="false" rot="0">
+            <a:off x="0" y="0"/>
+            <a:ext cx="6925457" cy="4700654"/>
+          </a:xfrm>
+          <a:prstGeom prst="rect">
+            <a:avLst/>
+          </a:prstGeom>
+        </p:spPr>
+      </p:pic>
+      <p:sp>
+        <p:nvSpPr>
+          <p:cNvPr name="TextBox 4" id="4"/>
           <p:cNvSpPr txBox="true"/>
           <p:nvPr/>
         </p:nvSpPr>
         <p:spPr>
           <a:xfrm rot="0">
-            <a:off x="2717556" y="7058025"/>
-            <a:ext cx="12852888" cy="2200275"/>
+            <a:off x="2717556" y="4181475"/>
+            <a:ext cx="12852888" cy="1914525"/>
           </a:xfrm>
           <a:prstGeom prst="rect">
             <a:avLst/>
@@ -6931,12 +6900,12 @@
                 <a:solidFill>
                   <a:srgbClr val="000000"/>
                 </a:solidFill>
-                <a:latin typeface="Jua"/>
-                <a:ea typeface="Jua"/>
-                <a:cs typeface="Jua"/>
-                <a:sym typeface="Jua"/>
+                <a:latin typeface="무궁화 고딕"/>
+                <a:ea typeface="무궁화 고딕"/>
+                <a:cs typeface="무궁화 고딕"/>
+                <a:sym typeface="무궁화 고딕"/>
               </a:rPr>
-              <a:t>튀르키예</a:t>
+              <a:t>모스크바</a:t>
             </a:r>
           </a:p>
         </p:txBody>
@@ -6973,66 +6942,62 @@
           <a:chExt cx="0" cy="0"/>
         </a:xfrm>
       </p:grpSpPr>
-      <p:pic>
-        <p:nvPicPr>
-          <p:cNvPr name="Picture 2" id="2"/>
-          <p:cNvPicPr>
-            <a:picLocks noChangeAspect="true"/>
-          </p:cNvPicPr>
-          <p:nvPr/>
-        </p:nvPicPr>
-        <p:blipFill>
-          <a:blip r:embed="rId2"/>
-          <a:srcRect l="0" t="0" r="0" b="0"/>
-          <a:stretch>
-            <a:fillRect/>
-          </a:stretch>
-        </p:blipFill>
+      <p:sp>
+        <p:nvSpPr>
+          <p:cNvPr name="Freeform 2" id="2"/>
+          <p:cNvSpPr/>
+          <p:nvPr/>
+        </p:nvSpPr>
         <p:spPr>
           <a:xfrm flipH="false" flipV="false" rot="0">
-            <a:off x="13655377" y="6809666"/>
-            <a:ext cx="6229999" cy="6954669"/>
-          </a:xfrm>
-          <a:prstGeom prst="rect">
-            <a:avLst/>
-          </a:prstGeom>
-        </p:spPr>
-      </p:pic>
-      <p:pic>
-        <p:nvPicPr>
-          <p:cNvPr name="Picture 3" id="3"/>
-          <p:cNvPicPr>
-            <a:picLocks noChangeAspect="true"/>
-          </p:cNvPicPr>
-          <p:nvPr/>
-        </p:nvPicPr>
-        <p:blipFill>
-          <a:blip r:embed="rId3"/>
-          <a:srcRect l="0" t="0" r="0" b="0"/>
-          <a:stretch>
-            <a:fillRect/>
-          </a:stretch>
-        </p:blipFill>
-        <p:spPr>
-          <a:xfrm flipH="false" flipV="false" rot="0">
-            <a:off x="0" y="0"/>
-            <a:ext cx="6925457" cy="4700654"/>
-          </a:xfrm>
-          <a:prstGeom prst="rect">
-            <a:avLst/>
-          </a:prstGeom>
-        </p:spPr>
-      </p:pic>
-      <p:sp>
-        <p:nvSpPr>
-          <p:cNvPr name="TextBox 4" id="4"/>
+            <a:off x="4655209" y="1028700"/>
+            <a:ext cx="8977581" cy="5974172"/>
+          </a:xfrm>
+          <a:custGeom>
+            <a:avLst/>
+            <a:gdLst/>
+            <a:ahLst/>
+            <a:cxnLst/>
+            <a:rect r="r" b="b" t="t" l="l"/>
+            <a:pathLst>
+              <a:path h="5974172" w="8977581">
+                <a:moveTo>
+                  <a:pt x="0" y="0"/>
+                </a:moveTo>
+                <a:lnTo>
+                  <a:pt x="8977582" y="0"/>
+                </a:lnTo>
+                <a:lnTo>
+                  <a:pt x="8977582" y="5974172"/>
+                </a:lnTo>
+                <a:lnTo>
+                  <a:pt x="0" y="5974172"/>
+                </a:lnTo>
+                <a:lnTo>
+                  <a:pt x="0" y="0"/>
+                </a:lnTo>
+                <a:close/>
+              </a:path>
+            </a:pathLst>
+          </a:custGeom>
+          <a:blipFill>
+            <a:blip r:embed="rId2"/>
+            <a:stretch>
+              <a:fillRect l="0" t="0" r="0" b="0"/>
+            </a:stretch>
+          </a:blipFill>
+        </p:spPr>
+      </p:sp>
+      <p:sp>
+        <p:nvSpPr>
+          <p:cNvPr name="TextBox 3" id="3"/>
           <p:cNvSpPr txBox="true"/>
           <p:nvPr/>
         </p:nvSpPr>
         <p:spPr>
           <a:xfrm rot="0">
-            <a:off x="2717556" y="3895725"/>
-            <a:ext cx="12852888" cy="2200275"/>
+            <a:off x="2717556" y="7343775"/>
+            <a:ext cx="12852888" cy="1914525"/>
           </a:xfrm>
           <a:prstGeom prst="rect">
             <a:avLst/>
@@ -7054,12 +7019,12 @@
                 <a:solidFill>
                   <a:srgbClr val="000000"/>
                 </a:solidFill>
-                <a:latin typeface="Jua"/>
-                <a:ea typeface="Jua"/>
-                <a:cs typeface="Jua"/>
-                <a:sym typeface="Jua"/>
+                <a:latin typeface="무궁화 고딕"/>
+                <a:ea typeface="무궁화 고딕"/>
+                <a:cs typeface="무궁화 고딕"/>
+                <a:sym typeface="무궁화 고딕"/>
               </a:rPr>
-              <a:t>앙카라</a:t>
+              <a:t>튀르키예</a:t>
             </a:r>
           </a:p>
         </p:txBody>
@@ -7096,62 +7061,66 @@
           <a:chExt cx="0" cy="0"/>
         </a:xfrm>
       </p:grpSpPr>
-      <p:sp>
-        <p:nvSpPr>
-          <p:cNvPr name="Freeform 2" id="2"/>
-          <p:cNvSpPr/>
-          <p:nvPr/>
-        </p:nvSpPr>
+      <p:pic>
+        <p:nvPicPr>
+          <p:cNvPr name="Picture 2" id="2"/>
+          <p:cNvPicPr>
+            <a:picLocks noChangeAspect="true"/>
+          </p:cNvPicPr>
+          <p:nvPr/>
+        </p:nvPicPr>
+        <p:blipFill>
+          <a:blip r:embed="rId2"/>
+          <a:srcRect l="0" t="0" r="0" b="0"/>
+          <a:stretch>
+            <a:fillRect/>
+          </a:stretch>
+        </p:blipFill>
         <p:spPr>
           <a:xfrm flipH="false" flipV="false" rot="0">
-            <a:off x="6186237" y="1028700"/>
-            <a:ext cx="5915526" cy="5915526"/>
-          </a:xfrm>
-          <a:custGeom>
-            <a:avLst/>
-            <a:gdLst/>
-            <a:ahLst/>
-            <a:cxnLst/>
-            <a:rect r="r" b="b" t="t" l="l"/>
-            <a:pathLst>
-              <a:path h="5915526" w="5915526">
-                <a:moveTo>
-                  <a:pt x="0" y="0"/>
-                </a:moveTo>
-                <a:lnTo>
-                  <a:pt x="5915526" y="0"/>
-                </a:lnTo>
-                <a:lnTo>
-                  <a:pt x="5915526" y="5915526"/>
-                </a:lnTo>
-                <a:lnTo>
-                  <a:pt x="0" y="5915526"/>
-                </a:lnTo>
-                <a:lnTo>
-                  <a:pt x="0" y="0"/>
-                </a:lnTo>
-                <a:close/>
-              </a:path>
-            </a:pathLst>
-          </a:custGeom>
-          <a:blipFill>
-            <a:blip r:embed="rId2"/>
-            <a:stretch>
-              <a:fillRect l="0" t="0" r="0" b="0"/>
-            </a:stretch>
-          </a:blipFill>
-        </p:spPr>
-      </p:sp>
-      <p:sp>
-        <p:nvSpPr>
-          <p:cNvPr name="TextBox 3" id="3"/>
+            <a:off x="13655377" y="6809666"/>
+            <a:ext cx="6229999" cy="6954669"/>
+          </a:xfrm>
+          <a:prstGeom prst="rect">
+            <a:avLst/>
+          </a:prstGeom>
+        </p:spPr>
+      </p:pic>
+      <p:pic>
+        <p:nvPicPr>
+          <p:cNvPr name="Picture 3" id="3"/>
+          <p:cNvPicPr>
+            <a:picLocks noChangeAspect="true"/>
+          </p:cNvPicPr>
+          <p:nvPr/>
+        </p:nvPicPr>
+        <p:blipFill>
+          <a:blip r:embed="rId3"/>
+          <a:srcRect l="0" t="0" r="0" b="0"/>
+          <a:stretch>
+            <a:fillRect/>
+          </a:stretch>
+        </p:blipFill>
+        <p:spPr>
+          <a:xfrm flipH="false" flipV="false" rot="0">
+            <a:off x="0" y="0"/>
+            <a:ext cx="6925457" cy="4700654"/>
+          </a:xfrm>
+          <a:prstGeom prst="rect">
+            <a:avLst/>
+          </a:prstGeom>
+        </p:spPr>
+      </p:pic>
+      <p:sp>
+        <p:nvSpPr>
+          <p:cNvPr name="TextBox 4" id="4"/>
           <p:cNvSpPr txBox="true"/>
           <p:nvPr/>
         </p:nvSpPr>
         <p:spPr>
           <a:xfrm rot="0">
-            <a:off x="2717556" y="7058025"/>
-            <a:ext cx="12852888" cy="2200275"/>
+            <a:off x="2717556" y="4181475"/>
+            <a:ext cx="12852888" cy="1914525"/>
           </a:xfrm>
           <a:prstGeom prst="rect">
             <a:avLst/>
@@ -7173,12 +7142,12 @@
                 <a:solidFill>
                   <a:srgbClr val="000000"/>
                 </a:solidFill>
-                <a:latin typeface="Jua"/>
-                <a:ea typeface="Jua"/>
-                <a:cs typeface="Jua"/>
-                <a:sym typeface="Jua"/>
+                <a:latin typeface="무궁화 고딕"/>
+                <a:ea typeface="무궁화 고딕"/>
+                <a:cs typeface="무궁화 고딕"/>
+                <a:sym typeface="무궁화 고딕"/>
               </a:rPr>
-              <a:t>스위스</a:t>
+              <a:t>앙카라</a:t>
             </a:r>
           </a:p>
         </p:txBody>
@@ -7215,66 +7184,62 @@
           <a:chExt cx="0" cy="0"/>
         </a:xfrm>
       </p:grpSpPr>
-      <p:pic>
-        <p:nvPicPr>
-          <p:cNvPr name="Picture 2" id="2"/>
-          <p:cNvPicPr>
-            <a:picLocks noChangeAspect="true"/>
-          </p:cNvPicPr>
-          <p:nvPr/>
-        </p:nvPicPr>
-        <p:blipFill>
-          <a:blip r:embed="rId2"/>
-          <a:srcRect l="0" t="0" r="0" b="0"/>
-          <a:stretch>
-            <a:fillRect/>
-          </a:stretch>
-        </p:blipFill>
+      <p:sp>
+        <p:nvSpPr>
+          <p:cNvPr name="Freeform 2" id="2"/>
+          <p:cNvSpPr/>
+          <p:nvPr/>
+        </p:nvSpPr>
         <p:spPr>
           <a:xfrm flipH="false" flipV="false" rot="0">
-            <a:off x="13655377" y="6809666"/>
-            <a:ext cx="6229999" cy="6954669"/>
-          </a:xfrm>
-          <a:prstGeom prst="rect">
-            <a:avLst/>
-          </a:prstGeom>
-        </p:spPr>
-      </p:pic>
-      <p:pic>
-        <p:nvPicPr>
-          <p:cNvPr name="Picture 3" id="3"/>
-          <p:cNvPicPr>
-            <a:picLocks noChangeAspect="true"/>
-          </p:cNvPicPr>
-          <p:nvPr/>
-        </p:nvPicPr>
-        <p:blipFill>
-          <a:blip r:embed="rId3"/>
-          <a:srcRect l="0" t="0" r="0" b="0"/>
-          <a:stretch>
-            <a:fillRect/>
-          </a:stretch>
-        </p:blipFill>
-        <p:spPr>
-          <a:xfrm flipH="false" flipV="false" rot="0">
-            <a:off x="0" y="0"/>
-            <a:ext cx="6925457" cy="4700654"/>
-          </a:xfrm>
-          <a:prstGeom prst="rect">
-            <a:avLst/>
-          </a:prstGeom>
-        </p:spPr>
-      </p:pic>
-      <p:sp>
-        <p:nvSpPr>
-          <p:cNvPr name="TextBox 4" id="4"/>
+            <a:off x="6186237" y="1028700"/>
+            <a:ext cx="5915526" cy="5915526"/>
+          </a:xfrm>
+          <a:custGeom>
+            <a:avLst/>
+            <a:gdLst/>
+            <a:ahLst/>
+            <a:cxnLst/>
+            <a:rect r="r" b="b" t="t" l="l"/>
+            <a:pathLst>
+              <a:path h="5915526" w="5915526">
+                <a:moveTo>
+                  <a:pt x="0" y="0"/>
+                </a:moveTo>
+                <a:lnTo>
+                  <a:pt x="5915526" y="0"/>
+                </a:lnTo>
+                <a:lnTo>
+                  <a:pt x="5915526" y="5915526"/>
+                </a:lnTo>
+                <a:lnTo>
+                  <a:pt x="0" y="5915526"/>
+                </a:lnTo>
+                <a:lnTo>
+                  <a:pt x="0" y="0"/>
+                </a:lnTo>
+                <a:close/>
+              </a:path>
+            </a:pathLst>
+          </a:custGeom>
+          <a:blipFill>
+            <a:blip r:embed="rId2"/>
+            <a:stretch>
+              <a:fillRect l="0" t="0" r="0" b="0"/>
+            </a:stretch>
+          </a:blipFill>
+        </p:spPr>
+      </p:sp>
+      <p:sp>
+        <p:nvSpPr>
+          <p:cNvPr name="TextBox 3" id="3"/>
           <p:cNvSpPr txBox="true"/>
           <p:nvPr/>
         </p:nvSpPr>
         <p:spPr>
           <a:xfrm rot="0">
-            <a:off x="2717556" y="3895725"/>
-            <a:ext cx="12852888" cy="2200275"/>
+            <a:off x="2717556" y="7343775"/>
+            <a:ext cx="12852888" cy="1914525"/>
           </a:xfrm>
           <a:prstGeom prst="rect">
             <a:avLst/>
@@ -7296,12 +7261,12 @@
                 <a:solidFill>
                   <a:srgbClr val="000000"/>
                 </a:solidFill>
-                <a:latin typeface="Jua"/>
-                <a:ea typeface="Jua"/>
-                <a:cs typeface="Jua"/>
-                <a:sym typeface="Jua"/>
+                <a:latin typeface="무궁화 고딕"/>
+                <a:ea typeface="무궁화 고딕"/>
+                <a:cs typeface="무궁화 고딕"/>
+                <a:sym typeface="무궁화 고딕"/>
               </a:rPr>
-              <a:t>베른</a:t>
+              <a:t>스위스</a:t>
             </a:r>
           </a:p>
         </p:txBody>
@@ -7338,62 +7303,66 @@
           <a:chExt cx="0" cy="0"/>
         </a:xfrm>
       </p:grpSpPr>
-      <p:sp>
-        <p:nvSpPr>
-          <p:cNvPr name="Freeform 2" id="2"/>
-          <p:cNvSpPr/>
-          <p:nvPr/>
-        </p:nvSpPr>
+      <p:pic>
+        <p:nvPicPr>
+          <p:cNvPr name="Picture 2" id="2"/>
+          <p:cNvPicPr>
+            <a:picLocks noChangeAspect="true"/>
+          </p:cNvPicPr>
+          <p:nvPr/>
+        </p:nvPicPr>
+        <p:blipFill>
+          <a:blip r:embed="rId2"/>
+          <a:srcRect l="0" t="0" r="0" b="0"/>
+          <a:stretch>
+            <a:fillRect/>
+          </a:stretch>
+        </p:blipFill>
         <p:spPr>
           <a:xfrm flipH="false" flipV="false" rot="0">
-            <a:off x="4507637" y="1028700"/>
-            <a:ext cx="9272727" cy="6170578"/>
-          </a:xfrm>
-          <a:custGeom>
-            <a:avLst/>
-            <a:gdLst/>
-            <a:ahLst/>
-            <a:cxnLst/>
-            <a:rect r="r" b="b" t="t" l="l"/>
-            <a:pathLst>
-              <a:path h="6170578" w="9272727">
-                <a:moveTo>
-                  <a:pt x="0" y="0"/>
-                </a:moveTo>
-                <a:lnTo>
-                  <a:pt x="9272726" y="0"/>
-                </a:lnTo>
-                <a:lnTo>
-                  <a:pt x="9272726" y="6170578"/>
-                </a:lnTo>
-                <a:lnTo>
-                  <a:pt x="0" y="6170578"/>
-                </a:lnTo>
-                <a:lnTo>
-                  <a:pt x="0" y="0"/>
-                </a:lnTo>
-                <a:close/>
-              </a:path>
-            </a:pathLst>
-          </a:custGeom>
-          <a:blipFill>
-            <a:blip r:embed="rId2"/>
-            <a:stretch>
-              <a:fillRect l="0" t="0" r="0" b="0"/>
-            </a:stretch>
-          </a:blipFill>
-        </p:spPr>
-      </p:sp>
-      <p:sp>
-        <p:nvSpPr>
-          <p:cNvPr name="TextBox 3" id="3"/>
+            <a:off x="13655377" y="6809666"/>
+            <a:ext cx="6229999" cy="6954669"/>
+          </a:xfrm>
+          <a:prstGeom prst="rect">
+            <a:avLst/>
+          </a:prstGeom>
+        </p:spPr>
+      </p:pic>
+      <p:pic>
+        <p:nvPicPr>
+          <p:cNvPr name="Picture 3" id="3"/>
+          <p:cNvPicPr>
+            <a:picLocks noChangeAspect="true"/>
+          </p:cNvPicPr>
+          <p:nvPr/>
+        </p:nvPicPr>
+        <p:blipFill>
+          <a:blip r:embed="rId3"/>
+          <a:srcRect l="0" t="0" r="0" b="0"/>
+          <a:stretch>
+            <a:fillRect/>
+          </a:stretch>
+        </p:blipFill>
+        <p:spPr>
+          <a:xfrm flipH="false" flipV="false" rot="0">
+            <a:off x="0" y="0"/>
+            <a:ext cx="6925457" cy="4700654"/>
+          </a:xfrm>
+          <a:prstGeom prst="rect">
+            <a:avLst/>
+          </a:prstGeom>
+        </p:spPr>
+      </p:pic>
+      <p:sp>
+        <p:nvSpPr>
+          <p:cNvPr name="TextBox 4" id="4"/>
           <p:cNvSpPr txBox="true"/>
           <p:nvPr/>
         </p:nvSpPr>
         <p:spPr>
           <a:xfrm rot="0">
-            <a:off x="2717556" y="7058025"/>
-            <a:ext cx="12852888" cy="2200275"/>
+            <a:off x="2717556" y="4181475"/>
+            <a:ext cx="12852888" cy="1914525"/>
           </a:xfrm>
           <a:prstGeom prst="rect">
             <a:avLst/>
@@ -7415,12 +7384,12 @@
                 <a:solidFill>
                   <a:srgbClr val="000000"/>
                 </a:solidFill>
-                <a:latin typeface="Jua"/>
-                <a:ea typeface="Jua"/>
-                <a:cs typeface="Jua"/>
-                <a:sym typeface="Jua"/>
+                <a:latin typeface="무궁화 고딕"/>
+                <a:ea typeface="무궁화 고딕"/>
+                <a:cs typeface="무궁화 고딕"/>
+                <a:sym typeface="무궁화 고딕"/>
               </a:rPr>
-              <a:t>태국</a:t>
+              <a:t>베른</a:t>
             </a:r>
           </a:p>
         </p:txBody>
@@ -7457,66 +7426,62 @@
           <a:chExt cx="0" cy="0"/>
         </a:xfrm>
       </p:grpSpPr>
-      <p:pic>
-        <p:nvPicPr>
-          <p:cNvPr name="Picture 2" id="2"/>
-          <p:cNvPicPr>
-            <a:picLocks noChangeAspect="true"/>
-          </p:cNvPicPr>
-          <p:nvPr/>
-        </p:nvPicPr>
-        <p:blipFill>
-          <a:blip r:embed="rId2"/>
-          <a:srcRect l="0" t="0" r="0" b="0"/>
-          <a:stretch>
-            <a:fillRect/>
-          </a:stretch>
-        </p:blipFill>
+      <p:sp>
+        <p:nvSpPr>
+          <p:cNvPr name="Freeform 2" id="2"/>
+          <p:cNvSpPr/>
+          <p:nvPr/>
+        </p:nvSpPr>
         <p:spPr>
           <a:xfrm flipH="false" flipV="false" rot="0">
-            <a:off x="13655377" y="6809666"/>
-            <a:ext cx="6229999" cy="6954669"/>
-          </a:xfrm>
-          <a:prstGeom prst="rect">
-            <a:avLst/>
-          </a:prstGeom>
-        </p:spPr>
-      </p:pic>
-      <p:pic>
-        <p:nvPicPr>
-          <p:cNvPr name="Picture 3" id="3"/>
-          <p:cNvPicPr>
-            <a:picLocks noChangeAspect="true"/>
-          </p:cNvPicPr>
-          <p:nvPr/>
-        </p:nvPicPr>
-        <p:blipFill>
-          <a:blip r:embed="rId3"/>
-          <a:srcRect l="0" t="0" r="0" b="0"/>
-          <a:stretch>
-            <a:fillRect/>
-          </a:stretch>
-        </p:blipFill>
-        <p:spPr>
-          <a:xfrm flipH="false" flipV="false" rot="0">
-            <a:off x="0" y="0"/>
-            <a:ext cx="6925457" cy="4700654"/>
-          </a:xfrm>
-          <a:prstGeom prst="rect">
-            <a:avLst/>
-          </a:prstGeom>
-        </p:spPr>
-      </p:pic>
-      <p:sp>
-        <p:nvSpPr>
-          <p:cNvPr name="TextBox 4" id="4"/>
+            <a:off x="4507637" y="1028700"/>
+            <a:ext cx="9272727" cy="6170578"/>
+          </a:xfrm>
+          <a:custGeom>
+            <a:avLst/>
+            <a:gdLst/>
+            <a:ahLst/>
+            <a:cxnLst/>
+            <a:rect r="r" b="b" t="t" l="l"/>
+            <a:pathLst>
+              <a:path h="6170578" w="9272727">
+                <a:moveTo>
+                  <a:pt x="0" y="0"/>
+                </a:moveTo>
+                <a:lnTo>
+                  <a:pt x="9272726" y="0"/>
+                </a:lnTo>
+                <a:lnTo>
+                  <a:pt x="9272726" y="6170578"/>
+                </a:lnTo>
+                <a:lnTo>
+                  <a:pt x="0" y="6170578"/>
+                </a:lnTo>
+                <a:lnTo>
+                  <a:pt x="0" y="0"/>
+                </a:lnTo>
+                <a:close/>
+              </a:path>
+            </a:pathLst>
+          </a:custGeom>
+          <a:blipFill>
+            <a:blip r:embed="rId2"/>
+            <a:stretch>
+              <a:fillRect l="0" t="0" r="0" b="0"/>
+            </a:stretch>
+          </a:blipFill>
+        </p:spPr>
+      </p:sp>
+      <p:sp>
+        <p:nvSpPr>
+          <p:cNvPr name="TextBox 3" id="3"/>
           <p:cNvSpPr txBox="true"/>
           <p:nvPr/>
         </p:nvSpPr>
         <p:spPr>
           <a:xfrm rot="0">
-            <a:off x="2717556" y="3895725"/>
-            <a:ext cx="12852888" cy="2200275"/>
+            <a:off x="2717556" y="7343775"/>
+            <a:ext cx="12852888" cy="1914525"/>
           </a:xfrm>
           <a:prstGeom prst="rect">
             <a:avLst/>
@@ -7538,12 +7503,12 @@
                 <a:solidFill>
                   <a:srgbClr val="000000"/>
                 </a:solidFill>
-                <a:latin typeface="Jua"/>
-                <a:ea typeface="Jua"/>
-                <a:cs typeface="Jua"/>
-                <a:sym typeface="Jua"/>
+                <a:latin typeface="무궁화 고딕"/>
+                <a:ea typeface="무궁화 고딕"/>
+                <a:cs typeface="무궁화 고딕"/>
+                <a:sym typeface="무궁화 고딕"/>
               </a:rPr>
-              <a:t>방콕</a:t>
+              <a:t>태국</a:t>
             </a:r>
           </a:p>
         </p:txBody>
@@ -7562,7 +7527,7 @@
     <p:bg>
       <p:bgPr>
         <a:solidFill>
-          <a:srgbClr val="FFFAEF"/>
+          <a:srgbClr val="7D8AAB"/>
         </a:solidFill>
       </p:bgPr>
     </p:bg>
@@ -7580,62 +7545,66 @@
           <a:chExt cx="0" cy="0"/>
         </a:xfrm>
       </p:grpSpPr>
-      <p:sp>
-        <p:nvSpPr>
-          <p:cNvPr name="Freeform 2" id="2"/>
-          <p:cNvSpPr/>
-          <p:nvPr/>
-        </p:nvSpPr>
-        <p:spPr>
-          <a:xfrm flipH="false" flipV="false" rot="0">
-            <a:off x="4853662" y="1028700"/>
-            <a:ext cx="8580675" cy="5716875"/>
-          </a:xfrm>
-          <a:custGeom>
-            <a:avLst/>
-            <a:gdLst/>
-            <a:ahLst/>
-            <a:cxnLst/>
-            <a:rect r="r" b="b" t="t" l="l"/>
-            <a:pathLst>
-              <a:path h="5716875" w="8580675">
-                <a:moveTo>
-                  <a:pt x="0" y="0"/>
-                </a:moveTo>
-                <a:lnTo>
-                  <a:pt x="8580676" y="0"/>
-                </a:lnTo>
-                <a:lnTo>
-                  <a:pt x="8580676" y="5716875"/>
-                </a:lnTo>
-                <a:lnTo>
-                  <a:pt x="0" y="5716875"/>
-                </a:lnTo>
-                <a:lnTo>
-                  <a:pt x="0" y="0"/>
-                </a:lnTo>
-                <a:close/>
-              </a:path>
-            </a:pathLst>
-          </a:custGeom>
-          <a:blipFill>
-            <a:blip r:embed="rId2"/>
-            <a:stretch>
-              <a:fillRect l="0" t="0" r="0" b="0"/>
-            </a:stretch>
-          </a:blipFill>
-        </p:spPr>
-      </p:sp>
-      <p:sp>
-        <p:nvSpPr>
-          <p:cNvPr name="TextBox 3" id="3"/>
+      <p:pic>
+        <p:nvPicPr>
+          <p:cNvPr name="Picture 2" id="2"/>
+          <p:cNvPicPr>
+            <a:picLocks noChangeAspect="true"/>
+          </p:cNvPicPr>
+          <p:nvPr/>
+        </p:nvPicPr>
+        <p:blipFill>
+          <a:blip r:embed="rId2"/>
+          <a:srcRect l="64771" t="21970" r="0" b="0"/>
+          <a:stretch>
+            <a:fillRect/>
+          </a:stretch>
+        </p:blipFill>
+        <p:spPr>
+          <a:xfrm flipH="false" flipV="false" rot="5400000">
+            <a:off x="2310738" y="4172522"/>
+            <a:ext cx="3803740" cy="8425216"/>
+          </a:xfrm>
+          <a:prstGeom prst="rect">
+            <a:avLst/>
+          </a:prstGeom>
+        </p:spPr>
+      </p:pic>
+      <p:pic>
+        <p:nvPicPr>
+          <p:cNvPr name="Picture 3" id="3"/>
+          <p:cNvPicPr>
+            <a:picLocks noChangeAspect="true"/>
+          </p:cNvPicPr>
+          <p:nvPr/>
+        </p:nvPicPr>
+        <p:blipFill>
+          <a:blip r:embed="rId3"/>
+          <a:srcRect l="0" t="0" r="0" b="0"/>
+          <a:stretch>
+            <a:fillRect/>
+          </a:stretch>
+        </p:blipFill>
+        <p:spPr>
+          <a:xfrm flipH="false" flipV="false" rot="-7094170">
+            <a:off x="14148180" y="-2590072"/>
+            <a:ext cx="7036829" cy="7237544"/>
+          </a:xfrm>
+          <a:prstGeom prst="rect">
+            <a:avLst/>
+          </a:prstGeom>
+        </p:spPr>
+      </p:pic>
+      <p:sp>
+        <p:nvSpPr>
+          <p:cNvPr name="TextBox 4" id="4"/>
           <p:cNvSpPr txBox="true"/>
           <p:nvPr/>
         </p:nvSpPr>
         <p:spPr>
           <a:xfrm rot="0">
-            <a:off x="2717556" y="7058025"/>
-            <a:ext cx="12852888" cy="2200275"/>
+            <a:off x="1028700" y="4178617"/>
+            <a:ext cx="15555091" cy="1914525"/>
           </a:xfrm>
           <a:prstGeom prst="rect">
             <a:avLst/>
@@ -7655,14 +7624,58 @@
             <a:r>
               <a:rPr lang="en-US" sz="12500">
                 <a:solidFill>
-                  <a:srgbClr val="000000"/>
+                  <a:srgbClr val="FFFAEF"/>
                 </a:solidFill>
-                <a:latin typeface="Jua"/>
-                <a:ea typeface="Jua"/>
-                <a:cs typeface="Jua"/>
-                <a:sym typeface="Jua"/>
+                <a:latin typeface="무궁화 고딕"/>
+                <a:ea typeface="무궁화 고딕"/>
+                <a:cs typeface="무궁화 고딕"/>
+                <a:sym typeface="무궁화 고딕"/>
               </a:rPr>
-              <a:t>대한민국</a:t>
+              <a:t>수도 맞추기</a:t>
+            </a:r>
+          </a:p>
+        </p:txBody>
+      </p:sp>
+      <p:sp>
+        <p:nvSpPr>
+          <p:cNvPr name="TextBox 5" id="5"/>
+          <p:cNvSpPr txBox="true"/>
+          <p:nvPr/>
+        </p:nvSpPr>
+        <p:spPr>
+          <a:xfrm rot="0">
+            <a:off x="14021540" y="9822180"/>
+            <a:ext cx="3881239" cy="464820"/>
+          </a:xfrm>
+          <a:prstGeom prst="rect">
+            <a:avLst/>
+          </a:prstGeom>
+        </p:spPr>
+        <p:txBody>
+          <a:bodyPr anchor="t" rtlCol="false" tIns="0" lIns="0" bIns="0" rIns="0">
+            <a:spAutoFit/>
+          </a:bodyPr>
+          <a:lstStyle/>
+          <a:p>
+            <a:pPr algn="r">
+              <a:lnSpc>
+                <a:spcPts val="3779"/>
+              </a:lnSpc>
+              <a:spcBef>
+                <a:spcPct val="0"/>
+              </a:spcBef>
+            </a:pPr>
+            <a:r>
+              <a:rPr lang="en-US" sz="2700" spc="-135">
+                <a:solidFill>
+                  <a:srgbClr val="FFFFFF"/>
+                </a:solidFill>
+                <a:latin typeface="무궁화 고딕"/>
+                <a:ea typeface="무궁화 고딕"/>
+                <a:cs typeface="무궁화 고딕"/>
+                <a:sym typeface="무궁화 고딕"/>
+              </a:rPr>
+              <a:t>ⓒ 2026. Sunday Play</a:t>
             </a:r>
           </a:p>
         </p:txBody>
@@ -7699,62 +7712,66 @@
           <a:chExt cx="0" cy="0"/>
         </a:xfrm>
       </p:grpSpPr>
-      <p:sp>
-        <p:nvSpPr>
-          <p:cNvPr name="Freeform 2" id="2"/>
-          <p:cNvSpPr/>
-          <p:nvPr/>
-        </p:nvSpPr>
+      <p:pic>
+        <p:nvPicPr>
+          <p:cNvPr name="Picture 2" id="2"/>
+          <p:cNvPicPr>
+            <a:picLocks noChangeAspect="true"/>
+          </p:cNvPicPr>
+          <p:nvPr/>
+        </p:nvPicPr>
+        <p:blipFill>
+          <a:blip r:embed="rId2"/>
+          <a:srcRect l="0" t="0" r="0" b="0"/>
+          <a:stretch>
+            <a:fillRect/>
+          </a:stretch>
+        </p:blipFill>
         <p:spPr>
           <a:xfrm flipH="false" flipV="false" rot="0">
-            <a:off x="5005955" y="1028700"/>
-            <a:ext cx="8276089" cy="6010392"/>
-          </a:xfrm>
-          <a:custGeom>
-            <a:avLst/>
-            <a:gdLst/>
-            <a:ahLst/>
-            <a:cxnLst/>
-            <a:rect r="r" b="b" t="t" l="l"/>
-            <a:pathLst>
-              <a:path h="6010392" w="8276089">
-                <a:moveTo>
-                  <a:pt x="0" y="0"/>
-                </a:moveTo>
-                <a:lnTo>
-                  <a:pt x="8276090" y="0"/>
-                </a:lnTo>
-                <a:lnTo>
-                  <a:pt x="8276090" y="6010392"/>
-                </a:lnTo>
-                <a:lnTo>
-                  <a:pt x="0" y="6010392"/>
-                </a:lnTo>
-                <a:lnTo>
-                  <a:pt x="0" y="0"/>
-                </a:lnTo>
-                <a:close/>
-              </a:path>
-            </a:pathLst>
-          </a:custGeom>
-          <a:blipFill>
-            <a:blip r:embed="rId2"/>
-            <a:stretch>
-              <a:fillRect l="0" t="0" r="0" b="0"/>
-            </a:stretch>
-          </a:blipFill>
-        </p:spPr>
-      </p:sp>
-      <p:sp>
-        <p:nvSpPr>
-          <p:cNvPr name="TextBox 3" id="3"/>
+            <a:off x="13655377" y="6809666"/>
+            <a:ext cx="6229999" cy="6954669"/>
+          </a:xfrm>
+          <a:prstGeom prst="rect">
+            <a:avLst/>
+          </a:prstGeom>
+        </p:spPr>
+      </p:pic>
+      <p:pic>
+        <p:nvPicPr>
+          <p:cNvPr name="Picture 3" id="3"/>
+          <p:cNvPicPr>
+            <a:picLocks noChangeAspect="true"/>
+          </p:cNvPicPr>
+          <p:nvPr/>
+        </p:nvPicPr>
+        <p:blipFill>
+          <a:blip r:embed="rId3"/>
+          <a:srcRect l="0" t="0" r="0" b="0"/>
+          <a:stretch>
+            <a:fillRect/>
+          </a:stretch>
+        </p:blipFill>
+        <p:spPr>
+          <a:xfrm flipH="false" flipV="false" rot="0">
+            <a:off x="0" y="0"/>
+            <a:ext cx="6925457" cy="4700654"/>
+          </a:xfrm>
+          <a:prstGeom prst="rect">
+            <a:avLst/>
+          </a:prstGeom>
+        </p:spPr>
+      </p:pic>
+      <p:sp>
+        <p:nvSpPr>
+          <p:cNvPr name="TextBox 4" id="4"/>
           <p:cNvSpPr txBox="true"/>
           <p:nvPr/>
         </p:nvSpPr>
         <p:spPr>
           <a:xfrm rot="0">
-            <a:off x="2717556" y="7058025"/>
-            <a:ext cx="12852888" cy="2200275"/>
+            <a:off x="2717556" y="4181475"/>
+            <a:ext cx="12852888" cy="1914525"/>
           </a:xfrm>
           <a:prstGeom prst="rect">
             <a:avLst/>
@@ -7776,12 +7793,12 @@
                 <a:solidFill>
                   <a:srgbClr val="000000"/>
                 </a:solidFill>
-                <a:latin typeface="Jua"/>
-                <a:ea typeface="Jua"/>
-                <a:cs typeface="Jua"/>
-                <a:sym typeface="Jua"/>
+                <a:latin typeface="무궁화 고딕"/>
+                <a:ea typeface="무궁화 고딕"/>
+                <a:cs typeface="무궁화 고딕"/>
+                <a:sym typeface="무궁화 고딕"/>
               </a:rPr>
-              <a:t>이스라엘</a:t>
+              <a:t>방콕</a:t>
             </a:r>
           </a:p>
         </p:txBody>
@@ -7818,66 +7835,62 @@
           <a:chExt cx="0" cy="0"/>
         </a:xfrm>
       </p:grpSpPr>
-      <p:pic>
-        <p:nvPicPr>
-          <p:cNvPr name="Picture 2" id="2"/>
-          <p:cNvPicPr>
-            <a:picLocks noChangeAspect="true"/>
-          </p:cNvPicPr>
-          <p:nvPr/>
-        </p:nvPicPr>
-        <p:blipFill>
-          <a:blip r:embed="rId2"/>
-          <a:srcRect l="0" t="0" r="0" b="0"/>
-          <a:stretch>
-            <a:fillRect/>
-          </a:stretch>
-        </p:blipFill>
+      <p:sp>
+        <p:nvSpPr>
+          <p:cNvPr name="Freeform 2" id="2"/>
+          <p:cNvSpPr/>
+          <p:nvPr/>
+        </p:nvSpPr>
         <p:spPr>
           <a:xfrm flipH="false" flipV="false" rot="0">
-            <a:off x="13655377" y="6809666"/>
-            <a:ext cx="6229999" cy="6954669"/>
-          </a:xfrm>
-          <a:prstGeom prst="rect">
-            <a:avLst/>
-          </a:prstGeom>
-        </p:spPr>
-      </p:pic>
-      <p:pic>
-        <p:nvPicPr>
-          <p:cNvPr name="Picture 3" id="3"/>
-          <p:cNvPicPr>
-            <a:picLocks noChangeAspect="true"/>
-          </p:cNvPicPr>
-          <p:nvPr/>
-        </p:nvPicPr>
-        <p:blipFill>
-          <a:blip r:embed="rId3"/>
-          <a:srcRect l="0" t="0" r="0" b="0"/>
-          <a:stretch>
-            <a:fillRect/>
-          </a:stretch>
-        </p:blipFill>
-        <p:spPr>
-          <a:xfrm flipH="false" flipV="false" rot="0">
-            <a:off x="0" y="0"/>
-            <a:ext cx="6925457" cy="4700654"/>
-          </a:xfrm>
-          <a:prstGeom prst="rect">
-            <a:avLst/>
-          </a:prstGeom>
-        </p:spPr>
-      </p:pic>
-      <p:sp>
-        <p:nvSpPr>
-          <p:cNvPr name="TextBox 4" id="4"/>
+            <a:off x="5005955" y="1028700"/>
+            <a:ext cx="8276089" cy="6010392"/>
+          </a:xfrm>
+          <a:custGeom>
+            <a:avLst/>
+            <a:gdLst/>
+            <a:ahLst/>
+            <a:cxnLst/>
+            <a:rect r="r" b="b" t="t" l="l"/>
+            <a:pathLst>
+              <a:path h="6010392" w="8276089">
+                <a:moveTo>
+                  <a:pt x="0" y="0"/>
+                </a:moveTo>
+                <a:lnTo>
+                  <a:pt x="8276090" y="0"/>
+                </a:lnTo>
+                <a:lnTo>
+                  <a:pt x="8276090" y="6010392"/>
+                </a:lnTo>
+                <a:lnTo>
+                  <a:pt x="0" y="6010392"/>
+                </a:lnTo>
+                <a:lnTo>
+                  <a:pt x="0" y="0"/>
+                </a:lnTo>
+                <a:close/>
+              </a:path>
+            </a:pathLst>
+          </a:custGeom>
+          <a:blipFill>
+            <a:blip r:embed="rId2"/>
+            <a:stretch>
+              <a:fillRect l="0" t="0" r="0" b="0"/>
+            </a:stretch>
+          </a:blipFill>
+        </p:spPr>
+      </p:sp>
+      <p:sp>
+        <p:nvSpPr>
+          <p:cNvPr name="TextBox 3" id="3"/>
           <p:cNvSpPr txBox="true"/>
           <p:nvPr/>
         </p:nvSpPr>
         <p:spPr>
           <a:xfrm rot="0">
-            <a:off x="2717556" y="3895725"/>
-            <a:ext cx="12852888" cy="2200275"/>
+            <a:off x="2717556" y="7343775"/>
+            <a:ext cx="12852888" cy="1914525"/>
           </a:xfrm>
           <a:prstGeom prst="rect">
             <a:avLst/>
@@ -7899,12 +7912,12 @@
                 <a:solidFill>
                   <a:srgbClr val="000000"/>
                 </a:solidFill>
-                <a:latin typeface="Jua"/>
-                <a:ea typeface="Jua"/>
-                <a:cs typeface="Jua"/>
-                <a:sym typeface="Jua"/>
+                <a:latin typeface="무궁화 고딕"/>
+                <a:ea typeface="무궁화 고딕"/>
+                <a:cs typeface="무궁화 고딕"/>
+                <a:sym typeface="무궁화 고딕"/>
               </a:rPr>
-              <a:t>예루살렘</a:t>
+              <a:t>이스라엘</a:t>
             </a:r>
           </a:p>
         </p:txBody>
@@ -7941,62 +7954,66 @@
           <a:chExt cx="0" cy="0"/>
         </a:xfrm>
       </p:grpSpPr>
-      <p:sp>
-        <p:nvSpPr>
-          <p:cNvPr name="Freeform 2" id="2"/>
-          <p:cNvSpPr/>
-          <p:nvPr/>
-        </p:nvSpPr>
+      <p:pic>
+        <p:nvPicPr>
+          <p:cNvPr name="Picture 2" id="2"/>
+          <p:cNvPicPr>
+            <a:picLocks noChangeAspect="true"/>
+          </p:cNvPicPr>
+          <p:nvPr/>
+        </p:nvPicPr>
+        <p:blipFill>
+          <a:blip r:embed="rId2"/>
+          <a:srcRect l="0" t="0" r="0" b="0"/>
+          <a:stretch>
+            <a:fillRect/>
+          </a:stretch>
+        </p:blipFill>
         <p:spPr>
           <a:xfrm flipH="false" flipV="false" rot="0">
-            <a:off x="4738876" y="1028700"/>
-            <a:ext cx="8810248" cy="5862819"/>
-          </a:xfrm>
-          <a:custGeom>
-            <a:avLst/>
-            <a:gdLst/>
-            <a:ahLst/>
-            <a:cxnLst/>
-            <a:rect r="r" b="b" t="t" l="l"/>
-            <a:pathLst>
-              <a:path h="5862819" w="8810248">
-                <a:moveTo>
-                  <a:pt x="0" y="0"/>
-                </a:moveTo>
-                <a:lnTo>
-                  <a:pt x="8810248" y="0"/>
-                </a:lnTo>
-                <a:lnTo>
-                  <a:pt x="8810248" y="5862819"/>
-                </a:lnTo>
-                <a:lnTo>
-                  <a:pt x="0" y="5862819"/>
-                </a:lnTo>
-                <a:lnTo>
-                  <a:pt x="0" y="0"/>
-                </a:lnTo>
-                <a:close/>
-              </a:path>
-            </a:pathLst>
-          </a:custGeom>
-          <a:blipFill>
-            <a:blip r:embed="rId2"/>
-            <a:stretch>
-              <a:fillRect l="0" t="0" r="0" b="0"/>
-            </a:stretch>
-          </a:blipFill>
-        </p:spPr>
-      </p:sp>
-      <p:sp>
-        <p:nvSpPr>
-          <p:cNvPr name="TextBox 3" id="3"/>
+            <a:off x="13655377" y="6809666"/>
+            <a:ext cx="6229999" cy="6954669"/>
+          </a:xfrm>
+          <a:prstGeom prst="rect">
+            <a:avLst/>
+          </a:prstGeom>
+        </p:spPr>
+      </p:pic>
+      <p:pic>
+        <p:nvPicPr>
+          <p:cNvPr name="Picture 3" id="3"/>
+          <p:cNvPicPr>
+            <a:picLocks noChangeAspect="true"/>
+          </p:cNvPicPr>
+          <p:nvPr/>
+        </p:nvPicPr>
+        <p:blipFill>
+          <a:blip r:embed="rId3"/>
+          <a:srcRect l="0" t="0" r="0" b="0"/>
+          <a:stretch>
+            <a:fillRect/>
+          </a:stretch>
+        </p:blipFill>
+        <p:spPr>
+          <a:xfrm flipH="false" flipV="false" rot="0">
+            <a:off x="0" y="0"/>
+            <a:ext cx="6925457" cy="4700654"/>
+          </a:xfrm>
+          <a:prstGeom prst="rect">
+            <a:avLst/>
+          </a:prstGeom>
+        </p:spPr>
+      </p:pic>
+      <p:sp>
+        <p:nvSpPr>
+          <p:cNvPr name="TextBox 4" id="4"/>
           <p:cNvSpPr txBox="true"/>
           <p:nvPr/>
         </p:nvSpPr>
         <p:spPr>
           <a:xfrm rot="0">
-            <a:off x="2717556" y="7058025"/>
-            <a:ext cx="12852888" cy="2200275"/>
+            <a:off x="2717556" y="4181475"/>
+            <a:ext cx="12852888" cy="1914525"/>
           </a:xfrm>
           <a:prstGeom prst="rect">
             <a:avLst/>
@@ -8018,12 +8035,12 @@
                 <a:solidFill>
                   <a:srgbClr val="000000"/>
                 </a:solidFill>
-                <a:latin typeface="Jua"/>
-                <a:ea typeface="Jua"/>
-                <a:cs typeface="Jua"/>
-                <a:sym typeface="Jua"/>
+                <a:latin typeface="무궁화 고딕"/>
+                <a:ea typeface="무궁화 고딕"/>
+                <a:cs typeface="무궁화 고딕"/>
+                <a:sym typeface="무궁화 고딕"/>
               </a:rPr>
-              <a:t>남아프리카 공화국</a:t>
+              <a:t>예루살렘</a:t>
             </a:r>
           </a:p>
         </p:txBody>
@@ -8060,66 +8077,62 @@
           <a:chExt cx="0" cy="0"/>
         </a:xfrm>
       </p:grpSpPr>
-      <p:pic>
-        <p:nvPicPr>
-          <p:cNvPr name="Picture 2" id="2"/>
-          <p:cNvPicPr>
-            <a:picLocks noChangeAspect="true"/>
-          </p:cNvPicPr>
-          <p:nvPr/>
-        </p:nvPicPr>
-        <p:blipFill>
-          <a:blip r:embed="rId2"/>
-          <a:srcRect l="0" t="0" r="0" b="0"/>
-          <a:stretch>
-            <a:fillRect/>
-          </a:stretch>
-        </p:blipFill>
+      <p:sp>
+        <p:nvSpPr>
+          <p:cNvPr name="Freeform 2" id="2"/>
+          <p:cNvSpPr/>
+          <p:nvPr/>
+        </p:nvSpPr>
         <p:spPr>
           <a:xfrm flipH="false" flipV="false" rot="0">
-            <a:off x="13655377" y="6809666"/>
-            <a:ext cx="6229999" cy="6954669"/>
-          </a:xfrm>
-          <a:prstGeom prst="rect">
-            <a:avLst/>
-          </a:prstGeom>
-        </p:spPr>
-      </p:pic>
-      <p:pic>
-        <p:nvPicPr>
-          <p:cNvPr name="Picture 3" id="3"/>
-          <p:cNvPicPr>
-            <a:picLocks noChangeAspect="true"/>
-          </p:cNvPicPr>
-          <p:nvPr/>
-        </p:nvPicPr>
-        <p:blipFill>
-          <a:blip r:embed="rId3"/>
-          <a:srcRect l="0" t="0" r="0" b="0"/>
-          <a:stretch>
-            <a:fillRect/>
-          </a:stretch>
-        </p:blipFill>
-        <p:spPr>
-          <a:xfrm flipH="false" flipV="false" rot="0">
-            <a:off x="0" y="0"/>
-            <a:ext cx="6925457" cy="4700654"/>
-          </a:xfrm>
-          <a:prstGeom prst="rect">
-            <a:avLst/>
-          </a:prstGeom>
-        </p:spPr>
-      </p:pic>
-      <p:sp>
-        <p:nvSpPr>
-          <p:cNvPr name="TextBox 4" id="4"/>
+            <a:off x="4738876" y="1028700"/>
+            <a:ext cx="8810248" cy="5862819"/>
+          </a:xfrm>
+          <a:custGeom>
+            <a:avLst/>
+            <a:gdLst/>
+            <a:ahLst/>
+            <a:cxnLst/>
+            <a:rect r="r" b="b" t="t" l="l"/>
+            <a:pathLst>
+              <a:path h="5862819" w="8810248">
+                <a:moveTo>
+                  <a:pt x="0" y="0"/>
+                </a:moveTo>
+                <a:lnTo>
+                  <a:pt x="8810248" y="0"/>
+                </a:lnTo>
+                <a:lnTo>
+                  <a:pt x="8810248" y="5862819"/>
+                </a:lnTo>
+                <a:lnTo>
+                  <a:pt x="0" y="5862819"/>
+                </a:lnTo>
+                <a:lnTo>
+                  <a:pt x="0" y="0"/>
+                </a:lnTo>
+                <a:close/>
+              </a:path>
+            </a:pathLst>
+          </a:custGeom>
+          <a:blipFill>
+            <a:blip r:embed="rId2"/>
+            <a:stretch>
+              <a:fillRect l="0" t="0" r="0" b="0"/>
+            </a:stretch>
+          </a:blipFill>
+        </p:spPr>
+      </p:sp>
+      <p:sp>
+        <p:nvSpPr>
+          <p:cNvPr name="TextBox 3" id="3"/>
           <p:cNvSpPr txBox="true"/>
           <p:nvPr/>
         </p:nvSpPr>
         <p:spPr>
           <a:xfrm rot="0">
-            <a:off x="2717556" y="1990725"/>
-            <a:ext cx="12852888" cy="6010275"/>
+            <a:off x="2717556" y="7343775"/>
+            <a:ext cx="12852888" cy="1914525"/>
           </a:xfrm>
           <a:prstGeom prst="rect">
             <a:avLst/>
@@ -8141,50 +8154,12 @@
                 <a:solidFill>
                   <a:srgbClr val="000000"/>
                 </a:solidFill>
-                <a:latin typeface="Jua"/>
-                <a:ea typeface="Jua"/>
-                <a:cs typeface="Jua"/>
-                <a:sym typeface="Jua"/>
+                <a:latin typeface="무궁화 고딕"/>
+                <a:ea typeface="무궁화 고딕"/>
+                <a:cs typeface="무궁화 고딕"/>
+                <a:sym typeface="무궁화 고딕"/>
               </a:rPr>
-              <a:t>프리토리아,</a:t>
-            </a:r>
-          </a:p>
-          <a:p>
-            <a:pPr algn="ctr">
-              <a:lnSpc>
-                <a:spcPts val="15000"/>
-              </a:lnSpc>
-            </a:pPr>
-            <a:r>
-              <a:rPr lang="en-US" sz="12500">
-                <a:solidFill>
-                  <a:srgbClr val="000000"/>
-                </a:solidFill>
-                <a:latin typeface="Jua"/>
-                <a:ea typeface="Jua"/>
-                <a:cs typeface="Jua"/>
-                <a:sym typeface="Jua"/>
-              </a:rPr>
-              <a:t>케이프타운,</a:t>
-            </a:r>
-          </a:p>
-          <a:p>
-            <a:pPr algn="ctr">
-              <a:lnSpc>
-                <a:spcPts val="15000"/>
-              </a:lnSpc>
-            </a:pPr>
-            <a:r>
-              <a:rPr lang="en-US" sz="12500">
-                <a:solidFill>
-                  <a:srgbClr val="000000"/>
-                </a:solidFill>
-                <a:latin typeface="Jua"/>
-                <a:ea typeface="Jua"/>
-                <a:cs typeface="Jua"/>
-                <a:sym typeface="Jua"/>
-              </a:rPr>
-              <a:t>블룸폰테인</a:t>
+              <a:t>남아프리카 공화국</a:t>
             </a:r>
           </a:p>
         </p:txBody>
@@ -8221,62 +8196,66 @@
           <a:chExt cx="0" cy="0"/>
         </a:xfrm>
       </p:grpSpPr>
-      <p:sp>
-        <p:nvSpPr>
-          <p:cNvPr name="Freeform 2" id="2"/>
-          <p:cNvSpPr/>
-          <p:nvPr/>
-        </p:nvSpPr>
+      <p:pic>
+        <p:nvPicPr>
+          <p:cNvPr name="Picture 2" id="2"/>
+          <p:cNvPicPr>
+            <a:picLocks noChangeAspect="true"/>
+          </p:cNvPicPr>
+          <p:nvPr/>
+        </p:nvPicPr>
+        <p:blipFill>
+          <a:blip r:embed="rId2"/>
+          <a:srcRect l="0" t="0" r="0" b="0"/>
+          <a:stretch>
+            <a:fillRect/>
+          </a:stretch>
+        </p:blipFill>
         <p:spPr>
           <a:xfrm flipH="false" flipV="false" rot="0">
-            <a:off x="4889453" y="1028700"/>
-            <a:ext cx="8509093" cy="6194620"/>
-          </a:xfrm>
-          <a:custGeom>
-            <a:avLst/>
-            <a:gdLst/>
-            <a:ahLst/>
-            <a:cxnLst/>
-            <a:rect r="r" b="b" t="t" l="l"/>
-            <a:pathLst>
-              <a:path h="6194620" w="8509093">
-                <a:moveTo>
-                  <a:pt x="0" y="0"/>
-                </a:moveTo>
-                <a:lnTo>
-                  <a:pt x="8509094" y="0"/>
-                </a:lnTo>
-                <a:lnTo>
-                  <a:pt x="8509094" y="6194620"/>
-                </a:lnTo>
-                <a:lnTo>
-                  <a:pt x="0" y="6194620"/>
-                </a:lnTo>
-                <a:lnTo>
-                  <a:pt x="0" y="0"/>
-                </a:lnTo>
-                <a:close/>
-              </a:path>
-            </a:pathLst>
-          </a:custGeom>
-          <a:blipFill>
-            <a:blip r:embed="rId2"/>
-            <a:stretch>
-              <a:fillRect l="0" t="0" r="0" b="0"/>
-            </a:stretch>
-          </a:blipFill>
-        </p:spPr>
-      </p:sp>
-      <p:sp>
-        <p:nvSpPr>
-          <p:cNvPr name="TextBox 3" id="3"/>
+            <a:off x="13655377" y="6809666"/>
+            <a:ext cx="6229999" cy="6954669"/>
+          </a:xfrm>
+          <a:prstGeom prst="rect">
+            <a:avLst/>
+          </a:prstGeom>
+        </p:spPr>
+      </p:pic>
+      <p:pic>
+        <p:nvPicPr>
+          <p:cNvPr name="Picture 3" id="3"/>
+          <p:cNvPicPr>
+            <a:picLocks noChangeAspect="true"/>
+          </p:cNvPicPr>
+          <p:nvPr/>
+        </p:nvPicPr>
+        <p:blipFill>
+          <a:blip r:embed="rId3"/>
+          <a:srcRect l="0" t="0" r="0" b="0"/>
+          <a:stretch>
+            <a:fillRect/>
+          </a:stretch>
+        </p:blipFill>
+        <p:spPr>
+          <a:xfrm flipH="false" flipV="false" rot="0">
+            <a:off x="0" y="0"/>
+            <a:ext cx="6925457" cy="4700654"/>
+          </a:xfrm>
+          <a:prstGeom prst="rect">
+            <a:avLst/>
+          </a:prstGeom>
+        </p:spPr>
+      </p:pic>
+      <p:sp>
+        <p:nvSpPr>
+          <p:cNvPr name="TextBox 4" id="4"/>
           <p:cNvSpPr txBox="true"/>
           <p:nvPr/>
         </p:nvSpPr>
         <p:spPr>
           <a:xfrm rot="0">
-            <a:off x="2717556" y="7058025"/>
-            <a:ext cx="12852888" cy="2200275"/>
+            <a:off x="2717556" y="2276475"/>
+            <a:ext cx="12852888" cy="5724525"/>
           </a:xfrm>
           <a:prstGeom prst="rect">
             <a:avLst/>
@@ -8298,12 +8277,50 @@
                 <a:solidFill>
                   <a:srgbClr val="000000"/>
                 </a:solidFill>
-                <a:latin typeface="Jua"/>
-                <a:ea typeface="Jua"/>
-                <a:cs typeface="Jua"/>
-                <a:sym typeface="Jua"/>
+                <a:latin typeface="무궁화 고딕"/>
+                <a:ea typeface="무궁화 고딕"/>
+                <a:cs typeface="무궁화 고딕"/>
+                <a:sym typeface="무궁화 고딕"/>
               </a:rPr>
-              <a:t>노르웨이</a:t>
+              <a:t>프리토리아,</a:t>
+            </a:r>
+          </a:p>
+          <a:p>
+            <a:pPr algn="ctr">
+              <a:lnSpc>
+                <a:spcPts val="15000"/>
+              </a:lnSpc>
+            </a:pPr>
+            <a:r>
+              <a:rPr lang="en-US" sz="12500">
+                <a:solidFill>
+                  <a:srgbClr val="000000"/>
+                </a:solidFill>
+                <a:latin typeface="무궁화 고딕"/>
+                <a:ea typeface="무궁화 고딕"/>
+                <a:cs typeface="무궁화 고딕"/>
+                <a:sym typeface="무궁화 고딕"/>
+              </a:rPr>
+              <a:t>케이프타운,</a:t>
+            </a:r>
+          </a:p>
+          <a:p>
+            <a:pPr algn="ctr">
+              <a:lnSpc>
+                <a:spcPts val="15000"/>
+              </a:lnSpc>
+            </a:pPr>
+            <a:r>
+              <a:rPr lang="en-US" sz="12500">
+                <a:solidFill>
+                  <a:srgbClr val="000000"/>
+                </a:solidFill>
+                <a:latin typeface="무궁화 고딕"/>
+                <a:ea typeface="무궁화 고딕"/>
+                <a:cs typeface="무궁화 고딕"/>
+                <a:sym typeface="무궁화 고딕"/>
+              </a:rPr>
+              <a:t>블룸폰테인</a:t>
             </a:r>
           </a:p>
         </p:txBody>
@@ -8340,66 +8357,62 @@
           <a:chExt cx="0" cy="0"/>
         </a:xfrm>
       </p:grpSpPr>
-      <p:pic>
-        <p:nvPicPr>
-          <p:cNvPr name="Picture 2" id="2"/>
-          <p:cNvPicPr>
-            <a:picLocks noChangeAspect="true"/>
-          </p:cNvPicPr>
-          <p:nvPr/>
-        </p:nvPicPr>
-        <p:blipFill>
-          <a:blip r:embed="rId2"/>
-          <a:srcRect l="0" t="0" r="0" b="0"/>
-          <a:stretch>
-            <a:fillRect/>
-          </a:stretch>
-        </p:blipFill>
+      <p:sp>
+        <p:nvSpPr>
+          <p:cNvPr name="Freeform 2" id="2"/>
+          <p:cNvSpPr/>
+          <p:nvPr/>
+        </p:nvSpPr>
         <p:spPr>
           <a:xfrm flipH="false" flipV="false" rot="0">
-            <a:off x="13655377" y="6809666"/>
-            <a:ext cx="6229999" cy="6954669"/>
-          </a:xfrm>
-          <a:prstGeom prst="rect">
-            <a:avLst/>
-          </a:prstGeom>
-        </p:spPr>
-      </p:pic>
-      <p:pic>
-        <p:nvPicPr>
-          <p:cNvPr name="Picture 3" id="3"/>
-          <p:cNvPicPr>
-            <a:picLocks noChangeAspect="true"/>
-          </p:cNvPicPr>
-          <p:nvPr/>
-        </p:nvPicPr>
-        <p:blipFill>
-          <a:blip r:embed="rId3"/>
-          <a:srcRect l="0" t="0" r="0" b="0"/>
-          <a:stretch>
-            <a:fillRect/>
-          </a:stretch>
-        </p:blipFill>
-        <p:spPr>
-          <a:xfrm flipH="false" flipV="false" rot="0">
-            <a:off x="0" y="0"/>
-            <a:ext cx="6925457" cy="4700654"/>
-          </a:xfrm>
-          <a:prstGeom prst="rect">
-            <a:avLst/>
-          </a:prstGeom>
-        </p:spPr>
-      </p:pic>
-      <p:sp>
-        <p:nvSpPr>
-          <p:cNvPr name="TextBox 4" id="4"/>
+            <a:off x="4889453" y="1028700"/>
+            <a:ext cx="8509093" cy="6194620"/>
+          </a:xfrm>
+          <a:custGeom>
+            <a:avLst/>
+            <a:gdLst/>
+            <a:ahLst/>
+            <a:cxnLst/>
+            <a:rect r="r" b="b" t="t" l="l"/>
+            <a:pathLst>
+              <a:path h="6194620" w="8509093">
+                <a:moveTo>
+                  <a:pt x="0" y="0"/>
+                </a:moveTo>
+                <a:lnTo>
+                  <a:pt x="8509094" y="0"/>
+                </a:lnTo>
+                <a:lnTo>
+                  <a:pt x="8509094" y="6194620"/>
+                </a:lnTo>
+                <a:lnTo>
+                  <a:pt x="0" y="6194620"/>
+                </a:lnTo>
+                <a:lnTo>
+                  <a:pt x="0" y="0"/>
+                </a:lnTo>
+                <a:close/>
+              </a:path>
+            </a:pathLst>
+          </a:custGeom>
+          <a:blipFill>
+            <a:blip r:embed="rId2"/>
+            <a:stretch>
+              <a:fillRect l="0" t="0" r="0" b="0"/>
+            </a:stretch>
+          </a:blipFill>
+        </p:spPr>
+      </p:sp>
+      <p:sp>
+        <p:nvSpPr>
+          <p:cNvPr name="TextBox 3" id="3"/>
           <p:cNvSpPr txBox="true"/>
           <p:nvPr/>
         </p:nvSpPr>
         <p:spPr>
           <a:xfrm rot="0">
-            <a:off x="2717556" y="3895725"/>
-            <a:ext cx="12852888" cy="2200275"/>
+            <a:off x="2717556" y="7343775"/>
+            <a:ext cx="12852888" cy="1914525"/>
           </a:xfrm>
           <a:prstGeom prst="rect">
             <a:avLst/>
@@ -8421,12 +8434,12 @@
                 <a:solidFill>
                   <a:srgbClr val="000000"/>
                 </a:solidFill>
-                <a:latin typeface="Jua"/>
-                <a:ea typeface="Jua"/>
-                <a:cs typeface="Jua"/>
-                <a:sym typeface="Jua"/>
+                <a:latin typeface="무궁화 고딕"/>
+                <a:ea typeface="무궁화 고딕"/>
+                <a:cs typeface="무궁화 고딕"/>
+                <a:sym typeface="무궁화 고딕"/>
               </a:rPr>
-              <a:t>오슬로</a:t>
+              <a:t>노르웨이</a:t>
             </a:r>
           </a:p>
         </p:txBody>
@@ -8463,62 +8476,66 @@
           <a:chExt cx="0" cy="0"/>
         </a:xfrm>
       </p:grpSpPr>
-      <p:sp>
-        <p:nvSpPr>
-          <p:cNvPr name="Freeform 2" id="2"/>
-          <p:cNvSpPr/>
-          <p:nvPr/>
-        </p:nvSpPr>
+      <p:pic>
+        <p:nvPicPr>
+          <p:cNvPr name="Picture 2" id="2"/>
+          <p:cNvPicPr>
+            <a:picLocks noChangeAspect="true"/>
+          </p:cNvPicPr>
+          <p:nvPr/>
+        </p:nvPicPr>
+        <p:blipFill>
+          <a:blip r:embed="rId2"/>
+          <a:srcRect l="0" t="0" r="0" b="0"/>
+          <a:stretch>
+            <a:fillRect/>
+          </a:stretch>
+        </p:blipFill>
         <p:spPr>
           <a:xfrm flipH="false" flipV="false" rot="0">
-            <a:off x="4029413" y="1028700"/>
-            <a:ext cx="10229175" cy="6375225"/>
-          </a:xfrm>
-          <a:custGeom>
-            <a:avLst/>
-            <a:gdLst/>
-            <a:ahLst/>
-            <a:cxnLst/>
-            <a:rect r="r" b="b" t="t" l="l"/>
-            <a:pathLst>
-              <a:path h="6375225" w="10229175">
-                <a:moveTo>
-                  <a:pt x="0" y="0"/>
-                </a:moveTo>
-                <a:lnTo>
-                  <a:pt x="10229174" y="0"/>
-                </a:lnTo>
-                <a:lnTo>
-                  <a:pt x="10229174" y="6375225"/>
-                </a:lnTo>
-                <a:lnTo>
-                  <a:pt x="0" y="6375225"/>
-                </a:lnTo>
-                <a:lnTo>
-                  <a:pt x="0" y="0"/>
-                </a:lnTo>
-                <a:close/>
-              </a:path>
-            </a:pathLst>
-          </a:custGeom>
-          <a:blipFill>
-            <a:blip r:embed="rId2"/>
-            <a:stretch>
-              <a:fillRect l="0" t="0" r="0" b="0"/>
-            </a:stretch>
-          </a:blipFill>
-        </p:spPr>
-      </p:sp>
-      <p:sp>
-        <p:nvSpPr>
-          <p:cNvPr name="TextBox 3" id="3"/>
+            <a:off x="13655377" y="6809666"/>
+            <a:ext cx="6229999" cy="6954669"/>
+          </a:xfrm>
+          <a:prstGeom prst="rect">
+            <a:avLst/>
+          </a:prstGeom>
+        </p:spPr>
+      </p:pic>
+      <p:pic>
+        <p:nvPicPr>
+          <p:cNvPr name="Picture 3" id="3"/>
+          <p:cNvPicPr>
+            <a:picLocks noChangeAspect="true"/>
+          </p:cNvPicPr>
+          <p:nvPr/>
+        </p:nvPicPr>
+        <p:blipFill>
+          <a:blip r:embed="rId3"/>
+          <a:srcRect l="0" t="0" r="0" b="0"/>
+          <a:stretch>
+            <a:fillRect/>
+          </a:stretch>
+        </p:blipFill>
+        <p:spPr>
+          <a:xfrm flipH="false" flipV="false" rot="0">
+            <a:off x="0" y="0"/>
+            <a:ext cx="6925457" cy="4700654"/>
+          </a:xfrm>
+          <a:prstGeom prst="rect">
+            <a:avLst/>
+          </a:prstGeom>
+        </p:spPr>
+      </p:pic>
+      <p:sp>
+        <p:nvSpPr>
+          <p:cNvPr name="TextBox 4" id="4"/>
           <p:cNvSpPr txBox="true"/>
           <p:nvPr/>
         </p:nvSpPr>
         <p:spPr>
           <a:xfrm rot="0">
-            <a:off x="2717556" y="7058025"/>
-            <a:ext cx="12852888" cy="2200275"/>
+            <a:off x="2717556" y="4181475"/>
+            <a:ext cx="12852888" cy="1914525"/>
           </a:xfrm>
           <a:prstGeom prst="rect">
             <a:avLst/>
@@ -8540,12 +8557,12 @@
                 <a:solidFill>
                   <a:srgbClr val="000000"/>
                 </a:solidFill>
-                <a:latin typeface="Jua"/>
-                <a:ea typeface="Jua"/>
-                <a:cs typeface="Jua"/>
-                <a:sym typeface="Jua"/>
+                <a:latin typeface="무궁화 고딕"/>
+                <a:ea typeface="무궁화 고딕"/>
+                <a:cs typeface="무궁화 고딕"/>
+                <a:sym typeface="무궁화 고딕"/>
               </a:rPr>
-              <a:t>아르헨티나</a:t>
+              <a:t>오슬로</a:t>
             </a:r>
           </a:p>
         </p:txBody>
@@ -8582,66 +8599,62 @@
           <a:chExt cx="0" cy="0"/>
         </a:xfrm>
       </p:grpSpPr>
-      <p:pic>
-        <p:nvPicPr>
-          <p:cNvPr name="Picture 2" id="2"/>
-          <p:cNvPicPr>
-            <a:picLocks noChangeAspect="true"/>
-          </p:cNvPicPr>
-          <p:nvPr/>
-        </p:nvPicPr>
-        <p:blipFill>
-          <a:blip r:embed="rId2"/>
-          <a:srcRect l="0" t="0" r="0" b="0"/>
-          <a:stretch>
-            <a:fillRect/>
-          </a:stretch>
-        </p:blipFill>
+      <p:sp>
+        <p:nvSpPr>
+          <p:cNvPr name="Freeform 2" id="2"/>
+          <p:cNvSpPr/>
+          <p:nvPr/>
+        </p:nvSpPr>
         <p:spPr>
           <a:xfrm flipH="false" flipV="false" rot="0">
-            <a:off x="13655377" y="6809666"/>
-            <a:ext cx="6229999" cy="6954669"/>
-          </a:xfrm>
-          <a:prstGeom prst="rect">
-            <a:avLst/>
-          </a:prstGeom>
-        </p:spPr>
-      </p:pic>
-      <p:pic>
-        <p:nvPicPr>
-          <p:cNvPr name="Picture 3" id="3"/>
-          <p:cNvPicPr>
-            <a:picLocks noChangeAspect="true"/>
-          </p:cNvPicPr>
-          <p:nvPr/>
-        </p:nvPicPr>
-        <p:blipFill>
-          <a:blip r:embed="rId3"/>
-          <a:srcRect l="0" t="0" r="0" b="0"/>
-          <a:stretch>
-            <a:fillRect/>
-          </a:stretch>
-        </p:blipFill>
-        <p:spPr>
-          <a:xfrm flipH="false" flipV="false" rot="0">
-            <a:off x="0" y="0"/>
-            <a:ext cx="6925457" cy="4700654"/>
-          </a:xfrm>
-          <a:prstGeom prst="rect">
-            <a:avLst/>
-          </a:prstGeom>
-        </p:spPr>
-      </p:pic>
-      <p:sp>
-        <p:nvSpPr>
-          <p:cNvPr name="TextBox 4" id="4"/>
+            <a:off x="4029413" y="1028700"/>
+            <a:ext cx="10229175" cy="6375225"/>
+          </a:xfrm>
+          <a:custGeom>
+            <a:avLst/>
+            <a:gdLst/>
+            <a:ahLst/>
+            <a:cxnLst/>
+            <a:rect r="r" b="b" t="t" l="l"/>
+            <a:pathLst>
+              <a:path h="6375225" w="10229175">
+                <a:moveTo>
+                  <a:pt x="0" y="0"/>
+                </a:moveTo>
+                <a:lnTo>
+                  <a:pt x="10229174" y="0"/>
+                </a:lnTo>
+                <a:lnTo>
+                  <a:pt x="10229174" y="6375225"/>
+                </a:lnTo>
+                <a:lnTo>
+                  <a:pt x="0" y="6375225"/>
+                </a:lnTo>
+                <a:lnTo>
+                  <a:pt x="0" y="0"/>
+                </a:lnTo>
+                <a:close/>
+              </a:path>
+            </a:pathLst>
+          </a:custGeom>
+          <a:blipFill>
+            <a:blip r:embed="rId2"/>
+            <a:stretch>
+              <a:fillRect l="0" t="0" r="0" b="0"/>
+            </a:stretch>
+          </a:blipFill>
+        </p:spPr>
+      </p:sp>
+      <p:sp>
+        <p:nvSpPr>
+          <p:cNvPr name="TextBox 3" id="3"/>
           <p:cNvSpPr txBox="true"/>
           <p:nvPr/>
         </p:nvSpPr>
         <p:spPr>
           <a:xfrm rot="0">
-            <a:off x="2717556" y="3895725"/>
-            <a:ext cx="12852888" cy="2200275"/>
+            <a:off x="2717556" y="7343775"/>
+            <a:ext cx="12852888" cy="1914525"/>
           </a:xfrm>
           <a:prstGeom prst="rect">
             <a:avLst/>
@@ -8663,12 +8676,12 @@
                 <a:solidFill>
                   <a:srgbClr val="000000"/>
                 </a:solidFill>
-                <a:latin typeface="Jua"/>
-                <a:ea typeface="Jua"/>
-                <a:cs typeface="Jua"/>
-                <a:sym typeface="Jua"/>
+                <a:latin typeface="무궁화 고딕"/>
+                <a:ea typeface="무궁화 고딕"/>
+                <a:cs typeface="무궁화 고딕"/>
+                <a:sym typeface="무궁화 고딕"/>
               </a:rPr>
-              <a:t>부에노스 아이레스</a:t>
+              <a:t>아르헨티나</a:t>
             </a:r>
           </a:p>
         </p:txBody>
@@ -8705,62 +8718,66 @@
           <a:chExt cx="0" cy="0"/>
         </a:xfrm>
       </p:grpSpPr>
-      <p:sp>
-        <p:nvSpPr>
-          <p:cNvPr name="Freeform 2" id="2"/>
-          <p:cNvSpPr/>
-          <p:nvPr/>
-        </p:nvSpPr>
+      <p:pic>
+        <p:nvPicPr>
+          <p:cNvPr name="Picture 2" id="2"/>
+          <p:cNvPicPr>
+            <a:picLocks noChangeAspect="true"/>
+          </p:cNvPicPr>
+          <p:nvPr/>
+        </p:nvPicPr>
+        <p:blipFill>
+          <a:blip r:embed="rId2"/>
+          <a:srcRect l="0" t="0" r="0" b="0"/>
+          <a:stretch>
+            <a:fillRect/>
+          </a:stretch>
+        </p:blipFill>
         <p:spPr>
           <a:xfrm flipH="false" flipV="false" rot="0">
-            <a:off x="4437893" y="1028700"/>
-            <a:ext cx="9412214" cy="6263400"/>
-          </a:xfrm>
-          <a:custGeom>
-            <a:avLst/>
-            <a:gdLst/>
-            <a:ahLst/>
-            <a:cxnLst/>
-            <a:rect r="r" b="b" t="t" l="l"/>
-            <a:pathLst>
-              <a:path h="6263400" w="9412214">
-                <a:moveTo>
-                  <a:pt x="0" y="0"/>
-                </a:moveTo>
-                <a:lnTo>
-                  <a:pt x="9412214" y="0"/>
-                </a:lnTo>
-                <a:lnTo>
-                  <a:pt x="9412214" y="6263400"/>
-                </a:lnTo>
-                <a:lnTo>
-                  <a:pt x="0" y="6263400"/>
-                </a:lnTo>
-                <a:lnTo>
-                  <a:pt x="0" y="0"/>
-                </a:lnTo>
-                <a:close/>
-              </a:path>
-            </a:pathLst>
-          </a:custGeom>
-          <a:blipFill>
-            <a:blip r:embed="rId2"/>
-            <a:stretch>
-              <a:fillRect l="0" t="0" r="0" b="0"/>
-            </a:stretch>
-          </a:blipFill>
-        </p:spPr>
-      </p:sp>
-      <p:sp>
-        <p:nvSpPr>
-          <p:cNvPr name="TextBox 3" id="3"/>
+            <a:off x="13655377" y="6809666"/>
+            <a:ext cx="6229999" cy="6954669"/>
+          </a:xfrm>
+          <a:prstGeom prst="rect">
+            <a:avLst/>
+          </a:prstGeom>
+        </p:spPr>
+      </p:pic>
+      <p:pic>
+        <p:nvPicPr>
+          <p:cNvPr name="Picture 3" id="3"/>
+          <p:cNvPicPr>
+            <a:picLocks noChangeAspect="true"/>
+          </p:cNvPicPr>
+          <p:nvPr/>
+        </p:nvPicPr>
+        <p:blipFill>
+          <a:blip r:embed="rId3"/>
+          <a:srcRect l="0" t="0" r="0" b="0"/>
+          <a:stretch>
+            <a:fillRect/>
+          </a:stretch>
+        </p:blipFill>
+        <p:spPr>
+          <a:xfrm flipH="false" flipV="false" rot="0">
+            <a:off x="0" y="0"/>
+            <a:ext cx="6925457" cy="4700654"/>
+          </a:xfrm>
+          <a:prstGeom prst="rect">
+            <a:avLst/>
+          </a:prstGeom>
+        </p:spPr>
+      </p:pic>
+      <p:sp>
+        <p:nvSpPr>
+          <p:cNvPr name="TextBox 4" id="4"/>
           <p:cNvSpPr txBox="true"/>
           <p:nvPr/>
         </p:nvSpPr>
         <p:spPr>
           <a:xfrm rot="0">
-            <a:off x="2717556" y="7058025"/>
-            <a:ext cx="12852888" cy="2200275"/>
+            <a:off x="2717556" y="4181475"/>
+            <a:ext cx="12852888" cy="1914525"/>
           </a:xfrm>
           <a:prstGeom prst="rect">
             <a:avLst/>
@@ -8782,12 +8799,12 @@
                 <a:solidFill>
                   <a:srgbClr val="000000"/>
                 </a:solidFill>
-                <a:latin typeface="Jua"/>
-                <a:ea typeface="Jua"/>
-                <a:cs typeface="Jua"/>
-                <a:sym typeface="Jua"/>
+                <a:latin typeface="무궁화 고딕"/>
+                <a:ea typeface="무궁화 고딕"/>
+                <a:cs typeface="무궁화 고딕"/>
+                <a:sym typeface="무궁화 고딕"/>
               </a:rPr>
-              <a:t>이집트</a:t>
+              <a:t>부에노스 아이레스</a:t>
             </a:r>
           </a:p>
         </p:txBody>
@@ -8824,66 +8841,62 @@
           <a:chExt cx="0" cy="0"/>
         </a:xfrm>
       </p:grpSpPr>
-      <p:pic>
-        <p:nvPicPr>
-          <p:cNvPr name="Picture 2" id="2"/>
-          <p:cNvPicPr>
-            <a:picLocks noChangeAspect="true"/>
-          </p:cNvPicPr>
-          <p:nvPr/>
-        </p:nvPicPr>
-        <p:blipFill>
-          <a:blip r:embed="rId2"/>
-          <a:srcRect l="0" t="0" r="0" b="0"/>
-          <a:stretch>
-            <a:fillRect/>
-          </a:stretch>
-        </p:blipFill>
+      <p:sp>
+        <p:nvSpPr>
+          <p:cNvPr name="Freeform 2" id="2"/>
+          <p:cNvSpPr/>
+          <p:nvPr/>
+        </p:nvSpPr>
         <p:spPr>
           <a:xfrm flipH="false" flipV="false" rot="0">
-            <a:off x="13655377" y="6809666"/>
-            <a:ext cx="6229999" cy="6954669"/>
-          </a:xfrm>
-          <a:prstGeom prst="rect">
-            <a:avLst/>
-          </a:prstGeom>
-        </p:spPr>
-      </p:pic>
-      <p:pic>
-        <p:nvPicPr>
-          <p:cNvPr name="Picture 3" id="3"/>
-          <p:cNvPicPr>
-            <a:picLocks noChangeAspect="true"/>
-          </p:cNvPicPr>
-          <p:nvPr/>
-        </p:nvPicPr>
-        <p:blipFill>
-          <a:blip r:embed="rId3"/>
-          <a:srcRect l="0" t="0" r="0" b="0"/>
-          <a:stretch>
-            <a:fillRect/>
-          </a:stretch>
-        </p:blipFill>
-        <p:spPr>
-          <a:xfrm flipH="false" flipV="false" rot="0">
-            <a:off x="0" y="0"/>
-            <a:ext cx="6925457" cy="4700654"/>
-          </a:xfrm>
-          <a:prstGeom prst="rect">
-            <a:avLst/>
-          </a:prstGeom>
-        </p:spPr>
-      </p:pic>
-      <p:sp>
-        <p:nvSpPr>
-          <p:cNvPr name="TextBox 4" id="4"/>
+            <a:off x="4437893" y="1028700"/>
+            <a:ext cx="9412214" cy="6263400"/>
+          </a:xfrm>
+          <a:custGeom>
+            <a:avLst/>
+            <a:gdLst/>
+            <a:ahLst/>
+            <a:cxnLst/>
+            <a:rect r="r" b="b" t="t" l="l"/>
+            <a:pathLst>
+              <a:path h="6263400" w="9412214">
+                <a:moveTo>
+                  <a:pt x="0" y="0"/>
+                </a:moveTo>
+                <a:lnTo>
+                  <a:pt x="9412214" y="0"/>
+                </a:lnTo>
+                <a:lnTo>
+                  <a:pt x="9412214" y="6263400"/>
+                </a:lnTo>
+                <a:lnTo>
+                  <a:pt x="0" y="6263400"/>
+                </a:lnTo>
+                <a:lnTo>
+                  <a:pt x="0" y="0"/>
+                </a:lnTo>
+                <a:close/>
+              </a:path>
+            </a:pathLst>
+          </a:custGeom>
+          <a:blipFill>
+            <a:blip r:embed="rId2"/>
+            <a:stretch>
+              <a:fillRect l="0" t="0" r="0" b="0"/>
+            </a:stretch>
+          </a:blipFill>
+        </p:spPr>
+      </p:sp>
+      <p:sp>
+        <p:nvSpPr>
+          <p:cNvPr name="TextBox 3" id="3"/>
           <p:cNvSpPr txBox="true"/>
           <p:nvPr/>
         </p:nvSpPr>
         <p:spPr>
           <a:xfrm rot="0">
-            <a:off x="2717556" y="3895725"/>
-            <a:ext cx="12852888" cy="2200275"/>
+            <a:off x="2717556" y="7343775"/>
+            <a:ext cx="12852888" cy="1914525"/>
           </a:xfrm>
           <a:prstGeom prst="rect">
             <a:avLst/>
@@ -8905,12 +8918,12 @@
                 <a:solidFill>
                   <a:srgbClr val="000000"/>
                 </a:solidFill>
-                <a:latin typeface="Jua"/>
-                <a:ea typeface="Jua"/>
-                <a:cs typeface="Jua"/>
-                <a:sym typeface="Jua"/>
+                <a:latin typeface="무궁화 고딕"/>
+                <a:ea typeface="무궁화 고딕"/>
+                <a:cs typeface="무궁화 고딕"/>
+                <a:sym typeface="무궁화 고딕"/>
               </a:rPr>
-              <a:t>카이로</a:t>
+              <a:t>이집트</a:t>
             </a:r>
           </a:p>
         </p:txBody>
@@ -8947,66 +8960,62 @@
           <a:chExt cx="0" cy="0"/>
         </a:xfrm>
       </p:grpSpPr>
-      <p:pic>
-        <p:nvPicPr>
-          <p:cNvPr name="Picture 2" id="2"/>
-          <p:cNvPicPr>
-            <a:picLocks noChangeAspect="true"/>
-          </p:cNvPicPr>
-          <p:nvPr/>
-        </p:nvPicPr>
-        <p:blipFill>
-          <a:blip r:embed="rId2"/>
-          <a:srcRect l="0" t="0" r="0" b="0"/>
-          <a:stretch>
-            <a:fillRect/>
-          </a:stretch>
-        </p:blipFill>
+      <p:sp>
+        <p:nvSpPr>
+          <p:cNvPr name="Freeform 2" id="2"/>
+          <p:cNvSpPr/>
+          <p:nvPr/>
+        </p:nvSpPr>
         <p:spPr>
           <a:xfrm flipH="false" flipV="false" rot="0">
-            <a:off x="13655377" y="6809666"/>
-            <a:ext cx="6229999" cy="6954669"/>
-          </a:xfrm>
-          <a:prstGeom prst="rect">
-            <a:avLst/>
-          </a:prstGeom>
-        </p:spPr>
-      </p:pic>
-      <p:pic>
-        <p:nvPicPr>
-          <p:cNvPr name="Picture 3" id="3"/>
-          <p:cNvPicPr>
-            <a:picLocks noChangeAspect="true"/>
-          </p:cNvPicPr>
-          <p:nvPr/>
-        </p:nvPicPr>
-        <p:blipFill>
-          <a:blip r:embed="rId3"/>
-          <a:srcRect l="0" t="0" r="0" b="0"/>
-          <a:stretch>
-            <a:fillRect/>
-          </a:stretch>
-        </p:blipFill>
-        <p:spPr>
-          <a:xfrm flipH="false" flipV="false" rot="0">
-            <a:off x="0" y="0"/>
-            <a:ext cx="6925457" cy="4700654"/>
-          </a:xfrm>
-          <a:prstGeom prst="rect">
-            <a:avLst/>
-          </a:prstGeom>
-        </p:spPr>
-      </p:pic>
-      <p:sp>
-        <p:nvSpPr>
-          <p:cNvPr name="TextBox 4" id="4"/>
+            <a:off x="4853662" y="1028700"/>
+            <a:ext cx="8580675" cy="5716875"/>
+          </a:xfrm>
+          <a:custGeom>
+            <a:avLst/>
+            <a:gdLst/>
+            <a:ahLst/>
+            <a:cxnLst/>
+            <a:rect r="r" b="b" t="t" l="l"/>
+            <a:pathLst>
+              <a:path h="5716875" w="8580675">
+                <a:moveTo>
+                  <a:pt x="0" y="0"/>
+                </a:moveTo>
+                <a:lnTo>
+                  <a:pt x="8580676" y="0"/>
+                </a:lnTo>
+                <a:lnTo>
+                  <a:pt x="8580676" y="5716875"/>
+                </a:lnTo>
+                <a:lnTo>
+                  <a:pt x="0" y="5716875"/>
+                </a:lnTo>
+                <a:lnTo>
+                  <a:pt x="0" y="0"/>
+                </a:lnTo>
+                <a:close/>
+              </a:path>
+            </a:pathLst>
+          </a:custGeom>
+          <a:blipFill>
+            <a:blip r:embed="rId2"/>
+            <a:stretch>
+              <a:fillRect l="0" t="0" r="0" b="0"/>
+            </a:stretch>
+          </a:blipFill>
+        </p:spPr>
+      </p:sp>
+      <p:sp>
+        <p:nvSpPr>
+          <p:cNvPr name="TextBox 3" id="3"/>
           <p:cNvSpPr txBox="true"/>
           <p:nvPr/>
         </p:nvSpPr>
         <p:spPr>
           <a:xfrm rot="0">
-            <a:off x="2717556" y="3895725"/>
-            <a:ext cx="12852888" cy="2200275"/>
+            <a:off x="2717556" y="7343775"/>
+            <a:ext cx="12852888" cy="1914525"/>
           </a:xfrm>
           <a:prstGeom prst="rect">
             <a:avLst/>
@@ -9028,12 +9037,12 @@
                 <a:solidFill>
                   <a:srgbClr val="000000"/>
                 </a:solidFill>
-                <a:latin typeface="Jua"/>
-                <a:ea typeface="Jua"/>
-                <a:cs typeface="Jua"/>
-                <a:sym typeface="Jua"/>
+                <a:latin typeface="무궁화 고딕"/>
+                <a:ea typeface="무궁화 고딕"/>
+                <a:cs typeface="무궁화 고딕"/>
+                <a:sym typeface="무궁화 고딕"/>
               </a:rPr>
-              <a:t>서울</a:t>
+              <a:t>대한민국</a:t>
             </a:r>
           </a:p>
         </p:txBody>
@@ -9070,62 +9079,66 @@
           <a:chExt cx="0" cy="0"/>
         </a:xfrm>
       </p:grpSpPr>
-      <p:sp>
-        <p:nvSpPr>
-          <p:cNvPr name="Freeform 2" id="2"/>
-          <p:cNvSpPr/>
-          <p:nvPr/>
-        </p:nvSpPr>
+      <p:pic>
+        <p:nvPicPr>
+          <p:cNvPr name="Picture 2" id="2"/>
+          <p:cNvPicPr>
+            <a:picLocks noChangeAspect="true"/>
+          </p:cNvPicPr>
+          <p:nvPr/>
+        </p:nvPicPr>
+        <p:blipFill>
+          <a:blip r:embed="rId2"/>
+          <a:srcRect l="0" t="0" r="0" b="0"/>
+          <a:stretch>
+            <a:fillRect/>
+          </a:stretch>
+        </p:blipFill>
         <p:spPr>
           <a:xfrm flipH="false" flipV="false" rot="0">
-            <a:off x="4660137" y="1028700"/>
-            <a:ext cx="8967726" cy="5967614"/>
-          </a:xfrm>
-          <a:custGeom>
-            <a:avLst/>
-            <a:gdLst/>
-            <a:ahLst/>
-            <a:cxnLst/>
-            <a:rect r="r" b="b" t="t" l="l"/>
-            <a:pathLst>
-              <a:path h="5967614" w="8967726">
-                <a:moveTo>
-                  <a:pt x="0" y="0"/>
-                </a:moveTo>
-                <a:lnTo>
-                  <a:pt x="8967726" y="0"/>
-                </a:lnTo>
-                <a:lnTo>
-                  <a:pt x="8967726" y="5967614"/>
-                </a:lnTo>
-                <a:lnTo>
-                  <a:pt x="0" y="5967614"/>
-                </a:lnTo>
-                <a:lnTo>
-                  <a:pt x="0" y="0"/>
-                </a:lnTo>
-                <a:close/>
-              </a:path>
-            </a:pathLst>
-          </a:custGeom>
-          <a:blipFill>
-            <a:blip r:embed="rId2"/>
-            <a:stretch>
-              <a:fillRect l="0" t="0" r="0" b="0"/>
-            </a:stretch>
-          </a:blipFill>
-        </p:spPr>
-      </p:sp>
-      <p:sp>
-        <p:nvSpPr>
-          <p:cNvPr name="TextBox 3" id="3"/>
+            <a:off x="13655377" y="6809666"/>
+            <a:ext cx="6229999" cy="6954669"/>
+          </a:xfrm>
+          <a:prstGeom prst="rect">
+            <a:avLst/>
+          </a:prstGeom>
+        </p:spPr>
+      </p:pic>
+      <p:pic>
+        <p:nvPicPr>
+          <p:cNvPr name="Picture 3" id="3"/>
+          <p:cNvPicPr>
+            <a:picLocks noChangeAspect="true"/>
+          </p:cNvPicPr>
+          <p:nvPr/>
+        </p:nvPicPr>
+        <p:blipFill>
+          <a:blip r:embed="rId3"/>
+          <a:srcRect l="0" t="0" r="0" b="0"/>
+          <a:stretch>
+            <a:fillRect/>
+          </a:stretch>
+        </p:blipFill>
+        <p:spPr>
+          <a:xfrm flipH="false" flipV="false" rot="0">
+            <a:off x="0" y="0"/>
+            <a:ext cx="6925457" cy="4700654"/>
+          </a:xfrm>
+          <a:prstGeom prst="rect">
+            <a:avLst/>
+          </a:prstGeom>
+        </p:spPr>
+      </p:pic>
+      <p:sp>
+        <p:nvSpPr>
+          <p:cNvPr name="TextBox 4" id="4"/>
           <p:cNvSpPr txBox="true"/>
           <p:nvPr/>
         </p:nvSpPr>
         <p:spPr>
           <a:xfrm rot="0">
-            <a:off x="2717556" y="7058025"/>
-            <a:ext cx="12852888" cy="2200275"/>
+            <a:off x="2717556" y="4181475"/>
+            <a:ext cx="12852888" cy="1914525"/>
           </a:xfrm>
           <a:prstGeom prst="rect">
             <a:avLst/>
@@ -9147,12 +9160,12 @@
                 <a:solidFill>
                   <a:srgbClr val="000000"/>
                 </a:solidFill>
-                <a:latin typeface="Jua"/>
-                <a:ea typeface="Jua"/>
-                <a:cs typeface="Jua"/>
-                <a:sym typeface="Jua"/>
+                <a:latin typeface="무궁화 고딕"/>
+                <a:ea typeface="무궁화 고딕"/>
+                <a:cs typeface="무궁화 고딕"/>
+                <a:sym typeface="무궁화 고딕"/>
               </a:rPr>
-              <a:t>그리스</a:t>
+              <a:t>카이로</a:t>
             </a:r>
           </a:p>
         </p:txBody>
@@ -9189,66 +9202,62 @@
           <a:chExt cx="0" cy="0"/>
         </a:xfrm>
       </p:grpSpPr>
-      <p:pic>
-        <p:nvPicPr>
-          <p:cNvPr name="Picture 2" id="2"/>
-          <p:cNvPicPr>
-            <a:picLocks noChangeAspect="true"/>
-          </p:cNvPicPr>
-          <p:nvPr/>
-        </p:nvPicPr>
-        <p:blipFill>
-          <a:blip r:embed="rId2"/>
-          <a:srcRect l="0" t="0" r="0" b="0"/>
-          <a:stretch>
-            <a:fillRect/>
-          </a:stretch>
-        </p:blipFill>
+      <p:sp>
+        <p:nvSpPr>
+          <p:cNvPr name="Freeform 2" id="2"/>
+          <p:cNvSpPr/>
+          <p:nvPr/>
+        </p:nvSpPr>
         <p:spPr>
           <a:xfrm flipH="false" flipV="false" rot="0">
-            <a:off x="13655377" y="6809666"/>
-            <a:ext cx="6229999" cy="6954669"/>
-          </a:xfrm>
-          <a:prstGeom prst="rect">
-            <a:avLst/>
-          </a:prstGeom>
-        </p:spPr>
-      </p:pic>
-      <p:pic>
-        <p:nvPicPr>
-          <p:cNvPr name="Picture 3" id="3"/>
-          <p:cNvPicPr>
-            <a:picLocks noChangeAspect="true"/>
-          </p:cNvPicPr>
-          <p:nvPr/>
-        </p:nvPicPr>
-        <p:blipFill>
-          <a:blip r:embed="rId3"/>
-          <a:srcRect l="0" t="0" r="0" b="0"/>
-          <a:stretch>
-            <a:fillRect/>
-          </a:stretch>
-        </p:blipFill>
-        <p:spPr>
-          <a:xfrm flipH="false" flipV="false" rot="0">
-            <a:off x="0" y="0"/>
-            <a:ext cx="6925457" cy="4700654"/>
-          </a:xfrm>
-          <a:prstGeom prst="rect">
-            <a:avLst/>
-          </a:prstGeom>
-        </p:spPr>
-      </p:pic>
-      <p:sp>
-        <p:nvSpPr>
-          <p:cNvPr name="TextBox 4" id="4"/>
+            <a:off x="4660137" y="1028700"/>
+            <a:ext cx="8967726" cy="5967614"/>
+          </a:xfrm>
+          <a:custGeom>
+            <a:avLst/>
+            <a:gdLst/>
+            <a:ahLst/>
+            <a:cxnLst/>
+            <a:rect r="r" b="b" t="t" l="l"/>
+            <a:pathLst>
+              <a:path h="5967614" w="8967726">
+                <a:moveTo>
+                  <a:pt x="0" y="0"/>
+                </a:moveTo>
+                <a:lnTo>
+                  <a:pt x="8967726" y="0"/>
+                </a:lnTo>
+                <a:lnTo>
+                  <a:pt x="8967726" y="5967614"/>
+                </a:lnTo>
+                <a:lnTo>
+                  <a:pt x="0" y="5967614"/>
+                </a:lnTo>
+                <a:lnTo>
+                  <a:pt x="0" y="0"/>
+                </a:lnTo>
+                <a:close/>
+              </a:path>
+            </a:pathLst>
+          </a:custGeom>
+          <a:blipFill>
+            <a:blip r:embed="rId2"/>
+            <a:stretch>
+              <a:fillRect l="0" t="0" r="0" b="0"/>
+            </a:stretch>
+          </a:blipFill>
+        </p:spPr>
+      </p:sp>
+      <p:sp>
+        <p:nvSpPr>
+          <p:cNvPr name="TextBox 3" id="3"/>
           <p:cNvSpPr txBox="true"/>
           <p:nvPr/>
         </p:nvSpPr>
         <p:spPr>
           <a:xfrm rot="0">
-            <a:off x="2717556" y="3895725"/>
-            <a:ext cx="12852888" cy="2200275"/>
+            <a:off x="2717556" y="7343775"/>
+            <a:ext cx="12852888" cy="1914525"/>
           </a:xfrm>
           <a:prstGeom prst="rect">
             <a:avLst/>
@@ -9270,12 +9279,12 @@
                 <a:solidFill>
                   <a:srgbClr val="000000"/>
                 </a:solidFill>
-                <a:latin typeface="Jua"/>
-                <a:ea typeface="Jua"/>
-                <a:cs typeface="Jua"/>
-                <a:sym typeface="Jua"/>
+                <a:latin typeface="무궁화 고딕"/>
+                <a:ea typeface="무궁화 고딕"/>
+                <a:cs typeface="무궁화 고딕"/>
+                <a:sym typeface="무궁화 고딕"/>
               </a:rPr>
-              <a:t>아테네</a:t>
+              <a:t>그리스</a:t>
             </a:r>
           </a:p>
         </p:txBody>
@@ -9312,62 +9321,66 @@
           <a:chExt cx="0" cy="0"/>
         </a:xfrm>
       </p:grpSpPr>
-      <p:sp>
-        <p:nvSpPr>
-          <p:cNvPr name="Freeform 2" id="2"/>
-          <p:cNvSpPr/>
-          <p:nvPr/>
-        </p:nvSpPr>
+      <p:pic>
+        <p:nvPicPr>
+          <p:cNvPr name="Picture 2" id="2"/>
+          <p:cNvPicPr>
+            <a:picLocks noChangeAspect="true"/>
+          </p:cNvPicPr>
+          <p:nvPr/>
+        </p:nvPicPr>
+        <p:blipFill>
+          <a:blip r:embed="rId2"/>
+          <a:srcRect l="0" t="0" r="0" b="0"/>
+          <a:stretch>
+            <a:fillRect/>
+          </a:stretch>
+        </p:blipFill>
         <p:spPr>
           <a:xfrm flipH="false" flipV="false" rot="0">
-            <a:off x="4354068" y="1028700"/>
-            <a:ext cx="9579864" cy="5970549"/>
-          </a:xfrm>
-          <a:custGeom>
-            <a:avLst/>
-            <a:gdLst/>
-            <a:ahLst/>
-            <a:cxnLst/>
-            <a:rect r="r" b="b" t="t" l="l"/>
-            <a:pathLst>
-              <a:path h="5970549" w="9579864">
-                <a:moveTo>
-                  <a:pt x="0" y="0"/>
-                </a:moveTo>
-                <a:lnTo>
-                  <a:pt x="9579864" y="0"/>
-                </a:lnTo>
-                <a:lnTo>
-                  <a:pt x="9579864" y="5970549"/>
-                </a:lnTo>
-                <a:lnTo>
-                  <a:pt x="0" y="5970549"/>
-                </a:lnTo>
-                <a:lnTo>
-                  <a:pt x="0" y="0"/>
-                </a:lnTo>
-                <a:close/>
-              </a:path>
-            </a:pathLst>
-          </a:custGeom>
-          <a:blipFill>
-            <a:blip r:embed="rId2"/>
-            <a:stretch>
-              <a:fillRect l="0" t="0" r="0" b="0"/>
-            </a:stretch>
-          </a:blipFill>
-        </p:spPr>
-      </p:sp>
-      <p:sp>
-        <p:nvSpPr>
-          <p:cNvPr name="TextBox 3" id="3"/>
+            <a:off x="13655377" y="6809666"/>
+            <a:ext cx="6229999" cy="6954669"/>
+          </a:xfrm>
+          <a:prstGeom prst="rect">
+            <a:avLst/>
+          </a:prstGeom>
+        </p:spPr>
+      </p:pic>
+      <p:pic>
+        <p:nvPicPr>
+          <p:cNvPr name="Picture 3" id="3"/>
+          <p:cNvPicPr>
+            <a:picLocks noChangeAspect="true"/>
+          </p:cNvPicPr>
+          <p:nvPr/>
+        </p:nvPicPr>
+        <p:blipFill>
+          <a:blip r:embed="rId3"/>
+          <a:srcRect l="0" t="0" r="0" b="0"/>
+          <a:stretch>
+            <a:fillRect/>
+          </a:stretch>
+        </p:blipFill>
+        <p:spPr>
+          <a:xfrm flipH="false" flipV="false" rot="0">
+            <a:off x="0" y="0"/>
+            <a:ext cx="6925457" cy="4700654"/>
+          </a:xfrm>
+          <a:prstGeom prst="rect">
+            <a:avLst/>
+          </a:prstGeom>
+        </p:spPr>
+      </p:pic>
+      <p:sp>
+        <p:nvSpPr>
+          <p:cNvPr name="TextBox 4" id="4"/>
           <p:cNvSpPr txBox="true"/>
           <p:nvPr/>
         </p:nvSpPr>
         <p:spPr>
           <a:xfrm rot="0">
-            <a:off x="2717556" y="7058025"/>
-            <a:ext cx="12852888" cy="2200275"/>
+            <a:off x="2717556" y="4181475"/>
+            <a:ext cx="12852888" cy="1914525"/>
           </a:xfrm>
           <a:prstGeom prst="rect">
             <a:avLst/>
@@ -9389,12 +9402,12 @@
                 <a:solidFill>
                   <a:srgbClr val="000000"/>
                 </a:solidFill>
-                <a:latin typeface="Jua"/>
-                <a:ea typeface="Jua"/>
-                <a:cs typeface="Jua"/>
-                <a:sym typeface="Jua"/>
+                <a:latin typeface="무궁화 고딕"/>
+                <a:ea typeface="무궁화 고딕"/>
+                <a:cs typeface="무궁화 고딕"/>
+                <a:sym typeface="무궁화 고딕"/>
               </a:rPr>
-              <a:t>폴란드</a:t>
+              <a:t>아테네</a:t>
             </a:r>
           </a:p>
         </p:txBody>
@@ -9431,66 +9444,62 @@
           <a:chExt cx="0" cy="0"/>
         </a:xfrm>
       </p:grpSpPr>
-      <p:pic>
-        <p:nvPicPr>
-          <p:cNvPr name="Picture 2" id="2"/>
-          <p:cNvPicPr>
-            <a:picLocks noChangeAspect="true"/>
-          </p:cNvPicPr>
-          <p:nvPr/>
-        </p:nvPicPr>
-        <p:blipFill>
-          <a:blip r:embed="rId2"/>
-          <a:srcRect l="0" t="0" r="0" b="0"/>
-          <a:stretch>
-            <a:fillRect/>
-          </a:stretch>
-        </p:blipFill>
+      <p:sp>
+        <p:nvSpPr>
+          <p:cNvPr name="Freeform 2" id="2"/>
+          <p:cNvSpPr/>
+          <p:nvPr/>
+        </p:nvSpPr>
         <p:spPr>
           <a:xfrm flipH="false" flipV="false" rot="0">
-            <a:off x="13655377" y="6809666"/>
-            <a:ext cx="6229999" cy="6954669"/>
-          </a:xfrm>
-          <a:prstGeom prst="rect">
-            <a:avLst/>
-          </a:prstGeom>
-        </p:spPr>
-      </p:pic>
-      <p:pic>
-        <p:nvPicPr>
-          <p:cNvPr name="Picture 3" id="3"/>
-          <p:cNvPicPr>
-            <a:picLocks noChangeAspect="true"/>
-          </p:cNvPicPr>
-          <p:nvPr/>
-        </p:nvPicPr>
-        <p:blipFill>
-          <a:blip r:embed="rId3"/>
-          <a:srcRect l="0" t="0" r="0" b="0"/>
-          <a:stretch>
-            <a:fillRect/>
-          </a:stretch>
-        </p:blipFill>
-        <p:spPr>
-          <a:xfrm flipH="false" flipV="false" rot="0">
-            <a:off x="0" y="0"/>
-            <a:ext cx="6925457" cy="4700654"/>
-          </a:xfrm>
-          <a:prstGeom prst="rect">
-            <a:avLst/>
-          </a:prstGeom>
-        </p:spPr>
-      </p:pic>
-      <p:sp>
-        <p:nvSpPr>
-          <p:cNvPr name="TextBox 4" id="4"/>
+            <a:off x="4354068" y="1028700"/>
+            <a:ext cx="9579864" cy="5970549"/>
+          </a:xfrm>
+          <a:custGeom>
+            <a:avLst/>
+            <a:gdLst/>
+            <a:ahLst/>
+            <a:cxnLst/>
+            <a:rect r="r" b="b" t="t" l="l"/>
+            <a:pathLst>
+              <a:path h="5970549" w="9579864">
+                <a:moveTo>
+                  <a:pt x="0" y="0"/>
+                </a:moveTo>
+                <a:lnTo>
+                  <a:pt x="9579864" y="0"/>
+                </a:lnTo>
+                <a:lnTo>
+                  <a:pt x="9579864" y="5970549"/>
+                </a:lnTo>
+                <a:lnTo>
+                  <a:pt x="0" y="5970549"/>
+                </a:lnTo>
+                <a:lnTo>
+                  <a:pt x="0" y="0"/>
+                </a:lnTo>
+                <a:close/>
+              </a:path>
+            </a:pathLst>
+          </a:custGeom>
+          <a:blipFill>
+            <a:blip r:embed="rId2"/>
+            <a:stretch>
+              <a:fillRect l="0" t="0" r="0" b="0"/>
+            </a:stretch>
+          </a:blipFill>
+        </p:spPr>
+      </p:sp>
+      <p:sp>
+        <p:nvSpPr>
+          <p:cNvPr name="TextBox 3" id="3"/>
           <p:cNvSpPr txBox="true"/>
           <p:nvPr/>
         </p:nvSpPr>
         <p:spPr>
           <a:xfrm rot="0">
-            <a:off x="2717556" y="3895725"/>
-            <a:ext cx="12852888" cy="2200275"/>
+            <a:off x="2717556" y="7343775"/>
+            <a:ext cx="12852888" cy="1914525"/>
           </a:xfrm>
           <a:prstGeom prst="rect">
             <a:avLst/>
@@ -9512,12 +9521,12 @@
                 <a:solidFill>
                   <a:srgbClr val="000000"/>
                 </a:solidFill>
-                <a:latin typeface="Jua"/>
-                <a:ea typeface="Jua"/>
-                <a:cs typeface="Jua"/>
-                <a:sym typeface="Jua"/>
+                <a:latin typeface="무궁화 고딕"/>
+                <a:ea typeface="무궁화 고딕"/>
+                <a:cs typeface="무궁화 고딕"/>
+                <a:sym typeface="무궁화 고딕"/>
               </a:rPr>
-              <a:t>바르샤바</a:t>
+              <a:t>폴란드</a:t>
             </a:r>
           </a:p>
         </p:txBody>
@@ -9554,62 +9563,66 @@
           <a:chExt cx="0" cy="0"/>
         </a:xfrm>
       </p:grpSpPr>
-      <p:sp>
-        <p:nvSpPr>
-          <p:cNvPr name="Freeform 2" id="2"/>
-          <p:cNvSpPr/>
-          <p:nvPr/>
-        </p:nvSpPr>
+      <p:pic>
+        <p:nvPicPr>
+          <p:cNvPr name="Picture 2" id="2"/>
+          <p:cNvPicPr>
+            <a:picLocks noChangeAspect="true"/>
+          </p:cNvPicPr>
+          <p:nvPr/>
+        </p:nvPicPr>
+        <p:blipFill>
+          <a:blip r:embed="rId2"/>
+          <a:srcRect l="0" t="0" r="0" b="0"/>
+          <a:stretch>
+            <a:fillRect/>
+          </a:stretch>
+        </p:blipFill>
         <p:spPr>
           <a:xfrm flipH="false" flipV="false" rot="0">
-            <a:off x="4519058" y="1028700"/>
-            <a:ext cx="9249884" cy="6155377"/>
-          </a:xfrm>
-          <a:custGeom>
-            <a:avLst/>
-            <a:gdLst/>
-            <a:ahLst/>
-            <a:cxnLst/>
-            <a:rect r="r" b="b" t="t" l="l"/>
-            <a:pathLst>
-              <a:path h="6155377" w="9249884">
-                <a:moveTo>
-                  <a:pt x="0" y="0"/>
-                </a:moveTo>
-                <a:lnTo>
-                  <a:pt x="9249884" y="0"/>
-                </a:lnTo>
-                <a:lnTo>
-                  <a:pt x="9249884" y="6155377"/>
-                </a:lnTo>
-                <a:lnTo>
-                  <a:pt x="0" y="6155377"/>
-                </a:lnTo>
-                <a:lnTo>
-                  <a:pt x="0" y="0"/>
-                </a:lnTo>
-                <a:close/>
-              </a:path>
-            </a:pathLst>
-          </a:custGeom>
-          <a:blipFill>
-            <a:blip r:embed="rId2"/>
-            <a:stretch>
-              <a:fillRect l="0" t="0" r="0" b="0"/>
-            </a:stretch>
-          </a:blipFill>
-        </p:spPr>
-      </p:sp>
-      <p:sp>
-        <p:nvSpPr>
-          <p:cNvPr name="TextBox 3" id="3"/>
+            <a:off x="13655377" y="6809666"/>
+            <a:ext cx="6229999" cy="6954669"/>
+          </a:xfrm>
+          <a:prstGeom prst="rect">
+            <a:avLst/>
+          </a:prstGeom>
+        </p:spPr>
+      </p:pic>
+      <p:pic>
+        <p:nvPicPr>
+          <p:cNvPr name="Picture 3" id="3"/>
+          <p:cNvPicPr>
+            <a:picLocks noChangeAspect="true"/>
+          </p:cNvPicPr>
+          <p:nvPr/>
+        </p:nvPicPr>
+        <p:blipFill>
+          <a:blip r:embed="rId3"/>
+          <a:srcRect l="0" t="0" r="0" b="0"/>
+          <a:stretch>
+            <a:fillRect/>
+          </a:stretch>
+        </p:blipFill>
+        <p:spPr>
+          <a:xfrm flipH="false" flipV="false" rot="0">
+            <a:off x="0" y="0"/>
+            <a:ext cx="6925457" cy="4700654"/>
+          </a:xfrm>
+          <a:prstGeom prst="rect">
+            <a:avLst/>
+          </a:prstGeom>
+        </p:spPr>
+      </p:pic>
+      <p:sp>
+        <p:nvSpPr>
+          <p:cNvPr name="TextBox 4" id="4"/>
           <p:cNvSpPr txBox="true"/>
           <p:nvPr/>
         </p:nvSpPr>
         <p:spPr>
           <a:xfrm rot="0">
-            <a:off x="2717556" y="7058025"/>
-            <a:ext cx="12852888" cy="2200275"/>
+            <a:off x="2717556" y="4181475"/>
+            <a:ext cx="12852888" cy="1914525"/>
           </a:xfrm>
           <a:prstGeom prst="rect">
             <a:avLst/>
@@ -9631,12 +9644,12 @@
                 <a:solidFill>
                   <a:srgbClr val="000000"/>
                 </a:solidFill>
-                <a:latin typeface="Jua"/>
-                <a:ea typeface="Jua"/>
-                <a:cs typeface="Jua"/>
-                <a:sym typeface="Jua"/>
+                <a:latin typeface="무궁화 고딕"/>
+                <a:ea typeface="무궁화 고딕"/>
+                <a:cs typeface="무궁화 고딕"/>
+                <a:sym typeface="무궁화 고딕"/>
               </a:rPr>
-              <a:t>콜롬비아</a:t>
+              <a:t>바르샤바</a:t>
             </a:r>
           </a:p>
         </p:txBody>
@@ -9673,66 +9686,62 @@
           <a:chExt cx="0" cy="0"/>
         </a:xfrm>
       </p:grpSpPr>
-      <p:pic>
-        <p:nvPicPr>
-          <p:cNvPr name="Picture 2" id="2"/>
-          <p:cNvPicPr>
-            <a:picLocks noChangeAspect="true"/>
-          </p:cNvPicPr>
-          <p:nvPr/>
-        </p:nvPicPr>
-        <p:blipFill>
-          <a:blip r:embed="rId2"/>
-          <a:srcRect l="0" t="0" r="0" b="0"/>
-          <a:stretch>
-            <a:fillRect/>
-          </a:stretch>
-        </p:blipFill>
+      <p:sp>
+        <p:nvSpPr>
+          <p:cNvPr name="Freeform 2" id="2"/>
+          <p:cNvSpPr/>
+          <p:nvPr/>
+        </p:nvSpPr>
         <p:spPr>
           <a:xfrm flipH="false" flipV="false" rot="0">
-            <a:off x="13655377" y="6809666"/>
-            <a:ext cx="6229999" cy="6954669"/>
-          </a:xfrm>
-          <a:prstGeom prst="rect">
-            <a:avLst/>
-          </a:prstGeom>
-        </p:spPr>
-      </p:pic>
-      <p:pic>
-        <p:nvPicPr>
-          <p:cNvPr name="Picture 3" id="3"/>
-          <p:cNvPicPr>
-            <a:picLocks noChangeAspect="true"/>
-          </p:cNvPicPr>
-          <p:nvPr/>
-        </p:nvPicPr>
-        <p:blipFill>
-          <a:blip r:embed="rId3"/>
-          <a:srcRect l="0" t="0" r="0" b="0"/>
-          <a:stretch>
-            <a:fillRect/>
-          </a:stretch>
-        </p:blipFill>
-        <p:spPr>
-          <a:xfrm flipH="false" flipV="false" rot="0">
-            <a:off x="0" y="0"/>
-            <a:ext cx="6925457" cy="4700654"/>
-          </a:xfrm>
-          <a:prstGeom prst="rect">
-            <a:avLst/>
-          </a:prstGeom>
-        </p:spPr>
-      </p:pic>
-      <p:sp>
-        <p:nvSpPr>
-          <p:cNvPr name="TextBox 4" id="4"/>
+            <a:off x="4519058" y="1028700"/>
+            <a:ext cx="9249884" cy="6155377"/>
+          </a:xfrm>
+          <a:custGeom>
+            <a:avLst/>
+            <a:gdLst/>
+            <a:ahLst/>
+            <a:cxnLst/>
+            <a:rect r="r" b="b" t="t" l="l"/>
+            <a:pathLst>
+              <a:path h="6155377" w="9249884">
+                <a:moveTo>
+                  <a:pt x="0" y="0"/>
+                </a:moveTo>
+                <a:lnTo>
+                  <a:pt x="9249884" y="0"/>
+                </a:lnTo>
+                <a:lnTo>
+                  <a:pt x="9249884" y="6155377"/>
+                </a:lnTo>
+                <a:lnTo>
+                  <a:pt x="0" y="6155377"/>
+                </a:lnTo>
+                <a:lnTo>
+                  <a:pt x="0" y="0"/>
+                </a:lnTo>
+                <a:close/>
+              </a:path>
+            </a:pathLst>
+          </a:custGeom>
+          <a:blipFill>
+            <a:blip r:embed="rId2"/>
+            <a:stretch>
+              <a:fillRect l="0" t="0" r="0" b="0"/>
+            </a:stretch>
+          </a:blipFill>
+        </p:spPr>
+      </p:sp>
+      <p:sp>
+        <p:nvSpPr>
+          <p:cNvPr name="TextBox 3" id="3"/>
           <p:cNvSpPr txBox="true"/>
           <p:nvPr/>
         </p:nvSpPr>
         <p:spPr>
           <a:xfrm rot="0">
-            <a:off x="2717556" y="3895725"/>
-            <a:ext cx="12852888" cy="2200275"/>
+            <a:off x="2717556" y="7343775"/>
+            <a:ext cx="12852888" cy="1914525"/>
           </a:xfrm>
           <a:prstGeom prst="rect">
             <a:avLst/>
@@ -9754,12 +9763,12 @@
                 <a:solidFill>
                   <a:srgbClr val="000000"/>
                 </a:solidFill>
-                <a:latin typeface="Jua"/>
-                <a:ea typeface="Jua"/>
-                <a:cs typeface="Jua"/>
-                <a:sym typeface="Jua"/>
+                <a:latin typeface="무궁화 고딕"/>
+                <a:ea typeface="무궁화 고딕"/>
+                <a:cs typeface="무궁화 고딕"/>
+                <a:sym typeface="무궁화 고딕"/>
               </a:rPr>
-              <a:t>보고타</a:t>
+              <a:t>콜롬비아</a:t>
             </a:r>
           </a:p>
         </p:txBody>
@@ -9796,62 +9805,66 @@
           <a:chExt cx="0" cy="0"/>
         </a:xfrm>
       </p:grpSpPr>
-      <p:sp>
-        <p:nvSpPr>
-          <p:cNvPr name="Freeform 2" id="2"/>
-          <p:cNvSpPr/>
-          <p:nvPr/>
-        </p:nvSpPr>
+      <p:pic>
+        <p:nvPicPr>
+          <p:cNvPr name="Picture 2" id="2"/>
+          <p:cNvPicPr>
+            <a:picLocks noChangeAspect="true"/>
+          </p:cNvPicPr>
+          <p:nvPr/>
+        </p:nvPicPr>
+        <p:blipFill>
+          <a:blip r:embed="rId2"/>
+          <a:srcRect l="0" t="0" r="0" b="0"/>
+          <a:stretch>
+            <a:fillRect/>
+          </a:stretch>
+        </p:blipFill>
         <p:spPr>
           <a:xfrm flipH="false" flipV="false" rot="0">
-            <a:off x="3408947" y="1028700"/>
-            <a:ext cx="11470105" cy="5735053"/>
-          </a:xfrm>
-          <a:custGeom>
-            <a:avLst/>
-            <a:gdLst/>
-            <a:ahLst/>
-            <a:cxnLst/>
-            <a:rect r="r" b="b" t="t" l="l"/>
-            <a:pathLst>
-              <a:path h="5735053" w="11470105">
-                <a:moveTo>
-                  <a:pt x="0" y="0"/>
-                </a:moveTo>
-                <a:lnTo>
-                  <a:pt x="11470106" y="0"/>
-                </a:lnTo>
-                <a:lnTo>
-                  <a:pt x="11470106" y="5735053"/>
-                </a:lnTo>
-                <a:lnTo>
-                  <a:pt x="0" y="5735053"/>
-                </a:lnTo>
-                <a:lnTo>
-                  <a:pt x="0" y="0"/>
-                </a:lnTo>
-                <a:close/>
-              </a:path>
-            </a:pathLst>
-          </a:custGeom>
-          <a:blipFill>
-            <a:blip r:embed="rId2"/>
-            <a:stretch>
-              <a:fillRect l="0" t="0" r="0" b="0"/>
-            </a:stretch>
-          </a:blipFill>
-        </p:spPr>
-      </p:sp>
-      <p:sp>
-        <p:nvSpPr>
-          <p:cNvPr name="TextBox 3" id="3"/>
+            <a:off x="13655377" y="6809666"/>
+            <a:ext cx="6229999" cy="6954669"/>
+          </a:xfrm>
+          <a:prstGeom prst="rect">
+            <a:avLst/>
+          </a:prstGeom>
+        </p:spPr>
+      </p:pic>
+      <p:pic>
+        <p:nvPicPr>
+          <p:cNvPr name="Picture 3" id="3"/>
+          <p:cNvPicPr>
+            <a:picLocks noChangeAspect="true"/>
+          </p:cNvPicPr>
+          <p:nvPr/>
+        </p:nvPicPr>
+        <p:blipFill>
+          <a:blip r:embed="rId3"/>
+          <a:srcRect l="0" t="0" r="0" b="0"/>
+          <a:stretch>
+            <a:fillRect/>
+          </a:stretch>
+        </p:blipFill>
+        <p:spPr>
+          <a:xfrm flipH="false" flipV="false" rot="0">
+            <a:off x="0" y="0"/>
+            <a:ext cx="6925457" cy="4700654"/>
+          </a:xfrm>
+          <a:prstGeom prst="rect">
+            <a:avLst/>
+          </a:prstGeom>
+        </p:spPr>
+      </p:pic>
+      <p:sp>
+        <p:nvSpPr>
+          <p:cNvPr name="TextBox 4" id="4"/>
           <p:cNvSpPr txBox="true"/>
           <p:nvPr/>
         </p:nvSpPr>
         <p:spPr>
           <a:xfrm rot="0">
-            <a:off x="2717556" y="7058025"/>
-            <a:ext cx="12852888" cy="2200275"/>
+            <a:off x="2717556" y="4181475"/>
+            <a:ext cx="12852888" cy="1914525"/>
           </a:xfrm>
           <a:prstGeom prst="rect">
             <a:avLst/>
@@ -9873,12 +9886,12 @@
                 <a:solidFill>
                   <a:srgbClr val="000000"/>
                 </a:solidFill>
-                <a:latin typeface="Jua"/>
-                <a:ea typeface="Jua"/>
-                <a:cs typeface="Jua"/>
-                <a:sym typeface="Jua"/>
+                <a:latin typeface="무궁화 고딕"/>
+                <a:ea typeface="무궁화 고딕"/>
+                <a:cs typeface="무궁화 고딕"/>
+                <a:sym typeface="무궁화 고딕"/>
               </a:rPr>
-              <a:t>나이지리아</a:t>
+              <a:t>보고타</a:t>
             </a:r>
           </a:p>
         </p:txBody>
@@ -9915,66 +9928,62 @@
           <a:chExt cx="0" cy="0"/>
         </a:xfrm>
       </p:grpSpPr>
-      <p:pic>
-        <p:nvPicPr>
-          <p:cNvPr name="Picture 2" id="2"/>
-          <p:cNvPicPr>
-            <a:picLocks noChangeAspect="true"/>
-          </p:cNvPicPr>
-          <p:nvPr/>
-        </p:nvPicPr>
-        <p:blipFill>
-          <a:blip r:embed="rId2"/>
-          <a:srcRect l="0" t="0" r="0" b="0"/>
-          <a:stretch>
-            <a:fillRect/>
-          </a:stretch>
-        </p:blipFill>
+      <p:sp>
+        <p:nvSpPr>
+          <p:cNvPr name="Freeform 2" id="2"/>
+          <p:cNvSpPr/>
+          <p:nvPr/>
+        </p:nvSpPr>
         <p:spPr>
           <a:xfrm flipH="false" flipV="false" rot="0">
-            <a:off x="13655377" y="6809666"/>
-            <a:ext cx="6229999" cy="6954669"/>
-          </a:xfrm>
-          <a:prstGeom prst="rect">
-            <a:avLst/>
-          </a:prstGeom>
-        </p:spPr>
-      </p:pic>
-      <p:pic>
-        <p:nvPicPr>
-          <p:cNvPr name="Picture 3" id="3"/>
-          <p:cNvPicPr>
-            <a:picLocks noChangeAspect="true"/>
-          </p:cNvPicPr>
-          <p:nvPr/>
-        </p:nvPicPr>
-        <p:blipFill>
-          <a:blip r:embed="rId3"/>
-          <a:srcRect l="0" t="0" r="0" b="0"/>
-          <a:stretch>
-            <a:fillRect/>
-          </a:stretch>
-        </p:blipFill>
-        <p:spPr>
-          <a:xfrm flipH="false" flipV="false" rot="0">
-            <a:off x="0" y="0"/>
-            <a:ext cx="6925457" cy="4700654"/>
-          </a:xfrm>
-          <a:prstGeom prst="rect">
-            <a:avLst/>
-          </a:prstGeom>
-        </p:spPr>
-      </p:pic>
-      <p:sp>
-        <p:nvSpPr>
-          <p:cNvPr name="TextBox 4" id="4"/>
+            <a:off x="3408947" y="1028700"/>
+            <a:ext cx="11470105" cy="5735053"/>
+          </a:xfrm>
+          <a:custGeom>
+            <a:avLst/>
+            <a:gdLst/>
+            <a:ahLst/>
+            <a:cxnLst/>
+            <a:rect r="r" b="b" t="t" l="l"/>
+            <a:pathLst>
+              <a:path h="5735053" w="11470105">
+                <a:moveTo>
+                  <a:pt x="0" y="0"/>
+                </a:moveTo>
+                <a:lnTo>
+                  <a:pt x="11470106" y="0"/>
+                </a:lnTo>
+                <a:lnTo>
+                  <a:pt x="11470106" y="5735053"/>
+                </a:lnTo>
+                <a:lnTo>
+                  <a:pt x="0" y="5735053"/>
+                </a:lnTo>
+                <a:lnTo>
+                  <a:pt x="0" y="0"/>
+                </a:lnTo>
+                <a:close/>
+              </a:path>
+            </a:pathLst>
+          </a:custGeom>
+          <a:blipFill>
+            <a:blip r:embed="rId2"/>
+            <a:stretch>
+              <a:fillRect l="0" t="0" r="0" b="0"/>
+            </a:stretch>
+          </a:blipFill>
+        </p:spPr>
+      </p:sp>
+      <p:sp>
+        <p:nvSpPr>
+          <p:cNvPr name="TextBox 3" id="3"/>
           <p:cNvSpPr txBox="true"/>
           <p:nvPr/>
         </p:nvSpPr>
         <p:spPr>
           <a:xfrm rot="0">
-            <a:off x="2717556" y="3895725"/>
-            <a:ext cx="12852888" cy="2200275"/>
+            <a:off x="2717556" y="7343775"/>
+            <a:ext cx="12852888" cy="1914525"/>
           </a:xfrm>
           <a:prstGeom prst="rect">
             <a:avLst/>
@@ -9996,12 +10005,12 @@
                 <a:solidFill>
                   <a:srgbClr val="000000"/>
                 </a:solidFill>
-                <a:latin typeface="Jua"/>
-                <a:ea typeface="Jua"/>
-                <a:cs typeface="Jua"/>
-                <a:sym typeface="Jua"/>
+                <a:latin typeface="무궁화 고딕"/>
+                <a:ea typeface="무궁화 고딕"/>
+                <a:cs typeface="무궁화 고딕"/>
+                <a:sym typeface="무궁화 고딕"/>
               </a:rPr>
-              <a:t>아부자</a:t>
+              <a:t>나이지리아</a:t>
             </a:r>
           </a:p>
         </p:txBody>
@@ -10038,62 +10047,66 @@
           <a:chExt cx="0" cy="0"/>
         </a:xfrm>
       </p:grpSpPr>
-      <p:sp>
-        <p:nvSpPr>
-          <p:cNvPr name="Freeform 2" id="2"/>
-          <p:cNvSpPr/>
-          <p:nvPr/>
-        </p:nvSpPr>
+      <p:pic>
+        <p:nvPicPr>
+          <p:cNvPr name="Picture 2" id="2"/>
+          <p:cNvPicPr>
+            <a:picLocks noChangeAspect="true"/>
+          </p:cNvPicPr>
+          <p:nvPr/>
+        </p:nvPicPr>
+        <p:blipFill>
+          <a:blip r:embed="rId2"/>
+          <a:srcRect l="0" t="0" r="0" b="0"/>
+          <a:stretch>
+            <a:fillRect/>
+          </a:stretch>
+        </p:blipFill>
         <p:spPr>
           <a:xfrm flipH="false" flipV="false" rot="0">
-            <a:off x="3433011" y="1028700"/>
-            <a:ext cx="11421979" cy="5710989"/>
-          </a:xfrm>
-          <a:custGeom>
-            <a:avLst/>
-            <a:gdLst/>
-            <a:ahLst/>
-            <a:cxnLst/>
-            <a:rect r="r" b="b" t="t" l="l"/>
-            <a:pathLst>
-              <a:path h="5710989" w="11421979">
-                <a:moveTo>
-                  <a:pt x="0" y="0"/>
-                </a:moveTo>
-                <a:lnTo>
-                  <a:pt x="11421978" y="0"/>
-                </a:lnTo>
-                <a:lnTo>
-                  <a:pt x="11421978" y="5710989"/>
-                </a:lnTo>
-                <a:lnTo>
-                  <a:pt x="0" y="5710989"/>
-                </a:lnTo>
-                <a:lnTo>
-                  <a:pt x="0" y="0"/>
-                </a:lnTo>
-                <a:close/>
-              </a:path>
-            </a:pathLst>
-          </a:custGeom>
-          <a:blipFill>
-            <a:blip r:embed="rId2"/>
-            <a:stretch>
-              <a:fillRect l="0" t="0" r="0" b="0"/>
-            </a:stretch>
-          </a:blipFill>
-        </p:spPr>
-      </p:sp>
-      <p:sp>
-        <p:nvSpPr>
-          <p:cNvPr name="TextBox 3" id="3"/>
+            <a:off x="13655377" y="6809666"/>
+            <a:ext cx="6229999" cy="6954669"/>
+          </a:xfrm>
+          <a:prstGeom prst="rect">
+            <a:avLst/>
+          </a:prstGeom>
+        </p:spPr>
+      </p:pic>
+      <p:pic>
+        <p:nvPicPr>
+          <p:cNvPr name="Picture 3" id="3"/>
+          <p:cNvPicPr>
+            <a:picLocks noChangeAspect="true"/>
+          </p:cNvPicPr>
+          <p:nvPr/>
+        </p:nvPicPr>
+        <p:blipFill>
+          <a:blip r:embed="rId3"/>
+          <a:srcRect l="0" t="0" r="0" b="0"/>
+          <a:stretch>
+            <a:fillRect/>
+          </a:stretch>
+        </p:blipFill>
+        <p:spPr>
+          <a:xfrm flipH="false" flipV="false" rot="0">
+            <a:off x="0" y="0"/>
+            <a:ext cx="6925457" cy="4700654"/>
+          </a:xfrm>
+          <a:prstGeom prst="rect">
+            <a:avLst/>
+          </a:prstGeom>
+        </p:spPr>
+      </p:pic>
+      <p:sp>
+        <p:nvSpPr>
+          <p:cNvPr name="TextBox 4" id="4"/>
           <p:cNvSpPr txBox="true"/>
           <p:nvPr/>
         </p:nvSpPr>
         <p:spPr>
           <a:xfrm rot="0">
-            <a:off x="2717556" y="7058025"/>
-            <a:ext cx="12852888" cy="2200275"/>
+            <a:off x="2717556" y="4181475"/>
+            <a:ext cx="12852888" cy="1914525"/>
           </a:xfrm>
           <a:prstGeom prst="rect">
             <a:avLst/>
@@ -10115,12 +10128,12 @@
                 <a:solidFill>
                   <a:srgbClr val="000000"/>
                 </a:solidFill>
-                <a:latin typeface="Jua"/>
-                <a:ea typeface="Jua"/>
-                <a:cs typeface="Jua"/>
-                <a:sym typeface="Jua"/>
+                <a:latin typeface="무궁화 고딕"/>
+                <a:ea typeface="무궁화 고딕"/>
+                <a:cs typeface="무궁화 고딕"/>
+                <a:sym typeface="무궁화 고딕"/>
               </a:rPr>
-              <a:t>뉴질랜드</a:t>
+              <a:t>아부자</a:t>
             </a:r>
           </a:p>
         </p:txBody>
@@ -10157,66 +10170,62 @@
           <a:chExt cx="0" cy="0"/>
         </a:xfrm>
       </p:grpSpPr>
-      <p:pic>
-        <p:nvPicPr>
-          <p:cNvPr name="Picture 2" id="2"/>
-          <p:cNvPicPr>
-            <a:picLocks noChangeAspect="true"/>
-          </p:cNvPicPr>
-          <p:nvPr/>
-        </p:nvPicPr>
-        <p:blipFill>
-          <a:blip r:embed="rId2"/>
-          <a:srcRect l="0" t="0" r="0" b="0"/>
-          <a:stretch>
-            <a:fillRect/>
-          </a:stretch>
-        </p:blipFill>
+      <p:sp>
+        <p:nvSpPr>
+          <p:cNvPr name="Freeform 2" id="2"/>
+          <p:cNvSpPr/>
+          <p:nvPr/>
+        </p:nvSpPr>
         <p:spPr>
           <a:xfrm flipH="false" flipV="false" rot="0">
-            <a:off x="13655377" y="6809666"/>
-            <a:ext cx="6229999" cy="6954669"/>
-          </a:xfrm>
-          <a:prstGeom prst="rect">
-            <a:avLst/>
-          </a:prstGeom>
-        </p:spPr>
-      </p:pic>
-      <p:pic>
-        <p:nvPicPr>
-          <p:cNvPr name="Picture 3" id="3"/>
-          <p:cNvPicPr>
-            <a:picLocks noChangeAspect="true"/>
-          </p:cNvPicPr>
-          <p:nvPr/>
-        </p:nvPicPr>
-        <p:blipFill>
-          <a:blip r:embed="rId3"/>
-          <a:srcRect l="0" t="0" r="0" b="0"/>
-          <a:stretch>
-            <a:fillRect/>
-          </a:stretch>
-        </p:blipFill>
-        <p:spPr>
-          <a:xfrm flipH="false" flipV="false" rot="0">
-            <a:off x="0" y="0"/>
-            <a:ext cx="6925457" cy="4700654"/>
-          </a:xfrm>
-          <a:prstGeom prst="rect">
-            <a:avLst/>
-          </a:prstGeom>
-        </p:spPr>
-      </p:pic>
-      <p:sp>
-        <p:nvSpPr>
-          <p:cNvPr name="TextBox 4" id="4"/>
+            <a:off x="3433011" y="1028700"/>
+            <a:ext cx="11421979" cy="5710989"/>
+          </a:xfrm>
+          <a:custGeom>
+            <a:avLst/>
+            <a:gdLst/>
+            <a:ahLst/>
+            <a:cxnLst/>
+            <a:rect r="r" b="b" t="t" l="l"/>
+            <a:pathLst>
+              <a:path h="5710989" w="11421979">
+                <a:moveTo>
+                  <a:pt x="0" y="0"/>
+                </a:moveTo>
+                <a:lnTo>
+                  <a:pt x="11421978" y="0"/>
+                </a:lnTo>
+                <a:lnTo>
+                  <a:pt x="11421978" y="5710989"/>
+                </a:lnTo>
+                <a:lnTo>
+                  <a:pt x="0" y="5710989"/>
+                </a:lnTo>
+                <a:lnTo>
+                  <a:pt x="0" y="0"/>
+                </a:lnTo>
+                <a:close/>
+              </a:path>
+            </a:pathLst>
+          </a:custGeom>
+          <a:blipFill>
+            <a:blip r:embed="rId2"/>
+            <a:stretch>
+              <a:fillRect l="0" t="0" r="0" b="0"/>
+            </a:stretch>
+          </a:blipFill>
+        </p:spPr>
+      </p:sp>
+      <p:sp>
+        <p:nvSpPr>
+          <p:cNvPr name="TextBox 3" id="3"/>
           <p:cNvSpPr txBox="true"/>
           <p:nvPr/>
         </p:nvSpPr>
         <p:spPr>
           <a:xfrm rot="0">
-            <a:off x="2717556" y="3895725"/>
-            <a:ext cx="12852888" cy="2200275"/>
+            <a:off x="2717556" y="7343775"/>
+            <a:ext cx="12852888" cy="1914525"/>
           </a:xfrm>
           <a:prstGeom prst="rect">
             <a:avLst/>
@@ -10238,12 +10247,12 @@
                 <a:solidFill>
                   <a:srgbClr val="000000"/>
                 </a:solidFill>
-                <a:latin typeface="Jua"/>
-                <a:ea typeface="Jua"/>
-                <a:cs typeface="Jua"/>
-                <a:sym typeface="Jua"/>
+                <a:latin typeface="무궁화 고딕"/>
+                <a:ea typeface="무궁화 고딕"/>
+                <a:cs typeface="무궁화 고딕"/>
+                <a:sym typeface="무궁화 고딕"/>
               </a:rPr>
-              <a:t>웰링턴</a:t>
+              <a:t>뉴질랜드</a:t>
             </a:r>
           </a:p>
         </p:txBody>
@@ -10280,62 +10289,66 @@
           <a:chExt cx="0" cy="0"/>
         </a:xfrm>
       </p:grpSpPr>
-      <p:sp>
-        <p:nvSpPr>
-          <p:cNvPr name="Freeform 2" id="2"/>
-          <p:cNvSpPr/>
-          <p:nvPr/>
-        </p:nvSpPr>
+      <p:pic>
+        <p:nvPicPr>
+          <p:cNvPr name="Picture 2" id="2"/>
+          <p:cNvPicPr>
+            <a:picLocks noChangeAspect="true"/>
+          </p:cNvPicPr>
+          <p:nvPr/>
+        </p:nvPicPr>
+        <p:blipFill>
+          <a:blip r:embed="rId2"/>
+          <a:srcRect l="0" t="0" r="0" b="0"/>
+          <a:stretch>
+            <a:fillRect/>
+          </a:stretch>
+        </p:blipFill>
         <p:spPr>
           <a:xfrm flipH="false" flipV="false" rot="0">
-            <a:off x="4401073" y="1028700"/>
-            <a:ext cx="9485854" cy="5003865"/>
-          </a:xfrm>
-          <a:custGeom>
-            <a:avLst/>
-            <a:gdLst/>
-            <a:ahLst/>
-            <a:cxnLst/>
-            <a:rect r="r" b="b" t="t" l="l"/>
-            <a:pathLst>
-              <a:path h="5003865" w="9485854">
-                <a:moveTo>
-                  <a:pt x="0" y="0"/>
-                </a:moveTo>
-                <a:lnTo>
-                  <a:pt x="9485854" y="0"/>
-                </a:lnTo>
-                <a:lnTo>
-                  <a:pt x="9485854" y="5003865"/>
-                </a:lnTo>
-                <a:lnTo>
-                  <a:pt x="0" y="5003865"/>
-                </a:lnTo>
-                <a:lnTo>
-                  <a:pt x="0" y="0"/>
-                </a:lnTo>
-                <a:close/>
-              </a:path>
-            </a:pathLst>
-          </a:custGeom>
-          <a:blipFill>
-            <a:blip r:embed="rId2"/>
-            <a:stretch>
-              <a:fillRect l="0" t="0" r="0" b="0"/>
-            </a:stretch>
-          </a:blipFill>
-        </p:spPr>
-      </p:sp>
-      <p:sp>
-        <p:nvSpPr>
-          <p:cNvPr name="TextBox 3" id="3"/>
+            <a:off x="13655377" y="6809666"/>
+            <a:ext cx="6229999" cy="6954669"/>
+          </a:xfrm>
+          <a:prstGeom prst="rect">
+            <a:avLst/>
+          </a:prstGeom>
+        </p:spPr>
+      </p:pic>
+      <p:pic>
+        <p:nvPicPr>
+          <p:cNvPr name="Picture 3" id="3"/>
+          <p:cNvPicPr>
+            <a:picLocks noChangeAspect="true"/>
+          </p:cNvPicPr>
+          <p:nvPr/>
+        </p:nvPicPr>
+        <p:blipFill>
+          <a:blip r:embed="rId3"/>
+          <a:srcRect l="0" t="0" r="0" b="0"/>
+          <a:stretch>
+            <a:fillRect/>
+          </a:stretch>
+        </p:blipFill>
+        <p:spPr>
+          <a:xfrm flipH="false" flipV="false" rot="0">
+            <a:off x="0" y="0"/>
+            <a:ext cx="6925457" cy="4700654"/>
+          </a:xfrm>
+          <a:prstGeom prst="rect">
+            <a:avLst/>
+          </a:prstGeom>
+        </p:spPr>
+      </p:pic>
+      <p:sp>
+        <p:nvSpPr>
+          <p:cNvPr name="TextBox 4" id="4"/>
           <p:cNvSpPr txBox="true"/>
           <p:nvPr/>
         </p:nvSpPr>
         <p:spPr>
           <a:xfrm rot="0">
-            <a:off x="2717556" y="7058025"/>
-            <a:ext cx="12852888" cy="2200275"/>
+            <a:off x="2717556" y="4181475"/>
+            <a:ext cx="12852888" cy="1914525"/>
           </a:xfrm>
           <a:prstGeom prst="rect">
             <a:avLst/>
@@ -10357,12 +10370,12 @@
                 <a:solidFill>
                   <a:srgbClr val="000000"/>
                 </a:solidFill>
-                <a:latin typeface="Jua"/>
-                <a:ea typeface="Jua"/>
-                <a:cs typeface="Jua"/>
-                <a:sym typeface="Jua"/>
+                <a:latin typeface="무궁화 고딕"/>
+                <a:ea typeface="무궁화 고딕"/>
+                <a:cs typeface="무궁화 고딕"/>
+                <a:sym typeface="무궁화 고딕"/>
               </a:rPr>
-              <a:t>미국</a:t>
+              <a:t>서울</a:t>
             </a:r>
           </a:p>
         </p:txBody>
@@ -10399,62 +10412,66 @@
           <a:chExt cx="0" cy="0"/>
         </a:xfrm>
       </p:grpSpPr>
-      <p:sp>
-        <p:nvSpPr>
-          <p:cNvPr name="Freeform 2" id="2"/>
-          <p:cNvSpPr/>
-          <p:nvPr/>
-        </p:nvSpPr>
+      <p:pic>
+        <p:nvPicPr>
+          <p:cNvPr name="Picture 2" id="2"/>
+          <p:cNvPicPr>
+            <a:picLocks noChangeAspect="true"/>
+          </p:cNvPicPr>
+          <p:nvPr/>
+        </p:nvPicPr>
+        <p:blipFill>
+          <a:blip r:embed="rId2"/>
+          <a:srcRect l="0" t="0" r="0" b="0"/>
+          <a:stretch>
+            <a:fillRect/>
+          </a:stretch>
+        </p:blipFill>
         <p:spPr>
           <a:xfrm flipH="false" flipV="false" rot="0">
-            <a:off x="4505135" y="1028700"/>
-            <a:ext cx="9277730" cy="6173908"/>
-          </a:xfrm>
-          <a:custGeom>
-            <a:avLst/>
-            <a:gdLst/>
-            <a:ahLst/>
-            <a:cxnLst/>
-            <a:rect r="r" b="b" t="t" l="l"/>
-            <a:pathLst>
-              <a:path h="6173908" w="9277730">
-                <a:moveTo>
-                  <a:pt x="0" y="0"/>
-                </a:moveTo>
-                <a:lnTo>
-                  <a:pt x="9277730" y="0"/>
-                </a:lnTo>
-                <a:lnTo>
-                  <a:pt x="9277730" y="6173908"/>
-                </a:lnTo>
-                <a:lnTo>
-                  <a:pt x="0" y="6173908"/>
-                </a:lnTo>
-                <a:lnTo>
-                  <a:pt x="0" y="0"/>
-                </a:lnTo>
-                <a:close/>
-              </a:path>
-            </a:pathLst>
-          </a:custGeom>
-          <a:blipFill>
-            <a:blip r:embed="rId2"/>
-            <a:stretch>
-              <a:fillRect l="0" t="0" r="0" b="0"/>
-            </a:stretch>
-          </a:blipFill>
-        </p:spPr>
-      </p:sp>
-      <p:sp>
-        <p:nvSpPr>
-          <p:cNvPr name="TextBox 3" id="3"/>
+            <a:off x="13655377" y="6809666"/>
+            <a:ext cx="6229999" cy="6954669"/>
+          </a:xfrm>
+          <a:prstGeom prst="rect">
+            <a:avLst/>
+          </a:prstGeom>
+        </p:spPr>
+      </p:pic>
+      <p:pic>
+        <p:nvPicPr>
+          <p:cNvPr name="Picture 3" id="3"/>
+          <p:cNvPicPr>
+            <a:picLocks noChangeAspect="true"/>
+          </p:cNvPicPr>
+          <p:nvPr/>
+        </p:nvPicPr>
+        <p:blipFill>
+          <a:blip r:embed="rId3"/>
+          <a:srcRect l="0" t="0" r="0" b="0"/>
+          <a:stretch>
+            <a:fillRect/>
+          </a:stretch>
+        </p:blipFill>
+        <p:spPr>
+          <a:xfrm flipH="false" flipV="false" rot="0">
+            <a:off x="0" y="0"/>
+            <a:ext cx="6925457" cy="4700654"/>
+          </a:xfrm>
+          <a:prstGeom prst="rect">
+            <a:avLst/>
+          </a:prstGeom>
+        </p:spPr>
+      </p:pic>
+      <p:sp>
+        <p:nvSpPr>
+          <p:cNvPr name="TextBox 4" id="4"/>
           <p:cNvSpPr txBox="true"/>
           <p:nvPr/>
         </p:nvSpPr>
         <p:spPr>
           <a:xfrm rot="0">
-            <a:off x="2717556" y="7058025"/>
-            <a:ext cx="12852888" cy="2200275"/>
+            <a:off x="2717556" y="4181475"/>
+            <a:ext cx="12852888" cy="1914525"/>
           </a:xfrm>
           <a:prstGeom prst="rect">
             <a:avLst/>
@@ -10476,12 +10493,12 @@
                 <a:solidFill>
                   <a:srgbClr val="000000"/>
                 </a:solidFill>
-                <a:latin typeface="Jua"/>
-                <a:ea typeface="Jua"/>
-                <a:cs typeface="Jua"/>
-                <a:sym typeface="Jua"/>
+                <a:latin typeface="무궁화 고딕"/>
+                <a:ea typeface="무궁화 고딕"/>
+                <a:cs typeface="무궁화 고딕"/>
+                <a:sym typeface="무궁화 고딕"/>
               </a:rPr>
-              <a:t>베트남</a:t>
+              <a:t>웰링턴</a:t>
             </a:r>
           </a:p>
         </p:txBody>
@@ -10518,66 +10535,62 @@
           <a:chExt cx="0" cy="0"/>
         </a:xfrm>
       </p:grpSpPr>
-      <p:pic>
-        <p:nvPicPr>
-          <p:cNvPr name="Picture 2" id="2"/>
-          <p:cNvPicPr>
-            <a:picLocks noChangeAspect="true"/>
-          </p:cNvPicPr>
-          <p:nvPr/>
-        </p:nvPicPr>
-        <p:blipFill>
-          <a:blip r:embed="rId2"/>
-          <a:srcRect l="0" t="0" r="0" b="0"/>
-          <a:stretch>
-            <a:fillRect/>
-          </a:stretch>
-        </p:blipFill>
+      <p:sp>
+        <p:nvSpPr>
+          <p:cNvPr name="Freeform 2" id="2"/>
+          <p:cNvSpPr/>
+          <p:nvPr/>
+        </p:nvSpPr>
         <p:spPr>
           <a:xfrm flipH="false" flipV="false" rot="0">
-            <a:off x="13655377" y="6809666"/>
-            <a:ext cx="6229999" cy="6954669"/>
-          </a:xfrm>
-          <a:prstGeom prst="rect">
-            <a:avLst/>
-          </a:prstGeom>
-        </p:spPr>
-      </p:pic>
-      <p:pic>
-        <p:nvPicPr>
-          <p:cNvPr name="Picture 3" id="3"/>
-          <p:cNvPicPr>
-            <a:picLocks noChangeAspect="true"/>
-          </p:cNvPicPr>
-          <p:nvPr/>
-        </p:nvPicPr>
-        <p:blipFill>
-          <a:blip r:embed="rId3"/>
-          <a:srcRect l="0" t="0" r="0" b="0"/>
-          <a:stretch>
-            <a:fillRect/>
-          </a:stretch>
-        </p:blipFill>
-        <p:spPr>
-          <a:xfrm flipH="false" flipV="false" rot="0">
-            <a:off x="0" y="0"/>
-            <a:ext cx="6925457" cy="4700654"/>
-          </a:xfrm>
-          <a:prstGeom prst="rect">
-            <a:avLst/>
-          </a:prstGeom>
-        </p:spPr>
-      </p:pic>
-      <p:sp>
-        <p:nvSpPr>
-          <p:cNvPr name="TextBox 4" id="4"/>
+            <a:off x="4505135" y="1028700"/>
+            <a:ext cx="9277730" cy="6173908"/>
+          </a:xfrm>
+          <a:custGeom>
+            <a:avLst/>
+            <a:gdLst/>
+            <a:ahLst/>
+            <a:cxnLst/>
+            <a:rect r="r" b="b" t="t" l="l"/>
+            <a:pathLst>
+              <a:path h="6173908" w="9277730">
+                <a:moveTo>
+                  <a:pt x="0" y="0"/>
+                </a:moveTo>
+                <a:lnTo>
+                  <a:pt x="9277730" y="0"/>
+                </a:lnTo>
+                <a:lnTo>
+                  <a:pt x="9277730" y="6173908"/>
+                </a:lnTo>
+                <a:lnTo>
+                  <a:pt x="0" y="6173908"/>
+                </a:lnTo>
+                <a:lnTo>
+                  <a:pt x="0" y="0"/>
+                </a:lnTo>
+                <a:close/>
+              </a:path>
+            </a:pathLst>
+          </a:custGeom>
+          <a:blipFill>
+            <a:blip r:embed="rId2"/>
+            <a:stretch>
+              <a:fillRect l="0" t="0" r="0" b="0"/>
+            </a:stretch>
+          </a:blipFill>
+        </p:spPr>
+      </p:sp>
+      <p:sp>
+        <p:nvSpPr>
+          <p:cNvPr name="TextBox 3" id="3"/>
           <p:cNvSpPr txBox="true"/>
           <p:nvPr/>
         </p:nvSpPr>
         <p:spPr>
           <a:xfrm rot="0">
-            <a:off x="2717556" y="3895725"/>
-            <a:ext cx="12852888" cy="2200275"/>
+            <a:off x="2717556" y="7343775"/>
+            <a:ext cx="12852888" cy="1914525"/>
           </a:xfrm>
           <a:prstGeom prst="rect">
             <a:avLst/>
@@ -10599,12 +10612,12 @@
                 <a:solidFill>
                   <a:srgbClr val="000000"/>
                 </a:solidFill>
-                <a:latin typeface="Jua"/>
-                <a:ea typeface="Jua"/>
-                <a:cs typeface="Jua"/>
-                <a:sym typeface="Jua"/>
+                <a:latin typeface="무궁화 고딕"/>
+                <a:ea typeface="무궁화 고딕"/>
+                <a:cs typeface="무궁화 고딕"/>
+                <a:sym typeface="무궁화 고딕"/>
               </a:rPr>
-              <a:t>하노이</a:t>
+              <a:t>베트남</a:t>
             </a:r>
           </a:p>
         </p:txBody>
@@ -10641,62 +10654,66 @@
           <a:chExt cx="0" cy="0"/>
         </a:xfrm>
       </p:grpSpPr>
-      <p:sp>
-        <p:nvSpPr>
-          <p:cNvPr name="Freeform 2" id="2"/>
-          <p:cNvSpPr/>
-          <p:nvPr/>
-        </p:nvSpPr>
+      <p:pic>
+        <p:nvPicPr>
+          <p:cNvPr name="Picture 2" id="2"/>
+          <p:cNvPicPr>
+            <a:picLocks noChangeAspect="true"/>
+          </p:cNvPicPr>
+          <p:nvPr/>
+        </p:nvPicPr>
+        <p:blipFill>
+          <a:blip r:embed="rId2"/>
+          <a:srcRect l="0" t="0" r="0" b="0"/>
+          <a:stretch>
+            <a:fillRect/>
+          </a:stretch>
+        </p:blipFill>
         <p:spPr>
           <a:xfrm flipH="false" flipV="false" rot="0">
-            <a:off x="3212432" y="1028700"/>
-            <a:ext cx="11863137" cy="5931568"/>
-          </a:xfrm>
-          <a:custGeom>
-            <a:avLst/>
-            <a:gdLst/>
-            <a:ahLst/>
-            <a:cxnLst/>
-            <a:rect r="r" b="b" t="t" l="l"/>
-            <a:pathLst>
-              <a:path h="5931568" w="11863137">
-                <a:moveTo>
-                  <a:pt x="0" y="0"/>
-                </a:moveTo>
-                <a:lnTo>
-                  <a:pt x="11863136" y="0"/>
-                </a:lnTo>
-                <a:lnTo>
-                  <a:pt x="11863136" y="5931568"/>
-                </a:lnTo>
-                <a:lnTo>
-                  <a:pt x="0" y="5931568"/>
-                </a:lnTo>
-                <a:lnTo>
-                  <a:pt x="0" y="0"/>
-                </a:lnTo>
-                <a:close/>
-              </a:path>
-            </a:pathLst>
-          </a:custGeom>
-          <a:blipFill>
-            <a:blip r:embed="rId2"/>
-            <a:stretch>
-              <a:fillRect l="0" t="0" r="0" b="0"/>
-            </a:stretch>
-          </a:blipFill>
-        </p:spPr>
-      </p:sp>
-      <p:sp>
-        <p:nvSpPr>
-          <p:cNvPr name="TextBox 3" id="3"/>
+            <a:off x="13655377" y="6809666"/>
+            <a:ext cx="6229999" cy="6954669"/>
+          </a:xfrm>
+          <a:prstGeom prst="rect">
+            <a:avLst/>
+          </a:prstGeom>
+        </p:spPr>
+      </p:pic>
+      <p:pic>
+        <p:nvPicPr>
+          <p:cNvPr name="Picture 3" id="3"/>
+          <p:cNvPicPr>
+            <a:picLocks noChangeAspect="true"/>
+          </p:cNvPicPr>
+          <p:nvPr/>
+        </p:nvPicPr>
+        <p:blipFill>
+          <a:blip r:embed="rId3"/>
+          <a:srcRect l="0" t="0" r="0" b="0"/>
+          <a:stretch>
+            <a:fillRect/>
+          </a:stretch>
+        </p:blipFill>
+        <p:spPr>
+          <a:xfrm flipH="false" flipV="false" rot="0">
+            <a:off x="0" y="0"/>
+            <a:ext cx="6925457" cy="4700654"/>
+          </a:xfrm>
+          <a:prstGeom prst="rect">
+            <a:avLst/>
+          </a:prstGeom>
+        </p:spPr>
+      </p:pic>
+      <p:sp>
+        <p:nvSpPr>
+          <p:cNvPr name="TextBox 4" id="4"/>
           <p:cNvSpPr txBox="true"/>
           <p:nvPr/>
         </p:nvSpPr>
         <p:spPr>
           <a:xfrm rot="0">
-            <a:off x="2717556" y="7058025"/>
-            <a:ext cx="12852888" cy="2200275"/>
+            <a:off x="2717556" y="4181475"/>
+            <a:ext cx="12852888" cy="1914525"/>
           </a:xfrm>
           <a:prstGeom prst="rect">
             <a:avLst/>
@@ -10718,12 +10735,12 @@
                 <a:solidFill>
                   <a:srgbClr val="000000"/>
                 </a:solidFill>
-                <a:latin typeface="Jua"/>
-                <a:ea typeface="Jua"/>
-                <a:cs typeface="Jua"/>
-                <a:sym typeface="Jua"/>
+                <a:latin typeface="무궁화 고딕"/>
+                <a:ea typeface="무궁화 고딕"/>
+                <a:cs typeface="무궁화 고딕"/>
+                <a:sym typeface="무궁화 고딕"/>
               </a:rPr>
-              <a:t>필리핀</a:t>
+              <a:t>하노이</a:t>
             </a:r>
           </a:p>
         </p:txBody>
@@ -10760,66 +10777,62 @@
           <a:chExt cx="0" cy="0"/>
         </a:xfrm>
       </p:grpSpPr>
-      <p:pic>
-        <p:nvPicPr>
-          <p:cNvPr name="Picture 2" id="2"/>
-          <p:cNvPicPr>
-            <a:picLocks noChangeAspect="true"/>
-          </p:cNvPicPr>
-          <p:nvPr/>
-        </p:nvPicPr>
-        <p:blipFill>
-          <a:blip r:embed="rId2"/>
-          <a:srcRect l="0" t="0" r="0" b="0"/>
-          <a:stretch>
-            <a:fillRect/>
-          </a:stretch>
-        </p:blipFill>
+      <p:sp>
+        <p:nvSpPr>
+          <p:cNvPr name="Freeform 2" id="2"/>
+          <p:cNvSpPr/>
+          <p:nvPr/>
+        </p:nvSpPr>
         <p:spPr>
           <a:xfrm flipH="false" flipV="false" rot="0">
-            <a:off x="13655377" y="6809666"/>
-            <a:ext cx="6229999" cy="6954669"/>
-          </a:xfrm>
-          <a:prstGeom prst="rect">
-            <a:avLst/>
-          </a:prstGeom>
-        </p:spPr>
-      </p:pic>
-      <p:pic>
-        <p:nvPicPr>
-          <p:cNvPr name="Picture 3" id="3"/>
-          <p:cNvPicPr>
-            <a:picLocks noChangeAspect="true"/>
-          </p:cNvPicPr>
-          <p:nvPr/>
-        </p:nvPicPr>
-        <p:blipFill>
-          <a:blip r:embed="rId3"/>
-          <a:srcRect l="0" t="0" r="0" b="0"/>
-          <a:stretch>
-            <a:fillRect/>
-          </a:stretch>
-        </p:blipFill>
-        <p:spPr>
-          <a:xfrm flipH="false" flipV="false" rot="0">
-            <a:off x="0" y="0"/>
-            <a:ext cx="6925457" cy="4700654"/>
-          </a:xfrm>
-          <a:prstGeom prst="rect">
-            <a:avLst/>
-          </a:prstGeom>
-        </p:spPr>
-      </p:pic>
-      <p:sp>
-        <p:nvSpPr>
-          <p:cNvPr name="TextBox 4" id="4"/>
+            <a:off x="3212432" y="1028700"/>
+            <a:ext cx="11863137" cy="5931568"/>
+          </a:xfrm>
+          <a:custGeom>
+            <a:avLst/>
+            <a:gdLst/>
+            <a:ahLst/>
+            <a:cxnLst/>
+            <a:rect r="r" b="b" t="t" l="l"/>
+            <a:pathLst>
+              <a:path h="5931568" w="11863137">
+                <a:moveTo>
+                  <a:pt x="0" y="0"/>
+                </a:moveTo>
+                <a:lnTo>
+                  <a:pt x="11863136" y="0"/>
+                </a:lnTo>
+                <a:lnTo>
+                  <a:pt x="11863136" y="5931568"/>
+                </a:lnTo>
+                <a:lnTo>
+                  <a:pt x="0" y="5931568"/>
+                </a:lnTo>
+                <a:lnTo>
+                  <a:pt x="0" y="0"/>
+                </a:lnTo>
+                <a:close/>
+              </a:path>
+            </a:pathLst>
+          </a:custGeom>
+          <a:blipFill>
+            <a:blip r:embed="rId2"/>
+            <a:stretch>
+              <a:fillRect l="0" t="0" r="0" b="0"/>
+            </a:stretch>
+          </a:blipFill>
+        </p:spPr>
+      </p:sp>
+      <p:sp>
+        <p:nvSpPr>
+          <p:cNvPr name="TextBox 3" id="3"/>
           <p:cNvSpPr txBox="true"/>
           <p:nvPr/>
         </p:nvSpPr>
         <p:spPr>
           <a:xfrm rot="0">
-            <a:off x="2717556" y="3895725"/>
-            <a:ext cx="12852888" cy="2200275"/>
+            <a:off x="2717556" y="7343775"/>
+            <a:ext cx="12852888" cy="1914525"/>
           </a:xfrm>
           <a:prstGeom prst="rect">
             <a:avLst/>
@@ -10841,12 +10854,12 @@
                 <a:solidFill>
                   <a:srgbClr val="000000"/>
                 </a:solidFill>
-                <a:latin typeface="Jua"/>
-                <a:ea typeface="Jua"/>
-                <a:cs typeface="Jua"/>
-                <a:sym typeface="Jua"/>
+                <a:latin typeface="무궁화 고딕"/>
+                <a:ea typeface="무궁화 고딕"/>
+                <a:cs typeface="무궁화 고딕"/>
+                <a:sym typeface="무궁화 고딕"/>
               </a:rPr>
-              <a:t>마닐라</a:t>
+              <a:t>필리핀</a:t>
             </a:r>
           </a:p>
         </p:txBody>
@@ -10899,25 +10912,50 @@
           </a:stretch>
         </p:blipFill>
         <p:spPr>
-          <a:xfrm flipH="false" flipV="false" rot="-7408585">
-            <a:off x="4499355" y="-533795"/>
-            <a:ext cx="9289290" cy="10369815"/>
+          <a:xfrm flipH="false" flipV="false" rot="0">
+            <a:off x="13655377" y="6809666"/>
+            <a:ext cx="6229999" cy="6954669"/>
           </a:xfrm>
           <a:prstGeom prst="rect">
             <a:avLst/>
           </a:prstGeom>
         </p:spPr>
       </p:pic>
-      <p:sp>
-        <p:nvSpPr>
-          <p:cNvPr name="TextBox 3" id="3"/>
+      <p:pic>
+        <p:nvPicPr>
+          <p:cNvPr name="Picture 3" id="3"/>
+          <p:cNvPicPr>
+            <a:picLocks noChangeAspect="true"/>
+          </p:cNvPicPr>
+          <p:nvPr/>
+        </p:nvPicPr>
+        <p:blipFill>
+          <a:blip r:embed="rId3"/>
+          <a:srcRect l="0" t="0" r="0" b="0"/>
+          <a:stretch>
+            <a:fillRect/>
+          </a:stretch>
+        </p:blipFill>
+        <p:spPr>
+          <a:xfrm flipH="false" flipV="false" rot="0">
+            <a:off x="0" y="0"/>
+            <a:ext cx="6925457" cy="4700654"/>
+          </a:xfrm>
+          <a:prstGeom prst="rect">
+            <a:avLst/>
+          </a:prstGeom>
+        </p:spPr>
+      </p:pic>
+      <p:sp>
+        <p:nvSpPr>
+          <p:cNvPr name="TextBox 4" id="4"/>
           <p:cNvSpPr txBox="true"/>
           <p:nvPr/>
         </p:nvSpPr>
         <p:spPr>
           <a:xfrm rot="0">
-            <a:off x="4421807" y="3895725"/>
-            <a:ext cx="9444385" cy="2200275"/>
+            <a:off x="2717556" y="4181475"/>
+            <a:ext cx="12852888" cy="1914525"/>
           </a:xfrm>
           <a:prstGeom prst="rect">
             <a:avLst/>
@@ -10939,10 +10977,108 @@
                 <a:solidFill>
                   <a:srgbClr val="000000"/>
                 </a:solidFill>
-                <a:latin typeface="Jua"/>
-                <a:ea typeface="Jua"/>
-                <a:cs typeface="Jua"/>
-                <a:sym typeface="Jua"/>
+                <a:latin typeface="무궁화 고딕"/>
+                <a:ea typeface="무궁화 고딕"/>
+                <a:cs typeface="무궁화 고딕"/>
+                <a:sym typeface="무궁화 고딕"/>
+              </a:rPr>
+              <a:t>마닐라</a:t>
+            </a:r>
+          </a:p>
+        </p:txBody>
+      </p:sp>
+    </p:spTree>
+  </p:cSld>
+  <p:clrMapOvr>
+    <a:masterClrMapping/>
+  </p:clrMapOvr>
+</p:sld>
+</file>
+
+<file path=ppt/slides/slide65.xml><?xml version="1.0" encoding="utf-8"?>
+<p:sld xmlns:p="http://schemas.openxmlformats.org/presentationml/2006/main" xmlns:a="http://schemas.openxmlformats.org/drawingml/2006/main" xmlns:r="http://schemas.openxmlformats.org/officeDocument/2006/relationships">
+  <p:cSld>
+    <p:bg>
+      <p:bgPr>
+        <a:solidFill>
+          <a:srgbClr val="FFFAEF"/>
+        </a:solidFill>
+      </p:bgPr>
+    </p:bg>
+    <p:spTree>
+      <p:nvGrpSpPr>
+        <p:cNvPr id="1" name=""/>
+        <p:cNvGrpSpPr/>
+        <p:nvPr/>
+      </p:nvGrpSpPr>
+      <p:grpSpPr>
+        <a:xfrm>
+          <a:off x="0" y="0"/>
+          <a:ext cx="0" cy="0"/>
+          <a:chOff x="0" y="0"/>
+          <a:chExt cx="0" cy="0"/>
+        </a:xfrm>
+      </p:grpSpPr>
+      <p:pic>
+        <p:nvPicPr>
+          <p:cNvPr name="Picture 2" id="2"/>
+          <p:cNvPicPr>
+            <a:picLocks noChangeAspect="true"/>
+          </p:cNvPicPr>
+          <p:nvPr/>
+        </p:nvPicPr>
+        <p:blipFill>
+          <a:blip r:embed="rId2"/>
+          <a:srcRect l="0" t="0" r="0" b="0"/>
+          <a:stretch>
+            <a:fillRect/>
+          </a:stretch>
+        </p:blipFill>
+        <p:spPr>
+          <a:xfrm flipH="false" flipV="false" rot="-7408585">
+            <a:off x="4499355" y="-533795"/>
+            <a:ext cx="9289290" cy="10369815"/>
+          </a:xfrm>
+          <a:prstGeom prst="rect">
+            <a:avLst/>
+          </a:prstGeom>
+        </p:spPr>
+      </p:pic>
+      <p:sp>
+        <p:nvSpPr>
+          <p:cNvPr name="TextBox 3" id="3"/>
+          <p:cNvSpPr txBox="true"/>
+          <p:nvPr/>
+        </p:nvSpPr>
+        <p:spPr>
+          <a:xfrm rot="0">
+            <a:off x="4421807" y="4181475"/>
+            <a:ext cx="9444385" cy="1914525"/>
+          </a:xfrm>
+          <a:prstGeom prst="rect">
+            <a:avLst/>
+          </a:prstGeom>
+        </p:spPr>
+        <p:txBody>
+          <a:bodyPr anchor="t" rtlCol="false" tIns="0" lIns="0" bIns="0" rIns="0">
+            <a:spAutoFit/>
+          </a:bodyPr>
+          <a:lstStyle/>
+          <a:p>
+            <a:pPr algn="ctr">
+              <a:lnSpc>
+                <a:spcPts val="15000"/>
+              </a:lnSpc>
+            </a:pPr>
+            <a:r>
+              <a:rPr lang="en-US" sz="12500">
+                <a:solidFill>
+                  <a:srgbClr val="000000"/>
+                </a:solidFill>
+                <a:latin typeface="무궁화 고딕"/>
+                <a:ea typeface="무궁화 고딕"/>
+                <a:cs typeface="무궁화 고딕"/>
+                <a:sym typeface="무궁화 고딕"/>
               </a:rPr>
               <a:t>감사합니다!</a:t>
             </a:r>
@@ -11031,66 +11167,62 @@
           <a:chExt cx="0" cy="0"/>
         </a:xfrm>
       </p:grpSpPr>
-      <p:pic>
-        <p:nvPicPr>
-          <p:cNvPr name="Picture 2" id="2"/>
-          <p:cNvPicPr>
-            <a:picLocks noChangeAspect="true"/>
-          </p:cNvPicPr>
-          <p:nvPr/>
-        </p:nvPicPr>
-        <p:blipFill>
-          <a:blip r:embed="rId2"/>
-          <a:srcRect l="0" t="0" r="0" b="0"/>
-          <a:stretch>
-            <a:fillRect/>
-          </a:stretch>
-        </p:blipFill>
+      <p:sp>
+        <p:nvSpPr>
+          <p:cNvPr name="Freeform 2" id="2"/>
+          <p:cNvSpPr/>
+          <p:nvPr/>
+        </p:nvSpPr>
         <p:spPr>
           <a:xfrm flipH="false" flipV="false" rot="0">
-            <a:off x="13655377" y="6809666"/>
-            <a:ext cx="6229999" cy="6954669"/>
-          </a:xfrm>
-          <a:prstGeom prst="rect">
-            <a:avLst/>
-          </a:prstGeom>
-        </p:spPr>
-      </p:pic>
-      <p:pic>
-        <p:nvPicPr>
-          <p:cNvPr name="Picture 3" id="3"/>
-          <p:cNvPicPr>
-            <a:picLocks noChangeAspect="true"/>
-          </p:cNvPicPr>
-          <p:nvPr/>
-        </p:nvPicPr>
-        <p:blipFill>
-          <a:blip r:embed="rId3"/>
-          <a:srcRect l="0" t="0" r="0" b="0"/>
-          <a:stretch>
-            <a:fillRect/>
-          </a:stretch>
-        </p:blipFill>
-        <p:spPr>
-          <a:xfrm flipH="false" flipV="false" rot="0">
-            <a:off x="0" y="0"/>
-            <a:ext cx="6925457" cy="4700654"/>
-          </a:xfrm>
-          <a:prstGeom prst="rect">
-            <a:avLst/>
-          </a:prstGeom>
-        </p:spPr>
-      </p:pic>
-      <p:sp>
-        <p:nvSpPr>
-          <p:cNvPr name="TextBox 4" id="4"/>
+            <a:off x="4401073" y="1028700"/>
+            <a:ext cx="9485854" cy="5003865"/>
+          </a:xfrm>
+          <a:custGeom>
+            <a:avLst/>
+            <a:gdLst/>
+            <a:ahLst/>
+            <a:cxnLst/>
+            <a:rect r="r" b="b" t="t" l="l"/>
+            <a:pathLst>
+              <a:path h="5003865" w="9485854">
+                <a:moveTo>
+                  <a:pt x="0" y="0"/>
+                </a:moveTo>
+                <a:lnTo>
+                  <a:pt x="9485854" y="0"/>
+                </a:lnTo>
+                <a:lnTo>
+                  <a:pt x="9485854" y="5003865"/>
+                </a:lnTo>
+                <a:lnTo>
+                  <a:pt x="0" y="5003865"/>
+                </a:lnTo>
+                <a:lnTo>
+                  <a:pt x="0" y="0"/>
+                </a:lnTo>
+                <a:close/>
+              </a:path>
+            </a:pathLst>
+          </a:custGeom>
+          <a:blipFill>
+            <a:blip r:embed="rId2"/>
+            <a:stretch>
+              <a:fillRect l="0" t="0" r="0" b="0"/>
+            </a:stretch>
+          </a:blipFill>
+        </p:spPr>
+      </p:sp>
+      <p:sp>
+        <p:nvSpPr>
+          <p:cNvPr name="TextBox 3" id="3"/>
           <p:cNvSpPr txBox="true"/>
           <p:nvPr/>
         </p:nvSpPr>
         <p:spPr>
           <a:xfrm rot="0">
-            <a:off x="2717556" y="3895725"/>
-            <a:ext cx="12852888" cy="2200275"/>
+            <a:off x="2717556" y="7343775"/>
+            <a:ext cx="12852888" cy="1914525"/>
           </a:xfrm>
           <a:prstGeom prst="rect">
             <a:avLst/>
@@ -11112,12 +11244,12 @@
                 <a:solidFill>
                   <a:srgbClr val="000000"/>
                 </a:solidFill>
-                <a:latin typeface="Jua"/>
-                <a:ea typeface="Jua"/>
-                <a:cs typeface="Jua"/>
-                <a:sym typeface="Jua"/>
+                <a:latin typeface="무궁화 고딕"/>
+                <a:ea typeface="무궁화 고딕"/>
+                <a:cs typeface="무궁화 고딕"/>
+                <a:sym typeface="무궁화 고딕"/>
               </a:rPr>
-              <a:t>워싱턴 D.C.</a:t>
+              <a:t>미국</a:t>
             </a:r>
           </a:p>
         </p:txBody>
@@ -11154,62 +11286,66 @@
           <a:chExt cx="0" cy="0"/>
         </a:xfrm>
       </p:grpSpPr>
-      <p:sp>
-        <p:nvSpPr>
-          <p:cNvPr name="Freeform 2" id="2"/>
-          <p:cNvSpPr/>
-          <p:nvPr/>
-        </p:nvSpPr>
+      <p:pic>
+        <p:nvPicPr>
+          <p:cNvPr name="Picture 2" id="2"/>
+          <p:cNvPicPr>
+            <a:picLocks noChangeAspect="true"/>
+          </p:cNvPicPr>
+          <p:nvPr/>
+        </p:nvPicPr>
+        <p:blipFill>
+          <a:blip r:embed="rId2"/>
+          <a:srcRect l="0" t="0" r="0" b="0"/>
+          <a:stretch>
+            <a:fillRect/>
+          </a:stretch>
+        </p:blipFill>
         <p:spPr>
           <a:xfrm flipH="false" flipV="false" rot="0">
-            <a:off x="4713099" y="1028700"/>
-            <a:ext cx="8861801" cy="5897126"/>
-          </a:xfrm>
-          <a:custGeom>
-            <a:avLst/>
-            <a:gdLst/>
-            <a:ahLst/>
-            <a:cxnLst/>
-            <a:rect r="r" b="b" t="t" l="l"/>
-            <a:pathLst>
-              <a:path h="5897126" w="8861801">
-                <a:moveTo>
-                  <a:pt x="0" y="0"/>
-                </a:moveTo>
-                <a:lnTo>
-                  <a:pt x="8861802" y="0"/>
-                </a:lnTo>
-                <a:lnTo>
-                  <a:pt x="8861802" y="5897126"/>
-                </a:lnTo>
-                <a:lnTo>
-                  <a:pt x="0" y="5897126"/>
-                </a:lnTo>
-                <a:lnTo>
-                  <a:pt x="0" y="0"/>
-                </a:lnTo>
-                <a:close/>
-              </a:path>
-            </a:pathLst>
-          </a:custGeom>
-          <a:blipFill>
-            <a:blip r:embed="rId2"/>
-            <a:stretch>
-              <a:fillRect l="0" t="0" r="0" b="0"/>
-            </a:stretch>
-          </a:blipFill>
-        </p:spPr>
-      </p:sp>
-      <p:sp>
-        <p:nvSpPr>
-          <p:cNvPr name="TextBox 3" id="3"/>
+            <a:off x="13655377" y="6809666"/>
+            <a:ext cx="6229999" cy="6954669"/>
+          </a:xfrm>
+          <a:prstGeom prst="rect">
+            <a:avLst/>
+          </a:prstGeom>
+        </p:spPr>
+      </p:pic>
+      <p:pic>
+        <p:nvPicPr>
+          <p:cNvPr name="Picture 3" id="3"/>
+          <p:cNvPicPr>
+            <a:picLocks noChangeAspect="true"/>
+          </p:cNvPicPr>
+          <p:nvPr/>
+        </p:nvPicPr>
+        <p:blipFill>
+          <a:blip r:embed="rId3"/>
+          <a:srcRect l="0" t="0" r="0" b="0"/>
+          <a:stretch>
+            <a:fillRect/>
+          </a:stretch>
+        </p:blipFill>
+        <p:spPr>
+          <a:xfrm flipH="false" flipV="false" rot="0">
+            <a:off x="0" y="0"/>
+            <a:ext cx="6925457" cy="4700654"/>
+          </a:xfrm>
+          <a:prstGeom prst="rect">
+            <a:avLst/>
+          </a:prstGeom>
+        </p:spPr>
+      </p:pic>
+      <p:sp>
+        <p:nvSpPr>
+          <p:cNvPr name="TextBox 4" id="4"/>
           <p:cNvSpPr txBox="true"/>
           <p:nvPr/>
         </p:nvSpPr>
         <p:spPr>
           <a:xfrm rot="0">
-            <a:off x="2717556" y="7058025"/>
-            <a:ext cx="12852888" cy="2200275"/>
+            <a:off x="2717556" y="4181475"/>
+            <a:ext cx="12852888" cy="1914525"/>
           </a:xfrm>
           <a:prstGeom prst="rect">
             <a:avLst/>
@@ -11231,12 +11367,12 @@
                 <a:solidFill>
                   <a:srgbClr val="000000"/>
                 </a:solidFill>
-                <a:latin typeface="Jua"/>
-                <a:ea typeface="Jua"/>
-                <a:cs typeface="Jua"/>
-                <a:sym typeface="Jua"/>
+                <a:latin typeface="무궁화 고딕"/>
+                <a:ea typeface="무궁화 고딕"/>
+                <a:cs typeface="무궁화 고딕"/>
+                <a:sym typeface="무궁화 고딕"/>
               </a:rPr>
-              <a:t>일본</a:t>
+              <a:t>워싱턴 D.C.</a:t>
             </a:r>
           </a:p>
         </p:txBody>
@@ -11273,66 +11409,62 @@
           <a:chExt cx="0" cy="0"/>
         </a:xfrm>
       </p:grpSpPr>
-      <p:pic>
-        <p:nvPicPr>
-          <p:cNvPr name="Picture 2" id="2"/>
-          <p:cNvPicPr>
-            <a:picLocks noChangeAspect="true"/>
-          </p:cNvPicPr>
-          <p:nvPr/>
-        </p:nvPicPr>
-        <p:blipFill>
-          <a:blip r:embed="rId2"/>
-          <a:srcRect l="0" t="0" r="0" b="0"/>
-          <a:stretch>
-            <a:fillRect/>
-          </a:stretch>
-        </p:blipFill>
+      <p:sp>
+        <p:nvSpPr>
+          <p:cNvPr name="Freeform 2" id="2"/>
+          <p:cNvSpPr/>
+          <p:nvPr/>
+        </p:nvSpPr>
         <p:spPr>
           <a:xfrm flipH="false" flipV="false" rot="0">
-            <a:off x="13655377" y="6809666"/>
-            <a:ext cx="6229999" cy="6954669"/>
-          </a:xfrm>
-          <a:prstGeom prst="rect">
-            <a:avLst/>
-          </a:prstGeom>
-        </p:spPr>
-      </p:pic>
-      <p:pic>
-        <p:nvPicPr>
-          <p:cNvPr name="Picture 3" id="3"/>
-          <p:cNvPicPr>
-            <a:picLocks noChangeAspect="true"/>
-          </p:cNvPicPr>
-          <p:nvPr/>
-        </p:nvPicPr>
-        <p:blipFill>
-          <a:blip r:embed="rId3"/>
-          <a:srcRect l="0" t="0" r="0" b="0"/>
-          <a:stretch>
-            <a:fillRect/>
-          </a:stretch>
-        </p:blipFill>
-        <p:spPr>
-          <a:xfrm flipH="false" flipV="false" rot="0">
-            <a:off x="0" y="0"/>
-            <a:ext cx="6925457" cy="4700654"/>
-          </a:xfrm>
-          <a:prstGeom prst="rect">
-            <a:avLst/>
-          </a:prstGeom>
-        </p:spPr>
-      </p:pic>
-      <p:sp>
-        <p:nvSpPr>
-          <p:cNvPr name="TextBox 4" id="4"/>
+            <a:off x="4713099" y="1028700"/>
+            <a:ext cx="8861801" cy="5897126"/>
+          </a:xfrm>
+          <a:custGeom>
+            <a:avLst/>
+            <a:gdLst/>
+            <a:ahLst/>
+            <a:cxnLst/>
+            <a:rect r="r" b="b" t="t" l="l"/>
+            <a:pathLst>
+              <a:path h="5897126" w="8861801">
+                <a:moveTo>
+                  <a:pt x="0" y="0"/>
+                </a:moveTo>
+                <a:lnTo>
+                  <a:pt x="8861802" y="0"/>
+                </a:lnTo>
+                <a:lnTo>
+                  <a:pt x="8861802" y="5897126"/>
+                </a:lnTo>
+                <a:lnTo>
+                  <a:pt x="0" y="5897126"/>
+                </a:lnTo>
+                <a:lnTo>
+                  <a:pt x="0" y="0"/>
+                </a:lnTo>
+                <a:close/>
+              </a:path>
+            </a:pathLst>
+          </a:custGeom>
+          <a:blipFill>
+            <a:blip r:embed="rId2"/>
+            <a:stretch>
+              <a:fillRect l="0" t="0" r="0" b="0"/>
+            </a:stretch>
+          </a:blipFill>
+        </p:spPr>
+      </p:sp>
+      <p:sp>
+        <p:nvSpPr>
+          <p:cNvPr name="TextBox 3" id="3"/>
           <p:cNvSpPr txBox="true"/>
           <p:nvPr/>
         </p:nvSpPr>
         <p:spPr>
           <a:xfrm rot="0">
-            <a:off x="2717556" y="3895725"/>
-            <a:ext cx="12852888" cy="2200275"/>
+            <a:off x="2717556" y="7343775"/>
+            <a:ext cx="12852888" cy="1914525"/>
           </a:xfrm>
           <a:prstGeom prst="rect">
             <a:avLst/>
@@ -11354,12 +11486,12 @@
                 <a:solidFill>
                   <a:srgbClr val="000000"/>
                 </a:solidFill>
-                <a:latin typeface="Jua"/>
-                <a:ea typeface="Jua"/>
-                <a:cs typeface="Jua"/>
-                <a:sym typeface="Jua"/>
+                <a:latin typeface="무궁화 고딕"/>
+                <a:ea typeface="무궁화 고딕"/>
+                <a:cs typeface="무궁화 고딕"/>
+                <a:sym typeface="무궁화 고딕"/>
               </a:rPr>
-              <a:t>도쿄</a:t>
+              <a:t>일본</a:t>
             </a:r>
           </a:p>
         </p:txBody>
